--- a/projects/金孔雀交易所PPT/金孔雀交易所_Golden_Peacock_Exchange.pptx
+++ b/projects/金孔雀交易所PPT/金孔雀交易所_Golden_Peacock_Exchange.pptx
@@ -20,6 +20,7 @@
     <p:sldId id="268" r:id="rId19"/>
     <p:sldId id="269" r:id="rId20"/>
     <p:sldId id="270" r:id="rId21"/>
+    <p:sldId id="271" r:id="rId22"/>
   </p:sldIdLst>
   <p:sldSz cx="12191695" cy="6858000" type="screen4x3"/>
   <p:notesSz cx="6858000" cy="9144000"/>
@@ -3586,7 +3587,7 @@
               </a:defRPr>
             </a:pPr>
             <a:r>
-              <a:t>1/15</a:t>
+              <a:t>1/16</a:t>
             </a:r>
           </a:p>
         </p:txBody>
@@ -3691,7 +3692,7 @@
               </a:defRPr>
             </a:pPr>
             <a:r>
-              <a:t>未来战略 — RWA资产生态</a:t>
+              <a:t>合伙人收益计划</a:t>
             </a:r>
           </a:p>
         </p:txBody>
@@ -3727,7 +3728,7 @@
               </a:defRPr>
             </a:pPr>
             <a:r>
-              <a:t>Future Vision: RWA Asset Ecosystem</a:t>
+              <a:t>Partner Revenue Sharing — Stake GPC, Share Exchange Fees</a:t>
             </a:r>
           </a:p>
         </p:txBody>
@@ -3806,7 +3807,7 @@
               </a:defRPr>
             </a:pPr>
             <a:r>
-              <a:t>10/15</a:t>
+              <a:t>10/16</a:t>
             </a:r>
           </a:p>
         </p:txBody>
@@ -3887,7 +3888,7 @@
               </a:defRPr>
             </a:pPr>
             <a:r>
-              <a:t>战略定位</a:t>
+              <a:t>核心理念</a:t>
             </a:r>
           </a:p>
         </p:txBody>
@@ -3923,7 +3924,7 @@
               </a:defRPr>
             </a:pPr>
             <a:r>
-              <a:t>金孔雀交易所以数字资产交易平台为起点，长远目标是成为东南亚领先的RWA（真实世界资产）发行与交易平台</a:t>
+              <a:t>持有并质押GPC，即可成为金孔雀交易所合伙人，每日分享平台交易手续费收益。质押越多，分润越高。</a:t>
             </a:r>
           </a:p>
         </p:txBody>
@@ -3936,8 +3937,8 @@
         </p:nvSpPr>
         <p:spPr>
           <a:xfrm>
-            <a:off x="731520" y="3017520"/>
-            <a:ext cx="2560320" cy="2011680"/>
+            <a:off x="731520" y="2834640"/>
+            <a:ext cx="2926080" cy="914400"/>
           </a:xfrm>
           <a:prstGeom prst="roundRect">
             <a:avLst/>
@@ -3981,8 +3982,8 @@
         </p:nvSpPr>
         <p:spPr>
           <a:xfrm>
-            <a:off x="1005840" y="3200400"/>
-            <a:ext cx="2011680" cy="457200"/>
+            <a:off x="1005840" y="3017520"/>
+            <a:ext cx="2377440" cy="457200"/>
           </a:xfrm>
           <a:prstGeom prst="rect">
             <a:avLst/>
@@ -4004,7 +4005,7 @@
               </a:defRPr>
             </a:pPr>
             <a:r>
-              <a:t>🏠 房地产RWA</a:t>
+              <a:t>💹 交易所每笔交易</a:t>
             </a:r>
           </a:p>
         </p:txBody>
@@ -4017,8 +4018,8 @@
         </p:nvSpPr>
         <p:spPr>
           <a:xfrm>
-            <a:off x="1005840" y="3657600"/>
-            <a:ext cx="2011680" cy="1188720"/>
+            <a:off x="1005840" y="3474720"/>
+            <a:ext cx="2377440" cy="91440"/>
           </a:xfrm>
           <a:prstGeom prst="rect">
             <a:avLst/>
@@ -4040,25 +4041,327 @@
               </a:defRPr>
             </a:pPr>
             <a:r>
-              <a:t>泰国芭提雅\高端房地产项目</a:t>
-            </a:r>
-            <a:br/>
-            <a:r>
-              <a:t>（规划中）</a:t>
-            </a:r>
-          </a:p>
-        </p:txBody>
-      </p:sp>
-      <p:sp>
-        <p:nvSpPr>
-          <p:cNvPr id="13" name="Rounded Rectangle 12"/>
+              <a:t>产生手续费</a:t>
+            </a:r>
+          </a:p>
+        </p:txBody>
+      </p:sp>
+      <p:sp>
+        <p:nvSpPr>
+          <p:cNvPr id="13" name="TextBox 12"/>
+          <p:cNvSpPr txBox="1"/>
+          <p:nvPr/>
+        </p:nvSpPr>
+        <p:spPr>
+          <a:xfrm>
+            <a:off x="3474720" y="3017520"/>
+            <a:ext cx="914400" cy="548640"/>
+          </a:xfrm>
+          <a:prstGeom prst="rect">
+            <a:avLst/>
+          </a:prstGeom>
+          <a:noFill/>
+        </p:spPr>
+        <p:txBody>
+          <a:bodyPr wrap="square">
+            <a:spAutoFit/>
+          </a:bodyPr>
+          <a:lstStyle/>
+          <a:p>
+            <a:pPr algn="ctr">
+              <a:defRPr sz="2800" b="1">
+                <a:solidFill>
+                  <a:srgbClr val="D4A537"/>
+                </a:solidFill>
+                <a:latin typeface="Microsoft YaHei"/>
+              </a:defRPr>
+            </a:pPr>
+            <a:r>
+              <a:t>→</a:t>
+            </a:r>
+          </a:p>
+        </p:txBody>
+      </p:sp>
+      <p:sp>
+        <p:nvSpPr>
+          <p:cNvPr id="14" name="Rounded Rectangle 13"/>
           <p:cNvSpPr/>
           <p:nvPr/>
         </p:nvSpPr>
         <p:spPr>
           <a:xfrm>
-            <a:off x="3566160" y="3017520"/>
-            <a:ext cx="2560320" cy="2011680"/>
+            <a:off x="3931920" y="2834640"/>
+            <a:ext cx="2560320" cy="914400"/>
+          </a:xfrm>
+          <a:prstGeom prst="roundRect">
+            <a:avLst/>
+          </a:prstGeom>
+          <a:solidFill>
+            <a:srgbClr val="2A3A50"/>
+          </a:solidFill>
+          <a:ln w="12700">
+            <a:solidFill>
+              <a:srgbClr val="B8860B"/>
+            </a:solidFill>
+          </a:ln>
+        </p:spPr>
+        <p:style>
+          <a:lnRef idx="1">
+            <a:schemeClr val="accent1"/>
+          </a:lnRef>
+          <a:fillRef idx="3">
+            <a:schemeClr val="accent1"/>
+          </a:fillRef>
+          <a:effectRef idx="2">
+            <a:schemeClr val="accent1"/>
+          </a:effectRef>
+          <a:fontRef idx="minor">
+            <a:schemeClr val="lt1"/>
+          </a:fontRef>
+        </p:style>
+        <p:txBody>
+          <a:bodyPr rtlCol="0" anchor="ctr"/>
+          <a:lstStyle/>
+          <a:p>
+            <a:pPr algn="ctr"/>
+          </a:p>
+        </p:txBody>
+      </p:sp>
+      <p:sp>
+        <p:nvSpPr>
+          <p:cNvPr id="15" name="TextBox 14"/>
+          <p:cNvSpPr txBox="1"/>
+          <p:nvPr/>
+        </p:nvSpPr>
+        <p:spPr>
+          <a:xfrm>
+            <a:off x="4206240" y="3017520"/>
+            <a:ext cx="2011680" cy="457200"/>
+          </a:xfrm>
+          <a:prstGeom prst="rect">
+            <a:avLst/>
+          </a:prstGeom>
+          <a:noFill/>
+        </p:spPr>
+        <p:txBody>
+          <a:bodyPr wrap="square">
+            <a:spAutoFit/>
+          </a:bodyPr>
+          <a:lstStyle/>
+          <a:p>
+            <a:pPr algn="l">
+              <a:defRPr sz="1600" b="1">
+                <a:solidFill>
+                  <a:srgbClr val="D4A537"/>
+                </a:solidFill>
+                <a:latin typeface="Microsoft YaHei"/>
+              </a:defRPr>
+            </a:pPr>
+            <a:r>
+              <a:t>手续费收入池</a:t>
+            </a:r>
+          </a:p>
+        </p:txBody>
+      </p:sp>
+      <p:sp>
+        <p:nvSpPr>
+          <p:cNvPr id="16" name="TextBox 15"/>
+          <p:cNvSpPr txBox="1"/>
+          <p:nvPr/>
+        </p:nvSpPr>
+        <p:spPr>
+          <a:xfrm>
+            <a:off x="4206240" y="3474720"/>
+            <a:ext cx="2011680" cy="91440"/>
+          </a:xfrm>
+          <a:prstGeom prst="rect">
+            <a:avLst/>
+          </a:prstGeom>
+          <a:noFill/>
+        </p:spPr>
+        <p:txBody>
+          <a:bodyPr wrap="square">
+            <a:spAutoFit/>
+          </a:bodyPr>
+          <a:lstStyle/>
+          <a:p>
+            <a:pPr algn="l">
+              <a:defRPr sz="1300" b="0">
+                <a:solidFill>
+                  <a:srgbClr val="CCCCCC"/>
+                </a:solidFill>
+                <a:latin typeface="Microsoft YaHei"/>
+              </a:defRPr>
+            </a:pPr>
+            <a:r>
+              <a:t>每日汇总结算</a:t>
+            </a:r>
+          </a:p>
+        </p:txBody>
+      </p:sp>
+      <p:sp>
+        <p:nvSpPr>
+          <p:cNvPr id="17" name="TextBox 16"/>
+          <p:cNvSpPr txBox="1"/>
+          <p:nvPr/>
+        </p:nvSpPr>
+        <p:spPr>
+          <a:xfrm>
+            <a:off x="5760720" y="3017520"/>
+            <a:ext cx="914400" cy="548640"/>
+          </a:xfrm>
+          <a:prstGeom prst="rect">
+            <a:avLst/>
+          </a:prstGeom>
+          <a:noFill/>
+        </p:spPr>
+        <p:txBody>
+          <a:bodyPr wrap="square">
+            <a:spAutoFit/>
+          </a:bodyPr>
+          <a:lstStyle/>
+          <a:p>
+            <a:pPr algn="ctr">
+              <a:defRPr sz="2800" b="1">
+                <a:solidFill>
+                  <a:srgbClr val="D4A537"/>
+                </a:solidFill>
+                <a:latin typeface="Microsoft YaHei"/>
+              </a:defRPr>
+            </a:pPr>
+            <a:r>
+              <a:t>→</a:t>
+            </a:r>
+          </a:p>
+        </p:txBody>
+      </p:sp>
+      <p:sp>
+        <p:nvSpPr>
+          <p:cNvPr id="18" name="Rounded Rectangle 17"/>
+          <p:cNvSpPr/>
+          <p:nvPr/>
+        </p:nvSpPr>
+        <p:spPr>
+          <a:xfrm>
+            <a:off x="6217920" y="2834640"/>
+            <a:ext cx="2560320" cy="914400"/>
+          </a:xfrm>
+          <a:prstGeom prst="roundRect">
+            <a:avLst/>
+          </a:prstGeom>
+          <a:solidFill>
+            <a:srgbClr val="2A3A50"/>
+          </a:solidFill>
+          <a:ln w="12700">
+            <a:solidFill>
+              <a:srgbClr val="B8860B"/>
+            </a:solidFill>
+          </a:ln>
+        </p:spPr>
+        <p:style>
+          <a:lnRef idx="1">
+            <a:schemeClr val="accent1"/>
+          </a:lnRef>
+          <a:fillRef idx="3">
+            <a:schemeClr val="accent1"/>
+          </a:fillRef>
+          <a:effectRef idx="2">
+            <a:schemeClr val="accent1"/>
+          </a:effectRef>
+          <a:fontRef idx="minor">
+            <a:schemeClr val="lt1"/>
+          </a:fontRef>
+        </p:style>
+        <p:txBody>
+          <a:bodyPr rtlCol="0" anchor="ctr"/>
+          <a:lstStyle/>
+          <a:p>
+            <a:pPr algn="ctr"/>
+          </a:p>
+        </p:txBody>
+      </p:sp>
+      <p:sp>
+        <p:nvSpPr>
+          <p:cNvPr id="19" name="TextBox 18"/>
+          <p:cNvSpPr txBox="1"/>
+          <p:nvPr/>
+        </p:nvSpPr>
+        <p:spPr>
+          <a:xfrm>
+            <a:off x="6492240" y="3017520"/>
+            <a:ext cx="2011680" cy="457200"/>
+          </a:xfrm>
+          <a:prstGeom prst="rect">
+            <a:avLst/>
+          </a:prstGeom>
+          <a:noFill/>
+        </p:spPr>
+        <p:txBody>
+          <a:bodyPr wrap="square">
+            <a:spAutoFit/>
+          </a:bodyPr>
+          <a:lstStyle/>
+          <a:p>
+            <a:pPr algn="l">
+              <a:defRPr sz="1600" b="1">
+                <a:solidFill>
+                  <a:srgbClr val="D4A537"/>
+                </a:solidFill>
+                <a:latin typeface="Microsoft YaHei"/>
+              </a:defRPr>
+            </a:pPr>
+            <a:r>
+              <a:t>按GPC质押比例</a:t>
+            </a:r>
+          </a:p>
+        </p:txBody>
+      </p:sp>
+      <p:sp>
+        <p:nvSpPr>
+          <p:cNvPr id="20" name="TextBox 19"/>
+          <p:cNvSpPr txBox="1"/>
+          <p:nvPr/>
+        </p:nvSpPr>
+        <p:spPr>
+          <a:xfrm>
+            <a:off x="6492240" y="3474720"/>
+            <a:ext cx="2011680" cy="91440"/>
+          </a:xfrm>
+          <a:prstGeom prst="rect">
+            <a:avLst/>
+          </a:prstGeom>
+          <a:noFill/>
+        </p:spPr>
+        <p:txBody>
+          <a:bodyPr wrap="square">
+            <a:spAutoFit/>
+          </a:bodyPr>
+          <a:lstStyle/>
+          <a:p>
+            <a:pPr algn="l">
+              <a:defRPr sz="1300" b="0">
+                <a:solidFill>
+                  <a:srgbClr val="CCCCCC"/>
+                </a:solidFill>
+                <a:latin typeface="Microsoft YaHei"/>
+              </a:defRPr>
+            </a:pPr>
+            <a:r>
+              <a:t>分配至合伙人</a:t>
+            </a:r>
+          </a:p>
+        </p:txBody>
+      </p:sp>
+      <p:sp>
+        <p:nvSpPr>
+          <p:cNvPr id="21" name="Rounded Rectangle 20"/>
+          <p:cNvSpPr/>
+          <p:nvPr/>
+        </p:nvSpPr>
+        <p:spPr>
+          <a:xfrm>
+            <a:off x="8503920" y="2834640"/>
+            <a:ext cx="2926080" cy="914400"/>
           </a:xfrm>
           <a:prstGeom prst="roundRect">
             <a:avLst/>
@@ -4096,14 +4399,14 @@
       </p:sp>
       <p:sp>
         <p:nvSpPr>
-          <p:cNvPr id="14" name="TextBox 13"/>
-          <p:cNvSpPr txBox="1"/>
-          <p:nvPr/>
-        </p:nvSpPr>
-        <p:spPr>
-          <a:xfrm>
-            <a:off x="3840480" y="3200400"/>
-            <a:ext cx="2011680" cy="457200"/>
+          <p:cNvPr id="22" name="TextBox 21"/>
+          <p:cNvSpPr txBox="1"/>
+          <p:nvPr/>
+        </p:nvSpPr>
+        <p:spPr>
+          <a:xfrm>
+            <a:off x="8778240" y="3017520"/>
+            <a:ext cx="2377440" cy="457200"/>
           </a:xfrm>
           <a:prstGeom prst="rect">
             <a:avLst/>
@@ -4125,21 +4428,21 @@
               </a:defRPr>
             </a:pPr>
             <a:r>
-              <a:t>📦 多资产扩展</a:t>
-            </a:r>
-          </a:p>
-        </p:txBody>
-      </p:sp>
-      <p:sp>
-        <p:nvSpPr>
-          <p:cNvPr id="15" name="TextBox 14"/>
-          <p:cNvSpPr txBox="1"/>
-          <p:nvPr/>
-        </p:nvSpPr>
-        <p:spPr>
-          <a:xfrm>
-            <a:off x="3840480" y="3657600"/>
-            <a:ext cx="2011680" cy="1188720"/>
+              <a:t>💰 合伙人钱包</a:t>
+            </a:r>
+          </a:p>
+        </p:txBody>
+      </p:sp>
+      <p:sp>
+        <p:nvSpPr>
+          <p:cNvPr id="23" name="TextBox 22"/>
+          <p:cNvSpPr txBox="1"/>
+          <p:nvPr/>
+        </p:nvSpPr>
+        <p:spPr>
+          <a:xfrm>
+            <a:off x="8778240" y="3474720"/>
+            <a:ext cx="2377440" cy="91440"/>
           </a:xfrm>
           <a:prstGeom prst="rect">
             <a:avLst/>
@@ -4161,35 +4464,192 @@
               </a:defRPr>
             </a:pPr>
             <a:r>
-              <a:t>商业地产/基建</a:t>
+              <a:t>每日自动到账</a:t>
+            </a:r>
+          </a:p>
+        </p:txBody>
+      </p:sp>
+      <p:sp>
+        <p:nvSpPr>
+          <p:cNvPr id="24" name="TextBox 23"/>
+          <p:cNvSpPr txBox="1"/>
+          <p:nvPr/>
+        </p:nvSpPr>
+        <p:spPr>
+          <a:xfrm>
+            <a:off x="731520" y="4114800"/>
+            <a:ext cx="10698480" cy="365760"/>
+          </a:xfrm>
+          <a:prstGeom prst="rect">
+            <a:avLst/>
+          </a:prstGeom>
+          <a:noFill/>
+        </p:spPr>
+        <p:txBody>
+          <a:bodyPr wrap="square">
+            <a:spAutoFit/>
+          </a:bodyPr>
+          <a:lstStyle/>
+          <a:p>
+            <a:pPr algn="l">
+              <a:defRPr sz="2000" b="1">
+                <a:solidFill>
+                  <a:srgbClr val="D4A537"/>
+                </a:solidFill>
+                <a:latin typeface="Microsoft YaHei"/>
+              </a:defRPr>
+            </a:pPr>
+            <a:r>
+              <a:t>合伙人等级</a:t>
+            </a:r>
+          </a:p>
+        </p:txBody>
+      </p:sp>
+      <p:sp>
+        <p:nvSpPr>
+          <p:cNvPr id="25" name="Rounded Rectangle 24"/>
+          <p:cNvSpPr/>
+          <p:nvPr/>
+        </p:nvSpPr>
+        <p:spPr>
+          <a:xfrm>
+            <a:off x="731520" y="4572000"/>
+            <a:ext cx="5303520" cy="1828800"/>
+          </a:xfrm>
+          <a:prstGeom prst="roundRect">
+            <a:avLst/>
+          </a:prstGeom>
+          <a:solidFill>
+            <a:srgbClr val="1A2A3E"/>
+          </a:solidFill>
+          <a:ln w="25400">
+            <a:solidFill>
+              <a:srgbClr val="D4A537"/>
+            </a:solidFill>
+          </a:ln>
+        </p:spPr>
+        <p:style>
+          <a:lnRef idx="1">
+            <a:schemeClr val="accent1"/>
+          </a:lnRef>
+          <a:fillRef idx="3">
+            <a:schemeClr val="accent1"/>
+          </a:fillRef>
+          <a:effectRef idx="2">
+            <a:schemeClr val="accent1"/>
+          </a:effectRef>
+          <a:fontRef idx="minor">
+            <a:schemeClr val="lt1"/>
+          </a:fontRef>
+        </p:style>
+        <p:txBody>
+          <a:bodyPr rtlCol="0" anchor="ctr"/>
+          <a:lstStyle/>
+          <a:p>
+            <a:pPr algn="ctr"/>
+          </a:p>
+        </p:txBody>
+      </p:sp>
+      <p:sp>
+        <p:nvSpPr>
+          <p:cNvPr id="26" name="TextBox 25"/>
+          <p:cNvSpPr txBox="1"/>
+          <p:nvPr/>
+        </p:nvSpPr>
+        <p:spPr>
+          <a:xfrm>
+            <a:off x="1005840" y="4663440"/>
+            <a:ext cx="4754880" cy="365760"/>
+          </a:xfrm>
+          <a:prstGeom prst="rect">
+            <a:avLst/>
+          </a:prstGeom>
+          <a:noFill/>
+        </p:spPr>
+        <p:txBody>
+          <a:bodyPr wrap="square">
+            <a:spAutoFit/>
+          </a:bodyPr>
+          <a:lstStyle/>
+          <a:p>
+            <a:pPr algn="l">
+              <a:defRPr sz="1800" b="1">
+                <a:solidFill>
+                  <a:srgbClr val="D4A537"/>
+                </a:solidFill>
+                <a:latin typeface="Microsoft YaHei"/>
+              </a:defRPr>
+            </a:pPr>
+            <a:r>
+              <a:t>🌟 创世合伙人</a:t>
+            </a:r>
+          </a:p>
+        </p:txBody>
+      </p:sp>
+      <p:sp>
+        <p:nvSpPr>
+          <p:cNvPr id="27" name="TextBox 26"/>
+          <p:cNvSpPr txBox="1"/>
+          <p:nvPr/>
+        </p:nvSpPr>
+        <p:spPr>
+          <a:xfrm>
+            <a:off x="1005840" y="5029200"/>
+            <a:ext cx="4754880" cy="1188720"/>
+          </a:xfrm>
+          <a:prstGeom prst="rect">
+            <a:avLst/>
+          </a:prstGeom>
+          <a:noFill/>
+        </p:spPr>
+        <p:txBody>
+          <a:bodyPr wrap="square">
+            <a:spAutoFit/>
+          </a:bodyPr>
+          <a:lstStyle/>
+          <a:p>
+            <a:pPr algn="l">
+              <a:defRPr sz="1300" b="0">
+                <a:solidFill>
+                  <a:srgbClr val="CCCCCC"/>
+                </a:solidFill>
+                <a:latin typeface="Microsoft YaHei"/>
+              </a:defRPr>
+            </a:pPr>
+            <a:r>
+              <a:t>• 创世节点持有者（1%配额）</a:t>
             </a:r>
             <a:br/>
             <a:r>
-              <a:t>消费金融/供应链</a:t>
+              <a:t>• 最高分润比例</a:t>
             </a:r>
             <a:br/>
             <a:r>
-              <a:t>等多类型RWA</a:t>
-            </a:r>
-          </a:p>
-        </p:txBody>
-      </p:sp>
-      <p:sp>
-        <p:nvSpPr>
-          <p:cNvPr id="16" name="Rounded Rectangle 15"/>
+              <a:t>• 锁6月 · 12月线性释放</a:t>
+            </a:r>
+            <a:br/>
+            <a:r>
+              <a:t>• 平台早期治理权</a:t>
+            </a:r>
+          </a:p>
+        </p:txBody>
+      </p:sp>
+      <p:sp>
+        <p:nvSpPr>
+          <p:cNvPr id="28" name="Rounded Rectangle 27"/>
           <p:cNvSpPr/>
           <p:nvPr/>
         </p:nvSpPr>
         <p:spPr>
           <a:xfrm>
-            <a:off x="6400800" y="3017520"/>
-            <a:ext cx="2560320" cy="2011680"/>
+            <a:off x="6400800" y="4572000"/>
+            <a:ext cx="5303520" cy="1828800"/>
           </a:xfrm>
           <a:prstGeom prst="roundRect">
             <a:avLst/>
           </a:prstGeom>
           <a:solidFill>
-            <a:srgbClr val="222E44"/>
+            <a:srgbClr val="1A2A3E"/>
           </a:solidFill>
           <a:ln w="12700">
             <a:solidFill>
@@ -4221,14 +4681,14 @@
       </p:sp>
       <p:sp>
         <p:nvSpPr>
-          <p:cNvPr id="17" name="TextBox 16"/>
-          <p:cNvSpPr txBox="1"/>
-          <p:nvPr/>
-        </p:nvSpPr>
-        <p:spPr>
-          <a:xfrm>
-            <a:off x="6675120" y="3200400"/>
-            <a:ext cx="2011680" cy="457200"/>
+          <p:cNvPr id="29" name="TextBox 28"/>
+          <p:cNvSpPr txBox="1"/>
+          <p:nvPr/>
+        </p:nvSpPr>
+        <p:spPr>
+          <a:xfrm>
+            <a:off x="6675120" y="4663440"/>
+            <a:ext cx="4754880" cy="365760"/>
           </a:xfrm>
           <a:prstGeom prst="rect">
             <a:avLst/>
@@ -4242,7 +4702,7 @@
           <a:lstStyle/>
           <a:p>
             <a:pPr algn="l">
-              <a:defRPr sz="1600" b="1">
+              <a:defRPr sz="1800" b="1">
                 <a:solidFill>
                   <a:srgbClr val="D4A537"/>
                 </a:solidFill>
@@ -4250,21 +4710,21 @@
               </a:defRPr>
             </a:pPr>
             <a:r>
-              <a:t>🌏 区域拓展</a:t>
-            </a:r>
-          </a:p>
-        </p:txBody>
-      </p:sp>
-      <p:sp>
-        <p:nvSpPr>
-          <p:cNvPr id="18" name="TextBox 17"/>
-          <p:cNvSpPr txBox="1"/>
-          <p:nvPr/>
-        </p:nvSpPr>
-        <p:spPr>
-          <a:xfrm>
-            <a:off x="6675120" y="3657600"/>
-            <a:ext cx="2011680" cy="1188720"/>
+              <a:t>💎 GPC质押合伙人</a:t>
+            </a:r>
+          </a:p>
+        </p:txBody>
+      </p:sp>
+      <p:sp>
+        <p:nvSpPr>
+          <p:cNvPr id="30" name="TextBox 29"/>
+          <p:cNvSpPr txBox="1"/>
+          <p:nvPr/>
+        </p:nvSpPr>
+        <p:spPr>
+          <a:xfrm>
+            <a:off x="6675120" y="5029200"/>
+            <a:ext cx="4754880" cy="1188720"/>
           </a:xfrm>
           <a:prstGeom prst="rect">
             <a:avLst/>
@@ -4286,219 +4746,19 @@
               </a:defRPr>
             </a:pPr>
             <a:r>
-              <a:t>曼谷/普吉岛</a:t>
+              <a:t>• 任何持有并质押GPC的用户</a:t>
             </a:r>
             <a:br/>
             <a:r>
-              <a:t>越南/印尼/菲律宾</a:t>
+              <a:t>• 按质押数量分配分润比例</a:t>
             </a:r>
             <a:br/>
             <a:r>
-              <a:t>东南亚全覆盖</a:t>
-            </a:r>
-          </a:p>
-        </p:txBody>
-      </p:sp>
-      <p:sp>
-        <p:nvSpPr>
-          <p:cNvPr id="19" name="Rounded Rectangle 18"/>
-          <p:cNvSpPr/>
-          <p:nvPr/>
-        </p:nvSpPr>
-        <p:spPr>
-          <a:xfrm>
-            <a:off x="9235440" y="3017520"/>
-            <a:ext cx="2560320" cy="2011680"/>
-          </a:xfrm>
-          <a:prstGeom prst="roundRect">
-            <a:avLst/>
-          </a:prstGeom>
-          <a:solidFill>
-            <a:srgbClr val="222E44"/>
-          </a:solidFill>
-          <a:ln w="12700">
-            <a:solidFill>
-              <a:srgbClr val="B8860B"/>
-            </a:solidFill>
-          </a:ln>
-        </p:spPr>
-        <p:style>
-          <a:lnRef idx="1">
-            <a:schemeClr val="accent1"/>
-          </a:lnRef>
-          <a:fillRef idx="3">
-            <a:schemeClr val="accent1"/>
-          </a:fillRef>
-          <a:effectRef idx="2">
-            <a:schemeClr val="accent1"/>
-          </a:effectRef>
-          <a:fontRef idx="minor">
-            <a:schemeClr val="lt1"/>
-          </a:fontRef>
-        </p:style>
-        <p:txBody>
-          <a:bodyPr rtlCol="0" anchor="ctr"/>
-          <a:lstStyle/>
-          <a:p>
-            <a:pPr algn="ctr"/>
-          </a:p>
-        </p:txBody>
-      </p:sp>
-      <p:sp>
-        <p:nvSpPr>
-          <p:cNvPr id="20" name="TextBox 19"/>
-          <p:cNvSpPr txBox="1"/>
-          <p:nvPr/>
-        </p:nvSpPr>
-        <p:spPr>
-          <a:xfrm>
-            <a:off x="9509760" y="3200400"/>
-            <a:ext cx="2011680" cy="457200"/>
-          </a:xfrm>
-          <a:prstGeom prst="rect">
-            <a:avLst/>
-          </a:prstGeom>
-          <a:noFill/>
-        </p:spPr>
-        <p:txBody>
-          <a:bodyPr wrap="square">
-            <a:spAutoFit/>
-          </a:bodyPr>
-          <a:lstStyle/>
-          <a:p>
-            <a:pPr algn="l">
-              <a:defRPr sz="1600" b="1">
-                <a:solidFill>
-                  <a:srgbClr val="D4A537"/>
-                </a:solidFill>
-                <a:latin typeface="Microsoft YaHei"/>
-              </a:defRPr>
-            </a:pPr>
-            <a:r>
-              <a:t>🏛️ 合规体系</a:t>
-            </a:r>
-          </a:p>
-        </p:txBody>
-      </p:sp>
-      <p:sp>
-        <p:nvSpPr>
-          <p:cNvPr id="21" name="TextBox 20"/>
-          <p:cNvSpPr txBox="1"/>
-          <p:nvPr/>
-        </p:nvSpPr>
-        <p:spPr>
-          <a:xfrm>
-            <a:off x="9509760" y="3657600"/>
-            <a:ext cx="2011680" cy="1188720"/>
-          </a:xfrm>
-          <a:prstGeom prst="rect">
-            <a:avLst/>
-          </a:prstGeom>
-          <a:noFill/>
-        </p:spPr>
-        <p:txBody>
-          <a:bodyPr wrap="square">
-            <a:spAutoFit/>
-          </a:bodyPr>
-          <a:lstStyle/>
-          <a:p>
-            <a:pPr algn="l">
-              <a:defRPr sz="1300" b="0">
-                <a:solidFill>
-                  <a:srgbClr val="CCCCCC"/>
-                </a:solidFill>
-                <a:latin typeface="Microsoft YaHei"/>
-              </a:defRPr>
-            </a:pPr>
-            <a:r>
-              <a:t>目标区域合规牌照</a:t>
+              <a:t>• 灵活质押，随时退出</a:t>
             </a:r>
             <a:br/>
             <a:r>
-              <a:t>国际审计标准</a:t>
-            </a:r>
-            <a:br/>
-            <a:r>
-              <a:t>投资者权益保护</a:t>
-            </a:r>
-          </a:p>
-        </p:txBody>
-      </p:sp>
-      <p:sp>
-        <p:nvSpPr>
-          <p:cNvPr id="22" name="Rectangle 21"/>
-          <p:cNvSpPr/>
-          <p:nvPr/>
-        </p:nvSpPr>
-        <p:spPr>
-          <a:xfrm>
-            <a:off x="731520" y="5303520"/>
-            <a:ext cx="10698480" cy="548640"/>
-          </a:xfrm>
-          <a:prstGeom prst="rect">
-            <a:avLst/>
-          </a:prstGeom>
-          <a:solidFill>
-            <a:srgbClr val="302020"/>
-          </a:solidFill>
-          <a:ln>
-            <a:noFill/>
-          </a:ln>
-        </p:spPr>
-        <p:style>
-          <a:lnRef idx="1">
-            <a:schemeClr val="accent1"/>
-          </a:lnRef>
-          <a:fillRef idx="3">
-            <a:schemeClr val="accent1"/>
-          </a:fillRef>
-          <a:effectRef idx="2">
-            <a:schemeClr val="accent1"/>
-          </a:effectRef>
-          <a:fontRef idx="minor">
-            <a:schemeClr val="lt1"/>
-          </a:fontRef>
-        </p:style>
-        <p:txBody>
-          <a:bodyPr rtlCol="0" anchor="ctr"/>
-          <a:lstStyle/>
-          <a:p>
-            <a:pPr algn="ctr"/>
-          </a:p>
-        </p:txBody>
-      </p:sp>
-      <p:sp>
-        <p:nvSpPr>
-          <p:cNvPr id="23" name="TextBox 22"/>
-          <p:cNvSpPr txBox="1"/>
-          <p:nvPr/>
-        </p:nvSpPr>
-        <p:spPr>
-          <a:xfrm>
-            <a:off x="914400" y="5349240"/>
-            <a:ext cx="10332720" cy="365760"/>
-          </a:xfrm>
-          <a:prstGeom prst="rect">
-            <a:avLst/>
-          </a:prstGeom>
-          <a:noFill/>
-        </p:spPr>
-        <p:txBody>
-          <a:bodyPr wrap="square">
-            <a:spAutoFit/>
-          </a:bodyPr>
-          <a:lstStyle/>
-          <a:p>
-            <a:pPr algn="ctr">
-              <a:defRPr sz="1400" b="0">
-                <a:solidFill>
-                  <a:srgbClr val="E74C3C"/>
-                </a:solidFill>
-                <a:latin typeface="Microsoft YaHei"/>
-              </a:defRPr>
-            </a:pPr>
-            <a:r>
-              <a:t>⚠ RWA为第二阶段战略规划，当前阶段聚焦平台建设与GPC平台通证生态发展</a:t>
+              <a:t>• 质押越多，分润越高</a:t>
             </a:r>
           </a:p>
         </p:txBody>
@@ -4603,7 +4863,7 @@
               </a:defRPr>
             </a:pPr>
             <a:r>
-              <a:t>发展路线图</a:t>
+              <a:t>未来战略 — RWA资产生态</a:t>
             </a:r>
           </a:p>
         </p:txBody>
@@ -4639,7 +4899,7 @@
               </a:defRPr>
             </a:pPr>
             <a:r>
-              <a:t>Roadmap</a:t>
+              <a:t>Future Vision: RWA Asset Ecosystem</a:t>
             </a:r>
           </a:p>
         </p:txBody>
@@ -4718,7 +4978,7 @@
               </a:defRPr>
             </a:pPr>
             <a:r>
-              <a:t>11/15</a:t>
+              <a:t>11/16</a:t>
             </a:r>
           </a:p>
         </p:txBody>
@@ -4731,17 +4991,19 @@
         </p:nvSpPr>
         <p:spPr>
           <a:xfrm>
-            <a:off x="457200" y="1645920"/>
-            <a:ext cx="2651760" cy="822960"/>
+            <a:off x="731520" y="1645920"/>
+            <a:ext cx="10698480" cy="1097280"/>
           </a:xfrm>
           <a:prstGeom prst="roundRect">
             <a:avLst/>
           </a:prstGeom>
           <a:solidFill>
-            <a:srgbClr val="B8860B"/>
+            <a:srgbClr val="222E44"/>
           </a:solidFill>
-          <a:ln>
-            <a:noFill/>
+          <a:ln w="12700">
+            <a:solidFill>
+              <a:srgbClr val="B8860B"/>
+            </a:solidFill>
           </a:ln>
         </p:spPr>
         <p:style>
@@ -4774,30 +5036,30 @@
         </p:nvSpPr>
         <p:spPr>
           <a:xfrm>
-            <a:off x="457200" y="1691640"/>
-            <a:ext cx="2651760" cy="274320"/>
-          </a:xfrm>
-          <a:prstGeom prst="rect">
-            <a:avLst/>
-          </a:prstGeom>
-          <a:noFill/>
-        </p:spPr>
-        <p:txBody>
-          <a:bodyPr wrap="square">
-            <a:spAutoFit/>
-          </a:bodyPr>
-          <a:lstStyle/>
-          <a:p>
-            <a:pPr algn="ctr">
-              <a:defRPr sz="1300" b="1">
-                <a:solidFill>
-                  <a:srgbClr val="FFFFFF"/>
-                </a:solidFill>
-                <a:latin typeface="Microsoft YaHei"/>
-              </a:defRPr>
-            </a:pPr>
-            <a:r>
-              <a:t>Phase 1 | Q2-Q3 2026</a:t>
+            <a:off x="1005840" y="1828800"/>
+            <a:ext cx="10149840" cy="457200"/>
+          </a:xfrm>
+          <a:prstGeom prst="rect">
+            <a:avLst/>
+          </a:prstGeom>
+          <a:noFill/>
+        </p:spPr>
+        <p:txBody>
+          <a:bodyPr wrap="square">
+            <a:spAutoFit/>
+          </a:bodyPr>
+          <a:lstStyle/>
+          <a:p>
+            <a:pPr algn="l">
+              <a:defRPr sz="1600" b="1">
+                <a:solidFill>
+                  <a:srgbClr val="D4A537"/>
+                </a:solidFill>
+                <a:latin typeface="Microsoft YaHei"/>
+              </a:defRPr>
+            </a:pPr>
+            <a:r>
+              <a:t>战略定位</a:t>
             </a:r>
           </a:p>
         </p:txBody>
@@ -4810,61 +5072,22 @@
         </p:nvSpPr>
         <p:spPr>
           <a:xfrm>
-            <a:off x="457200" y="2011680"/>
-            <a:ext cx="2651760" cy="274320"/>
-          </a:xfrm>
-          <a:prstGeom prst="rect">
-            <a:avLst/>
-          </a:prstGeom>
-          <a:noFill/>
-        </p:spPr>
-        <p:txBody>
-          <a:bodyPr wrap="square">
-            <a:spAutoFit/>
-          </a:bodyPr>
-          <a:lstStyle/>
-          <a:p>
-            <a:pPr algn="ctr">
-              <a:defRPr sz="1200" b="0">
-                <a:solidFill>
-                  <a:srgbClr val="F0D060"/>
-                </a:solidFill>
-                <a:latin typeface="Microsoft YaHei"/>
-              </a:defRPr>
-            </a:pPr>
-            <a:r>
-              <a:t>平台搭建与上线</a:t>
-            </a:r>
-          </a:p>
-        </p:txBody>
-      </p:sp>
-      <p:sp>
-        <p:nvSpPr>
-          <p:cNvPr id="10" name="TextBox 9"/>
-          <p:cNvSpPr txBox="1"/>
-          <p:nvPr/>
-        </p:nvSpPr>
-        <p:spPr>
-          <a:xfrm>
-            <a:off x="640080" y="2651760"/>
-            <a:ext cx="2377440" cy="2286000"/>
-          </a:xfrm>
-          <a:prstGeom prst="rect">
-            <a:avLst/>
-          </a:prstGeom>
-          <a:noFill/>
-        </p:spPr>
-        <p:txBody>
-          <a:bodyPr wrap="square">
-            <a:spAutoFit/>
-          </a:bodyPr>
-          <a:lstStyle/>
-          <a:p>
-            <a:pPr>
-              <a:spcAft>
-                <a:spcPts val="800"/>
-              </a:spcAft>
-              <a:defRPr sz="1200">
+            <a:off x="1005840" y="2286000"/>
+            <a:ext cx="10149840" cy="274320"/>
+          </a:xfrm>
+          <a:prstGeom prst="rect">
+            <a:avLst/>
+          </a:prstGeom>
+          <a:noFill/>
+        </p:spPr>
+        <p:txBody>
+          <a:bodyPr wrap="square">
+            <a:spAutoFit/>
+          </a:bodyPr>
+          <a:lstStyle/>
+          <a:p>
+            <a:pPr algn="l">
+              <a:defRPr sz="1300" b="0">
                 <a:solidFill>
                   <a:srgbClr val="CCCCCC"/>
                 </a:solidFill>
@@ -4872,114 +5095,32 @@
               </a:defRPr>
             </a:pPr>
             <a:r>
-              <a:t>• 完成平台技术开发</a:t>
-            </a:r>
-          </a:p>
-          <a:p>
-            <a:pPr>
-              <a:spcAft>
-                <a:spcPts val="800"/>
-              </a:spcAft>
-              <a:defRPr sz="1200">
-                <a:solidFill>
-                  <a:srgbClr val="CCCCCC"/>
-                </a:solidFill>
-                <a:latin typeface="Microsoft YaHei"/>
-              </a:defRPr>
-            </a:pPr>
-            <a:r>
-              <a:t>• GPC代币合约部署</a:t>
-            </a:r>
-          </a:p>
-          <a:p>
-            <a:pPr>
-              <a:spcAft>
-                <a:spcPts val="800"/>
-              </a:spcAft>
-              <a:defRPr sz="1200">
-                <a:solidFill>
-                  <a:srgbClr val="CCCCCC"/>
-                </a:solidFill>
-                <a:latin typeface="Microsoft YaHei"/>
-              </a:defRPr>
-            </a:pPr>
-            <a:r>
-              <a:t>• 获取合规资质</a:t>
-            </a:r>
-          </a:p>
-          <a:p>
-            <a:pPr>
-              <a:spcAft>
-                <a:spcPts val="800"/>
-              </a:spcAft>
-              <a:defRPr sz="1200">
-                <a:solidFill>
-                  <a:srgbClr val="CCCCCC"/>
-                </a:solidFill>
-                <a:latin typeface="Microsoft YaHei"/>
-              </a:defRPr>
-            </a:pPr>
-            <a:r>
-              <a:t>• 内部测试网运行</a:t>
-            </a:r>
-          </a:p>
-        </p:txBody>
-      </p:sp>
-      <p:sp>
-        <p:nvSpPr>
-          <p:cNvPr id="11" name="TextBox 10"/>
-          <p:cNvSpPr txBox="1"/>
-          <p:nvPr/>
-        </p:nvSpPr>
-        <p:spPr>
-          <a:xfrm>
-            <a:off x="3200400" y="1828800"/>
-            <a:ext cx="274320" cy="457200"/>
-          </a:xfrm>
-          <a:prstGeom prst="rect">
-            <a:avLst/>
-          </a:prstGeom>
-          <a:noFill/>
-        </p:spPr>
-        <p:txBody>
-          <a:bodyPr wrap="square">
-            <a:spAutoFit/>
-          </a:bodyPr>
-          <a:lstStyle/>
-          <a:p>
-            <a:pPr algn="ctr">
-              <a:defRPr sz="2000" b="0">
-                <a:solidFill>
-                  <a:srgbClr val="D4A537"/>
-                </a:solidFill>
-                <a:latin typeface="Microsoft YaHei"/>
-              </a:defRPr>
-            </a:pPr>
-            <a:r>
-              <a:t>→</a:t>
-            </a:r>
-          </a:p>
-        </p:txBody>
-      </p:sp>
-      <p:sp>
-        <p:nvSpPr>
-          <p:cNvPr id="12" name="Rounded Rectangle 11"/>
+              <a:t>金孔雀交易所以数字资产交易平台为起点，长远目标是成为东南亚领先的RWA（真实世界资产）发行与交易平台</a:t>
+            </a:r>
+          </a:p>
+        </p:txBody>
+      </p:sp>
+      <p:sp>
+        <p:nvSpPr>
+          <p:cNvPr id="10" name="Rounded Rectangle 9"/>
           <p:cNvSpPr/>
           <p:nvPr/>
         </p:nvSpPr>
         <p:spPr>
           <a:xfrm>
-            <a:off x="3383280" y="1645920"/>
-            <a:ext cx="2651760" cy="822960"/>
+            <a:off x="731520" y="3017520"/>
+            <a:ext cx="2560320" cy="2011680"/>
           </a:xfrm>
           <a:prstGeom prst="roundRect">
             <a:avLst/>
           </a:prstGeom>
           <a:solidFill>
-            <a:srgbClr val="B8860B"/>
+            <a:srgbClr val="222E44"/>
           </a:solidFill>
-          <a:ln>
-            <a:noFill/>
+          <a:ln w="12700">
+            <a:solidFill>
+              <a:srgbClr val="B8860B"/>
+            </a:solidFill>
           </a:ln>
         </p:spPr>
         <p:style>
@@ -5006,103 +5147,64 @@
       </p:sp>
       <p:sp>
         <p:nvSpPr>
-          <p:cNvPr id="13" name="TextBox 12"/>
-          <p:cNvSpPr txBox="1"/>
-          <p:nvPr/>
-        </p:nvSpPr>
-        <p:spPr>
-          <a:xfrm>
-            <a:off x="3383280" y="1691640"/>
-            <a:ext cx="2651760" cy="274320"/>
-          </a:xfrm>
-          <a:prstGeom prst="rect">
-            <a:avLst/>
-          </a:prstGeom>
-          <a:noFill/>
-        </p:spPr>
-        <p:txBody>
-          <a:bodyPr wrap="square">
-            <a:spAutoFit/>
-          </a:bodyPr>
-          <a:lstStyle/>
-          <a:p>
-            <a:pPr algn="ctr">
-              <a:defRPr sz="1300" b="1">
-                <a:solidFill>
-                  <a:srgbClr val="FFFFFF"/>
-                </a:solidFill>
-                <a:latin typeface="Microsoft YaHei"/>
-              </a:defRPr>
-            </a:pPr>
-            <a:r>
-              <a:t>Phase 2 | Q4 2026</a:t>
-            </a:r>
-          </a:p>
-        </p:txBody>
-      </p:sp>
-      <p:sp>
-        <p:nvSpPr>
-          <p:cNvPr id="14" name="TextBox 13"/>
-          <p:cNvSpPr txBox="1"/>
-          <p:nvPr/>
-        </p:nvSpPr>
-        <p:spPr>
-          <a:xfrm>
-            <a:off x="3383280" y="2011680"/>
-            <a:ext cx="2651760" cy="274320"/>
-          </a:xfrm>
-          <a:prstGeom prst="rect">
-            <a:avLst/>
-          </a:prstGeom>
-          <a:noFill/>
-        </p:spPr>
-        <p:txBody>
-          <a:bodyPr wrap="square">
-            <a:spAutoFit/>
-          </a:bodyPr>
-          <a:lstStyle/>
-          <a:p>
-            <a:pPr algn="ctr">
-              <a:defRPr sz="1200" b="0">
-                <a:solidFill>
-                  <a:srgbClr val="F0D060"/>
-                </a:solidFill>
-                <a:latin typeface="Microsoft YaHei"/>
-              </a:defRPr>
-            </a:pPr>
-            <a:r>
-              <a:t>正式运营启动</a:t>
-            </a:r>
-          </a:p>
-        </p:txBody>
-      </p:sp>
-      <p:sp>
-        <p:nvSpPr>
-          <p:cNvPr id="15" name="TextBox 14"/>
-          <p:cNvSpPr txBox="1"/>
-          <p:nvPr/>
-        </p:nvSpPr>
-        <p:spPr>
-          <a:xfrm>
-            <a:off x="3566160" y="2651760"/>
-            <a:ext cx="2377440" cy="2286000"/>
-          </a:xfrm>
-          <a:prstGeom prst="rect">
-            <a:avLst/>
-          </a:prstGeom>
-          <a:noFill/>
-        </p:spPr>
-        <p:txBody>
-          <a:bodyPr wrap="square">
-            <a:spAutoFit/>
-          </a:bodyPr>
-          <a:lstStyle/>
-          <a:p>
-            <a:pPr>
-              <a:spcAft>
-                <a:spcPts val="800"/>
-              </a:spcAft>
-              <a:defRPr sz="1200">
+          <p:cNvPr id="11" name="TextBox 10"/>
+          <p:cNvSpPr txBox="1"/>
+          <p:nvPr/>
+        </p:nvSpPr>
+        <p:spPr>
+          <a:xfrm>
+            <a:off x="1005840" y="3200400"/>
+            <a:ext cx="2011680" cy="457200"/>
+          </a:xfrm>
+          <a:prstGeom prst="rect">
+            <a:avLst/>
+          </a:prstGeom>
+          <a:noFill/>
+        </p:spPr>
+        <p:txBody>
+          <a:bodyPr wrap="square">
+            <a:spAutoFit/>
+          </a:bodyPr>
+          <a:lstStyle/>
+          <a:p>
+            <a:pPr algn="l">
+              <a:defRPr sz="1600" b="1">
+                <a:solidFill>
+                  <a:srgbClr val="D4A537"/>
+                </a:solidFill>
+                <a:latin typeface="Microsoft YaHei"/>
+              </a:defRPr>
+            </a:pPr>
+            <a:r>
+              <a:t>🏠 房地产RWA</a:t>
+            </a:r>
+          </a:p>
+        </p:txBody>
+      </p:sp>
+      <p:sp>
+        <p:nvSpPr>
+          <p:cNvPr id="12" name="TextBox 11"/>
+          <p:cNvSpPr txBox="1"/>
+          <p:nvPr/>
+        </p:nvSpPr>
+        <p:spPr>
+          <a:xfrm>
+            <a:off x="1005840" y="3657600"/>
+            <a:ext cx="2011680" cy="1188720"/>
+          </a:xfrm>
+          <a:prstGeom prst="rect">
+            <a:avLst/>
+          </a:prstGeom>
+          <a:noFill/>
+        </p:spPr>
+        <p:txBody>
+          <a:bodyPr wrap="square">
+            <a:spAutoFit/>
+          </a:bodyPr>
+          <a:lstStyle/>
+          <a:p>
+            <a:pPr algn="l">
+              <a:defRPr sz="1300" b="0">
                 <a:solidFill>
                   <a:srgbClr val="CCCCCC"/>
                 </a:solidFill>
@@ -5110,114 +5212,36 @@
               </a:defRPr>
             </a:pPr>
             <a:r>
-              <a:t>• 主网上线与交易平台开放</a:t>
-            </a:r>
-          </a:p>
-          <a:p>
-            <a:pPr>
-              <a:spcAft>
-                <a:spcPts val="800"/>
-              </a:spcAft>
-              <a:defRPr sz="1200">
-                <a:solidFill>
-                  <a:srgbClr val="CCCCCC"/>
-                </a:solidFill>
-                <a:latin typeface="Microsoft YaHei"/>
-              </a:defRPr>
-            </a:pPr>
-            <a:r>
-              <a:t>• GPC上线交易</a:t>
-            </a:r>
-          </a:p>
-          <a:p>
-            <a:pPr>
-              <a:spcAft>
-                <a:spcPts val="800"/>
-              </a:spcAft>
-              <a:defRPr sz="1200">
-                <a:solidFill>
-                  <a:srgbClr val="CCCCCC"/>
-                </a:solidFill>
-                <a:latin typeface="Microsoft YaHei"/>
-              </a:defRPr>
-            </a:pPr>
-            <a:r>
-              <a:t>• Launchpad功能上线</a:t>
-            </a:r>
-          </a:p>
-          <a:p>
-            <a:pPr>
-              <a:spcAft>
-                <a:spcPts val="800"/>
-              </a:spcAft>
-              <a:defRPr sz="1200">
-                <a:solidFill>
-                  <a:srgbClr val="CCCCCC"/>
-                </a:solidFill>
-                <a:latin typeface="Microsoft YaHei"/>
-              </a:defRPr>
-            </a:pPr>
-            <a:r>
-              <a:t>• 全球社区建设启动</a:t>
-            </a:r>
-          </a:p>
-        </p:txBody>
-      </p:sp>
-      <p:sp>
-        <p:nvSpPr>
-          <p:cNvPr id="16" name="TextBox 15"/>
-          <p:cNvSpPr txBox="1"/>
-          <p:nvPr/>
-        </p:nvSpPr>
-        <p:spPr>
-          <a:xfrm>
-            <a:off x="6126480" y="1828800"/>
-            <a:ext cx="274320" cy="457200"/>
-          </a:xfrm>
-          <a:prstGeom prst="rect">
-            <a:avLst/>
-          </a:prstGeom>
-          <a:noFill/>
-        </p:spPr>
-        <p:txBody>
-          <a:bodyPr wrap="square">
-            <a:spAutoFit/>
-          </a:bodyPr>
-          <a:lstStyle/>
-          <a:p>
-            <a:pPr algn="ctr">
-              <a:defRPr sz="2000" b="0">
-                <a:solidFill>
-                  <a:srgbClr val="D4A537"/>
-                </a:solidFill>
-                <a:latin typeface="Microsoft YaHei"/>
-              </a:defRPr>
-            </a:pPr>
-            <a:r>
-              <a:t>→</a:t>
-            </a:r>
-          </a:p>
-        </p:txBody>
-      </p:sp>
-      <p:sp>
-        <p:nvSpPr>
-          <p:cNvPr id="17" name="Rounded Rectangle 16"/>
+              <a:t>泰国芭提雅\高端房地产项目</a:t>
+            </a:r>
+            <a:br/>
+            <a:r>
+              <a:t>（规划中）</a:t>
+            </a:r>
+          </a:p>
+        </p:txBody>
+      </p:sp>
+      <p:sp>
+        <p:nvSpPr>
+          <p:cNvPr id="13" name="Rounded Rectangle 12"/>
           <p:cNvSpPr/>
           <p:nvPr/>
         </p:nvSpPr>
         <p:spPr>
           <a:xfrm>
-            <a:off x="6309360" y="1645920"/>
-            <a:ext cx="2651760" cy="822960"/>
+            <a:off x="3566160" y="3017520"/>
+            <a:ext cx="2560320" cy="2011680"/>
           </a:xfrm>
           <a:prstGeom prst="roundRect">
             <a:avLst/>
           </a:prstGeom>
           <a:solidFill>
-            <a:srgbClr val="2A3A50"/>
+            <a:srgbClr val="222E44"/>
           </a:solidFill>
-          <a:ln>
-            <a:noFill/>
+          <a:ln w="12700">
+            <a:solidFill>
+              <a:srgbClr val="B8860B"/>
+            </a:solidFill>
           </a:ln>
         </p:spPr>
         <p:style>
@@ -5244,103 +5268,64 @@
       </p:sp>
       <p:sp>
         <p:nvSpPr>
-          <p:cNvPr id="18" name="TextBox 17"/>
-          <p:cNvSpPr txBox="1"/>
-          <p:nvPr/>
-        </p:nvSpPr>
-        <p:spPr>
-          <a:xfrm>
-            <a:off x="6309360" y="1691640"/>
-            <a:ext cx="2651760" cy="274320"/>
-          </a:xfrm>
-          <a:prstGeom prst="rect">
-            <a:avLst/>
-          </a:prstGeom>
-          <a:noFill/>
-        </p:spPr>
-        <p:txBody>
-          <a:bodyPr wrap="square">
-            <a:spAutoFit/>
-          </a:bodyPr>
-          <a:lstStyle/>
-          <a:p>
-            <a:pPr algn="ctr">
-              <a:defRPr sz="1300" b="1">
-                <a:solidFill>
-                  <a:srgbClr val="FFFFFF"/>
-                </a:solidFill>
-                <a:latin typeface="Microsoft YaHei"/>
-              </a:defRPr>
-            </a:pPr>
-            <a:r>
-              <a:t>Phase 3 | 2027</a:t>
-            </a:r>
-          </a:p>
-        </p:txBody>
-      </p:sp>
-      <p:sp>
-        <p:nvSpPr>
-          <p:cNvPr id="19" name="TextBox 18"/>
-          <p:cNvSpPr txBox="1"/>
-          <p:nvPr/>
-        </p:nvSpPr>
-        <p:spPr>
-          <a:xfrm>
-            <a:off x="6309360" y="2011680"/>
-            <a:ext cx="2651760" cy="274320"/>
-          </a:xfrm>
-          <a:prstGeom prst="rect">
-            <a:avLst/>
-          </a:prstGeom>
-          <a:noFill/>
-        </p:spPr>
-        <p:txBody>
-          <a:bodyPr wrap="square">
-            <a:spAutoFit/>
-          </a:bodyPr>
-          <a:lstStyle/>
-          <a:p>
-            <a:pPr algn="ctr">
-              <a:defRPr sz="1200" b="0">
-                <a:solidFill>
-                  <a:srgbClr val="F0D060"/>
-                </a:solidFill>
-                <a:latin typeface="Microsoft YaHei"/>
-              </a:defRPr>
-            </a:pPr>
-            <a:r>
-              <a:t>生态扩张</a:t>
-            </a:r>
-          </a:p>
-        </p:txBody>
-      </p:sp>
-      <p:sp>
-        <p:nvSpPr>
-          <p:cNvPr id="20" name="TextBox 19"/>
-          <p:cNvSpPr txBox="1"/>
-          <p:nvPr/>
-        </p:nvSpPr>
-        <p:spPr>
-          <a:xfrm>
-            <a:off x="6492240" y="2651760"/>
-            <a:ext cx="2377440" cy="2286000"/>
-          </a:xfrm>
-          <a:prstGeom prst="rect">
-            <a:avLst/>
-          </a:prstGeom>
-          <a:noFill/>
-        </p:spPr>
-        <p:txBody>
-          <a:bodyPr wrap="square">
-            <a:spAutoFit/>
-          </a:bodyPr>
-          <a:lstStyle/>
-          <a:p>
-            <a:pPr>
-              <a:spcAft>
-                <a:spcPts val="800"/>
-              </a:spcAft>
-              <a:defRPr sz="1200">
+          <p:cNvPr id="14" name="TextBox 13"/>
+          <p:cNvSpPr txBox="1"/>
+          <p:nvPr/>
+        </p:nvSpPr>
+        <p:spPr>
+          <a:xfrm>
+            <a:off x="3840480" y="3200400"/>
+            <a:ext cx="2011680" cy="457200"/>
+          </a:xfrm>
+          <a:prstGeom prst="rect">
+            <a:avLst/>
+          </a:prstGeom>
+          <a:noFill/>
+        </p:spPr>
+        <p:txBody>
+          <a:bodyPr wrap="square">
+            <a:spAutoFit/>
+          </a:bodyPr>
+          <a:lstStyle/>
+          <a:p>
+            <a:pPr algn="l">
+              <a:defRPr sz="1600" b="1">
+                <a:solidFill>
+                  <a:srgbClr val="D4A537"/>
+                </a:solidFill>
+                <a:latin typeface="Microsoft YaHei"/>
+              </a:defRPr>
+            </a:pPr>
+            <a:r>
+              <a:t>📦 多资产扩展</a:t>
+            </a:r>
+          </a:p>
+        </p:txBody>
+      </p:sp>
+      <p:sp>
+        <p:nvSpPr>
+          <p:cNvPr id="15" name="TextBox 14"/>
+          <p:cNvSpPr txBox="1"/>
+          <p:nvPr/>
+        </p:nvSpPr>
+        <p:spPr>
+          <a:xfrm>
+            <a:off x="3840480" y="3657600"/>
+            <a:ext cx="2011680" cy="1188720"/>
+          </a:xfrm>
+          <a:prstGeom prst="rect">
+            <a:avLst/>
+          </a:prstGeom>
+          <a:noFill/>
+        </p:spPr>
+        <p:txBody>
+          <a:bodyPr wrap="square">
+            <a:spAutoFit/>
+          </a:bodyPr>
+          <a:lstStyle/>
+          <a:p>
+            <a:pPr algn="l">
+              <a:defRPr sz="1300" b="0">
                 <a:solidFill>
                   <a:srgbClr val="CCCCCC"/>
                 </a:solidFill>
@@ -5348,114 +5333,40 @@
               </a:defRPr>
             </a:pPr>
             <a:r>
-              <a:t>• 多区域拓展</a:t>
-            </a:r>
-          </a:p>
-          <a:p>
-            <a:pPr>
-              <a:spcAft>
-                <a:spcPts val="800"/>
-              </a:spcAft>
-              <a:defRPr sz="1200">
-                <a:solidFill>
-                  <a:srgbClr val="CCCCCC"/>
-                </a:solidFill>
-                <a:latin typeface="Microsoft YaHei"/>
-              </a:defRPr>
-            </a:pPr>
-            <a:r>
-              <a:t>• 更多交易对上线</a:t>
-            </a:r>
-          </a:p>
-          <a:p>
-            <a:pPr>
-              <a:spcAft>
-                <a:spcPts val="800"/>
-              </a:spcAft>
-              <a:defRPr sz="1200">
-                <a:solidFill>
-                  <a:srgbClr val="CCCCCC"/>
-                </a:solidFill>
-                <a:latin typeface="Microsoft YaHei"/>
-              </a:defRPr>
-            </a:pPr>
-            <a:r>
-              <a:t>• 用户规模增长</a:t>
-            </a:r>
-          </a:p>
-          <a:p>
-            <a:pPr>
-              <a:spcAft>
-                <a:spcPts val="800"/>
-              </a:spcAft>
-              <a:defRPr sz="1200">
-                <a:solidFill>
-                  <a:srgbClr val="CCCCCC"/>
-                </a:solidFill>
-                <a:latin typeface="Microsoft YaHei"/>
-              </a:defRPr>
-            </a:pPr>
-            <a:r>
-              <a:t>• RWA试点项目启动</a:t>
-            </a:r>
-          </a:p>
-        </p:txBody>
-      </p:sp>
-      <p:sp>
-        <p:nvSpPr>
-          <p:cNvPr id="21" name="TextBox 20"/>
-          <p:cNvSpPr txBox="1"/>
-          <p:nvPr/>
-        </p:nvSpPr>
-        <p:spPr>
-          <a:xfrm>
-            <a:off x="9052560" y="1828800"/>
-            <a:ext cx="274320" cy="457200"/>
-          </a:xfrm>
-          <a:prstGeom prst="rect">
-            <a:avLst/>
-          </a:prstGeom>
-          <a:noFill/>
-        </p:spPr>
-        <p:txBody>
-          <a:bodyPr wrap="square">
-            <a:spAutoFit/>
-          </a:bodyPr>
-          <a:lstStyle/>
-          <a:p>
-            <a:pPr algn="ctr">
-              <a:defRPr sz="2000" b="0">
-                <a:solidFill>
-                  <a:srgbClr val="D4A537"/>
-                </a:solidFill>
-                <a:latin typeface="Microsoft YaHei"/>
-              </a:defRPr>
-            </a:pPr>
-            <a:r>
-              <a:t>→</a:t>
-            </a:r>
-          </a:p>
-        </p:txBody>
-      </p:sp>
-      <p:sp>
-        <p:nvSpPr>
-          <p:cNvPr id="22" name="Rounded Rectangle 21"/>
+              <a:t>商业地产/基建</a:t>
+            </a:r>
+            <a:br/>
+            <a:r>
+              <a:t>消费金融/供应链</a:t>
+            </a:r>
+            <a:br/>
+            <a:r>
+              <a:t>等多类型RWA</a:t>
+            </a:r>
+          </a:p>
+        </p:txBody>
+      </p:sp>
+      <p:sp>
+        <p:nvSpPr>
+          <p:cNvPr id="16" name="Rounded Rectangle 15"/>
           <p:cNvSpPr/>
           <p:nvPr/>
         </p:nvSpPr>
         <p:spPr>
           <a:xfrm>
-            <a:off x="9235440" y="1645920"/>
-            <a:ext cx="2651760" cy="822960"/>
+            <a:off x="6400800" y="3017520"/>
+            <a:ext cx="2560320" cy="2011680"/>
           </a:xfrm>
           <a:prstGeom prst="roundRect">
             <a:avLst/>
           </a:prstGeom>
           <a:solidFill>
-            <a:srgbClr val="2A3A50"/>
+            <a:srgbClr val="222E44"/>
           </a:solidFill>
-          <a:ln>
-            <a:noFill/>
+          <a:ln w="12700">
+            <a:solidFill>
+              <a:srgbClr val="B8860B"/>
+            </a:solidFill>
           </a:ln>
         </p:spPr>
         <p:style>
@@ -5482,14 +5393,262 @@
       </p:sp>
       <p:sp>
         <p:nvSpPr>
+          <p:cNvPr id="17" name="TextBox 16"/>
+          <p:cNvSpPr txBox="1"/>
+          <p:nvPr/>
+        </p:nvSpPr>
+        <p:spPr>
+          <a:xfrm>
+            <a:off x="6675120" y="3200400"/>
+            <a:ext cx="2011680" cy="457200"/>
+          </a:xfrm>
+          <a:prstGeom prst="rect">
+            <a:avLst/>
+          </a:prstGeom>
+          <a:noFill/>
+        </p:spPr>
+        <p:txBody>
+          <a:bodyPr wrap="square">
+            <a:spAutoFit/>
+          </a:bodyPr>
+          <a:lstStyle/>
+          <a:p>
+            <a:pPr algn="l">
+              <a:defRPr sz="1600" b="1">
+                <a:solidFill>
+                  <a:srgbClr val="D4A537"/>
+                </a:solidFill>
+                <a:latin typeface="Microsoft YaHei"/>
+              </a:defRPr>
+            </a:pPr>
+            <a:r>
+              <a:t>🌏 区域拓展</a:t>
+            </a:r>
+          </a:p>
+        </p:txBody>
+      </p:sp>
+      <p:sp>
+        <p:nvSpPr>
+          <p:cNvPr id="18" name="TextBox 17"/>
+          <p:cNvSpPr txBox="1"/>
+          <p:nvPr/>
+        </p:nvSpPr>
+        <p:spPr>
+          <a:xfrm>
+            <a:off x="6675120" y="3657600"/>
+            <a:ext cx="2011680" cy="1188720"/>
+          </a:xfrm>
+          <a:prstGeom prst="rect">
+            <a:avLst/>
+          </a:prstGeom>
+          <a:noFill/>
+        </p:spPr>
+        <p:txBody>
+          <a:bodyPr wrap="square">
+            <a:spAutoFit/>
+          </a:bodyPr>
+          <a:lstStyle/>
+          <a:p>
+            <a:pPr algn="l">
+              <a:defRPr sz="1300" b="0">
+                <a:solidFill>
+                  <a:srgbClr val="CCCCCC"/>
+                </a:solidFill>
+                <a:latin typeface="Microsoft YaHei"/>
+              </a:defRPr>
+            </a:pPr>
+            <a:r>
+              <a:t>曼谷/普吉岛</a:t>
+            </a:r>
+            <a:br/>
+            <a:r>
+              <a:t>越南/印尼/菲律宾</a:t>
+            </a:r>
+            <a:br/>
+            <a:r>
+              <a:t>东南亚全覆盖</a:t>
+            </a:r>
+          </a:p>
+        </p:txBody>
+      </p:sp>
+      <p:sp>
+        <p:nvSpPr>
+          <p:cNvPr id="19" name="Rounded Rectangle 18"/>
+          <p:cNvSpPr/>
+          <p:nvPr/>
+        </p:nvSpPr>
+        <p:spPr>
+          <a:xfrm>
+            <a:off x="9235440" y="3017520"/>
+            <a:ext cx="2560320" cy="2011680"/>
+          </a:xfrm>
+          <a:prstGeom prst="roundRect">
+            <a:avLst/>
+          </a:prstGeom>
+          <a:solidFill>
+            <a:srgbClr val="222E44"/>
+          </a:solidFill>
+          <a:ln w="12700">
+            <a:solidFill>
+              <a:srgbClr val="B8860B"/>
+            </a:solidFill>
+          </a:ln>
+        </p:spPr>
+        <p:style>
+          <a:lnRef idx="1">
+            <a:schemeClr val="accent1"/>
+          </a:lnRef>
+          <a:fillRef idx="3">
+            <a:schemeClr val="accent1"/>
+          </a:fillRef>
+          <a:effectRef idx="2">
+            <a:schemeClr val="accent1"/>
+          </a:effectRef>
+          <a:fontRef idx="minor">
+            <a:schemeClr val="lt1"/>
+          </a:fontRef>
+        </p:style>
+        <p:txBody>
+          <a:bodyPr rtlCol="0" anchor="ctr"/>
+          <a:lstStyle/>
+          <a:p>
+            <a:pPr algn="ctr"/>
+          </a:p>
+        </p:txBody>
+      </p:sp>
+      <p:sp>
+        <p:nvSpPr>
+          <p:cNvPr id="20" name="TextBox 19"/>
+          <p:cNvSpPr txBox="1"/>
+          <p:nvPr/>
+        </p:nvSpPr>
+        <p:spPr>
+          <a:xfrm>
+            <a:off x="9509760" y="3200400"/>
+            <a:ext cx="2011680" cy="457200"/>
+          </a:xfrm>
+          <a:prstGeom prst="rect">
+            <a:avLst/>
+          </a:prstGeom>
+          <a:noFill/>
+        </p:spPr>
+        <p:txBody>
+          <a:bodyPr wrap="square">
+            <a:spAutoFit/>
+          </a:bodyPr>
+          <a:lstStyle/>
+          <a:p>
+            <a:pPr algn="l">
+              <a:defRPr sz="1600" b="1">
+                <a:solidFill>
+                  <a:srgbClr val="D4A537"/>
+                </a:solidFill>
+                <a:latin typeface="Microsoft YaHei"/>
+              </a:defRPr>
+            </a:pPr>
+            <a:r>
+              <a:t>🏛️ 合规体系</a:t>
+            </a:r>
+          </a:p>
+        </p:txBody>
+      </p:sp>
+      <p:sp>
+        <p:nvSpPr>
+          <p:cNvPr id="21" name="TextBox 20"/>
+          <p:cNvSpPr txBox="1"/>
+          <p:nvPr/>
+        </p:nvSpPr>
+        <p:spPr>
+          <a:xfrm>
+            <a:off x="9509760" y="3657600"/>
+            <a:ext cx="2011680" cy="1188720"/>
+          </a:xfrm>
+          <a:prstGeom prst="rect">
+            <a:avLst/>
+          </a:prstGeom>
+          <a:noFill/>
+        </p:spPr>
+        <p:txBody>
+          <a:bodyPr wrap="square">
+            <a:spAutoFit/>
+          </a:bodyPr>
+          <a:lstStyle/>
+          <a:p>
+            <a:pPr algn="l">
+              <a:defRPr sz="1300" b="0">
+                <a:solidFill>
+                  <a:srgbClr val="CCCCCC"/>
+                </a:solidFill>
+                <a:latin typeface="Microsoft YaHei"/>
+              </a:defRPr>
+            </a:pPr>
+            <a:r>
+              <a:t>目标区域合规牌照</a:t>
+            </a:r>
+            <a:br/>
+            <a:r>
+              <a:t>国际审计标准</a:t>
+            </a:r>
+            <a:br/>
+            <a:r>
+              <a:t>投资者权益保护</a:t>
+            </a:r>
+          </a:p>
+        </p:txBody>
+      </p:sp>
+      <p:sp>
+        <p:nvSpPr>
+          <p:cNvPr id="22" name="Rectangle 21"/>
+          <p:cNvSpPr/>
+          <p:nvPr/>
+        </p:nvSpPr>
+        <p:spPr>
+          <a:xfrm>
+            <a:off x="731520" y="5303520"/>
+            <a:ext cx="10698480" cy="548640"/>
+          </a:xfrm>
+          <a:prstGeom prst="rect">
+            <a:avLst/>
+          </a:prstGeom>
+          <a:solidFill>
+            <a:srgbClr val="302020"/>
+          </a:solidFill>
+          <a:ln>
+            <a:noFill/>
+          </a:ln>
+        </p:spPr>
+        <p:style>
+          <a:lnRef idx="1">
+            <a:schemeClr val="accent1"/>
+          </a:lnRef>
+          <a:fillRef idx="3">
+            <a:schemeClr val="accent1"/>
+          </a:fillRef>
+          <a:effectRef idx="2">
+            <a:schemeClr val="accent1"/>
+          </a:effectRef>
+          <a:fontRef idx="minor">
+            <a:schemeClr val="lt1"/>
+          </a:fontRef>
+        </p:style>
+        <p:txBody>
+          <a:bodyPr rtlCol="0" anchor="ctr"/>
+          <a:lstStyle/>
+          <a:p>
+            <a:pPr algn="ctr"/>
+          </a:p>
+        </p:txBody>
+      </p:sp>
+      <p:sp>
+        <p:nvSpPr>
           <p:cNvPr id="23" name="TextBox 22"/>
           <p:cNvSpPr txBox="1"/>
           <p:nvPr/>
         </p:nvSpPr>
         <p:spPr>
           <a:xfrm>
-            <a:off x="9235440" y="1691640"/>
-            <a:ext cx="2651760" cy="274320"/>
+            <a:off x="914400" y="5349240"/>
+            <a:ext cx="10332720" cy="365760"/>
           </a:xfrm>
           <a:prstGeom prst="rect">
             <a:avLst/>
@@ -5503,138 +5662,15 @@
           <a:lstStyle/>
           <a:p>
             <a:pPr algn="ctr">
-              <a:defRPr sz="1300" b="1">
-                <a:solidFill>
-                  <a:srgbClr val="FFFFFF"/>
-                </a:solidFill>
-                <a:latin typeface="Microsoft YaHei"/>
-              </a:defRPr>
-            </a:pPr>
-            <a:r>
-              <a:t>Phase 4 | 2028+</a:t>
-            </a:r>
-          </a:p>
-        </p:txBody>
-      </p:sp>
-      <p:sp>
-        <p:nvSpPr>
-          <p:cNvPr id="24" name="TextBox 23"/>
-          <p:cNvSpPr txBox="1"/>
-          <p:nvPr/>
-        </p:nvSpPr>
-        <p:spPr>
-          <a:xfrm>
-            <a:off x="9235440" y="2011680"/>
-            <a:ext cx="2651760" cy="274320"/>
-          </a:xfrm>
-          <a:prstGeom prst="rect">
-            <a:avLst/>
-          </a:prstGeom>
-          <a:noFill/>
-        </p:spPr>
-        <p:txBody>
-          <a:bodyPr wrap="square">
-            <a:spAutoFit/>
-          </a:bodyPr>
-          <a:lstStyle/>
-          <a:p>
-            <a:pPr algn="ctr">
-              <a:defRPr sz="1200" b="0">
-                <a:solidFill>
-                  <a:srgbClr val="F0D060"/>
-                </a:solidFill>
-                <a:latin typeface="Microsoft YaHei"/>
-              </a:defRPr>
-            </a:pPr>
-            <a:r>
-              <a:t>RWA全面布局</a:t>
-            </a:r>
-          </a:p>
-        </p:txBody>
-      </p:sp>
-      <p:sp>
-        <p:nvSpPr>
-          <p:cNvPr id="25" name="TextBox 24"/>
-          <p:cNvSpPr txBox="1"/>
-          <p:nvPr/>
-        </p:nvSpPr>
-        <p:spPr>
-          <a:xfrm>
-            <a:off x="9418320" y="2651760"/>
-            <a:ext cx="2377440" cy="2286000"/>
-          </a:xfrm>
-          <a:prstGeom prst="rect">
-            <a:avLst/>
-          </a:prstGeom>
-          <a:noFill/>
-        </p:spPr>
-        <p:txBody>
-          <a:bodyPr wrap="square">
-            <a:spAutoFit/>
-          </a:bodyPr>
-          <a:lstStyle/>
-          <a:p>
-            <a:pPr>
-              <a:spcAft>
-                <a:spcPts val="800"/>
-              </a:spcAft>
-              <a:defRPr sz="1200">
-                <a:solidFill>
-                  <a:srgbClr val="CCCCCC"/>
-                </a:solidFill>
-                <a:latin typeface="Microsoft YaHei"/>
-              </a:defRPr>
-            </a:pPr>
-            <a:r>
-              <a:t>• RWA资产发行平台上线</a:t>
-            </a:r>
-          </a:p>
-          <a:p>
-            <a:pPr>
-              <a:spcAft>
-                <a:spcPts val="800"/>
-              </a:spcAft>
-              <a:defRPr sz="1200">
-                <a:solidFill>
-                  <a:srgbClr val="CCCCCC"/>
-                </a:solidFill>
-                <a:latin typeface="Microsoft YaHei"/>
-              </a:defRPr>
-            </a:pPr>
-            <a:r>
-              <a:t>• 多类型RWA资产开放</a:t>
-            </a:r>
-          </a:p>
-          <a:p>
-            <a:pPr>
-              <a:spcAft>
-                <a:spcPts val="800"/>
-              </a:spcAft>
-              <a:defRPr sz="1200">
-                <a:solidFill>
-                  <a:srgbClr val="CCCCCC"/>
-                </a:solidFill>
-                <a:latin typeface="Microsoft YaHei"/>
-              </a:defRPr>
-            </a:pPr>
-            <a:r>
-              <a:t>• 成为东南亚RWA标杆</a:t>
-            </a:r>
-          </a:p>
-          <a:p>
-            <a:pPr>
-              <a:spcAft>
-                <a:spcPts val="800"/>
-              </a:spcAft>
-              <a:defRPr sz="1200">
-                <a:solidFill>
-                  <a:srgbClr val="CCCCCC"/>
-                </a:solidFill>
-                <a:latin typeface="Microsoft YaHei"/>
-              </a:defRPr>
-            </a:pPr>
-            <a:r>
-              <a:t>• 建立行业标准</a:t>
+              <a:defRPr sz="1400" b="0">
+                <a:solidFill>
+                  <a:srgbClr val="E74C3C"/>
+                </a:solidFill>
+                <a:latin typeface="Microsoft YaHei"/>
+              </a:defRPr>
+            </a:pPr>
+            <a:r>
+              <a:t>⚠ RWA为第二阶段战略规划，当前阶段聚焦平台建设与GPC平台通证生态发展</a:t>
             </a:r>
           </a:p>
         </p:txBody>
@@ -5739,7 +5775,7 @@
               </a:defRPr>
             </a:pPr>
             <a:r>
-              <a:t>合规与安全</a:t>
+              <a:t>发展路线图</a:t>
             </a:r>
           </a:p>
         </p:txBody>
@@ -5775,7 +5811,7 @@
               </a:defRPr>
             </a:pPr>
             <a:r>
-              <a:t>Compliance &amp; Security</a:t>
+              <a:t>Roadmap</a:t>
             </a:r>
           </a:p>
         </p:txBody>
@@ -5854,7 +5890,7 @@
               </a:defRPr>
             </a:pPr>
             <a:r>
-              <a:t>12/15</a:t>
+              <a:t>12/16</a:t>
             </a:r>
           </a:p>
         </p:txBody>
@@ -5867,19 +5903,17 @@
         </p:nvSpPr>
         <p:spPr>
           <a:xfrm>
-            <a:off x="731520" y="1645920"/>
-            <a:ext cx="5029200" cy="1828800"/>
+            <a:off x="457200" y="1645920"/>
+            <a:ext cx="2651760" cy="822960"/>
           </a:xfrm>
           <a:prstGeom prst="roundRect">
             <a:avLst/>
           </a:prstGeom>
           <a:solidFill>
-            <a:srgbClr val="222E44"/>
+            <a:srgbClr val="B8860B"/>
           </a:solidFill>
-          <a:ln w="12700">
-            <a:solidFill>
-              <a:srgbClr val="B8860B"/>
-            </a:solidFill>
+          <a:ln>
+            <a:noFill/>
           </a:ln>
         </p:spPr>
         <p:style>
@@ -5912,22 +5946,181 @@
         </p:nvSpPr>
         <p:spPr>
           <a:xfrm>
-            <a:off x="1005840" y="1828800"/>
-            <a:ext cx="4480560" cy="457200"/>
-          </a:xfrm>
-          <a:prstGeom prst="rect">
-            <a:avLst/>
-          </a:prstGeom>
-          <a:noFill/>
-        </p:spPr>
-        <p:txBody>
-          <a:bodyPr wrap="square">
-            <a:spAutoFit/>
-          </a:bodyPr>
-          <a:lstStyle/>
-          <a:p>
-            <a:pPr algn="l">
-              <a:defRPr sz="1600" b="1">
+            <a:off x="457200" y="1691640"/>
+            <a:ext cx="2651760" cy="274320"/>
+          </a:xfrm>
+          <a:prstGeom prst="rect">
+            <a:avLst/>
+          </a:prstGeom>
+          <a:noFill/>
+        </p:spPr>
+        <p:txBody>
+          <a:bodyPr wrap="square">
+            <a:spAutoFit/>
+          </a:bodyPr>
+          <a:lstStyle/>
+          <a:p>
+            <a:pPr algn="ctr">
+              <a:defRPr sz="1300" b="1">
+                <a:solidFill>
+                  <a:srgbClr val="FFFFFF"/>
+                </a:solidFill>
+                <a:latin typeface="Microsoft YaHei"/>
+              </a:defRPr>
+            </a:pPr>
+            <a:r>
+              <a:t>Phase 1 | Q2-Q3 2026</a:t>
+            </a:r>
+          </a:p>
+        </p:txBody>
+      </p:sp>
+      <p:sp>
+        <p:nvSpPr>
+          <p:cNvPr id="9" name="TextBox 8"/>
+          <p:cNvSpPr txBox="1"/>
+          <p:nvPr/>
+        </p:nvSpPr>
+        <p:spPr>
+          <a:xfrm>
+            <a:off x="457200" y="2011680"/>
+            <a:ext cx="2651760" cy="274320"/>
+          </a:xfrm>
+          <a:prstGeom prst="rect">
+            <a:avLst/>
+          </a:prstGeom>
+          <a:noFill/>
+        </p:spPr>
+        <p:txBody>
+          <a:bodyPr wrap="square">
+            <a:spAutoFit/>
+          </a:bodyPr>
+          <a:lstStyle/>
+          <a:p>
+            <a:pPr algn="ctr">
+              <a:defRPr sz="1200" b="0">
+                <a:solidFill>
+                  <a:srgbClr val="F0D060"/>
+                </a:solidFill>
+                <a:latin typeface="Microsoft YaHei"/>
+              </a:defRPr>
+            </a:pPr>
+            <a:r>
+              <a:t>平台搭建与上线</a:t>
+            </a:r>
+          </a:p>
+        </p:txBody>
+      </p:sp>
+      <p:sp>
+        <p:nvSpPr>
+          <p:cNvPr id="10" name="TextBox 9"/>
+          <p:cNvSpPr txBox="1"/>
+          <p:nvPr/>
+        </p:nvSpPr>
+        <p:spPr>
+          <a:xfrm>
+            <a:off x="640080" y="2651760"/>
+            <a:ext cx="2377440" cy="2286000"/>
+          </a:xfrm>
+          <a:prstGeom prst="rect">
+            <a:avLst/>
+          </a:prstGeom>
+          <a:noFill/>
+        </p:spPr>
+        <p:txBody>
+          <a:bodyPr wrap="square">
+            <a:spAutoFit/>
+          </a:bodyPr>
+          <a:lstStyle/>
+          <a:p>
+            <a:pPr>
+              <a:spcAft>
+                <a:spcPts val="800"/>
+              </a:spcAft>
+              <a:defRPr sz="1200">
+                <a:solidFill>
+                  <a:srgbClr val="CCCCCC"/>
+                </a:solidFill>
+                <a:latin typeface="Microsoft YaHei"/>
+              </a:defRPr>
+            </a:pPr>
+            <a:r>
+              <a:t>• 完成平台技术开发</a:t>
+            </a:r>
+          </a:p>
+          <a:p>
+            <a:pPr>
+              <a:spcAft>
+                <a:spcPts val="800"/>
+              </a:spcAft>
+              <a:defRPr sz="1200">
+                <a:solidFill>
+                  <a:srgbClr val="CCCCCC"/>
+                </a:solidFill>
+                <a:latin typeface="Microsoft YaHei"/>
+              </a:defRPr>
+            </a:pPr>
+            <a:r>
+              <a:t>• GPC代币合约部署</a:t>
+            </a:r>
+          </a:p>
+          <a:p>
+            <a:pPr>
+              <a:spcAft>
+                <a:spcPts val="800"/>
+              </a:spcAft>
+              <a:defRPr sz="1200">
+                <a:solidFill>
+                  <a:srgbClr val="CCCCCC"/>
+                </a:solidFill>
+                <a:latin typeface="Microsoft YaHei"/>
+              </a:defRPr>
+            </a:pPr>
+            <a:r>
+              <a:t>• 获取合规资质</a:t>
+            </a:r>
+          </a:p>
+          <a:p>
+            <a:pPr>
+              <a:spcAft>
+                <a:spcPts val="800"/>
+              </a:spcAft>
+              <a:defRPr sz="1200">
+                <a:solidFill>
+                  <a:srgbClr val="CCCCCC"/>
+                </a:solidFill>
+                <a:latin typeface="Microsoft YaHei"/>
+              </a:defRPr>
+            </a:pPr>
+            <a:r>
+              <a:t>• 内部测试网运行</a:t>
+            </a:r>
+          </a:p>
+        </p:txBody>
+      </p:sp>
+      <p:sp>
+        <p:nvSpPr>
+          <p:cNvPr id="11" name="TextBox 10"/>
+          <p:cNvSpPr txBox="1"/>
+          <p:nvPr/>
+        </p:nvSpPr>
+        <p:spPr>
+          <a:xfrm>
+            <a:off x="3200400" y="1828800"/>
+            <a:ext cx="274320" cy="457200"/>
+          </a:xfrm>
+          <a:prstGeom prst="rect">
+            <a:avLst/>
+          </a:prstGeom>
+          <a:noFill/>
+        </p:spPr>
+        <p:txBody>
+          <a:bodyPr wrap="square">
+            <a:spAutoFit/>
+          </a:bodyPr>
+          <a:lstStyle/>
+          <a:p>
+            <a:pPr algn="ctr">
+              <a:defRPr sz="2000" b="0">
                 <a:solidFill>
                   <a:srgbClr val="D4A537"/>
                 </a:solidFill>
@@ -5935,80 +6128,30 @@
               </a:defRPr>
             </a:pPr>
             <a:r>
-              <a:t>合规体系</a:t>
-            </a:r>
-          </a:p>
-        </p:txBody>
-      </p:sp>
-      <p:sp>
-        <p:nvSpPr>
-          <p:cNvPr id="9" name="TextBox 8"/>
-          <p:cNvSpPr txBox="1"/>
-          <p:nvPr/>
-        </p:nvSpPr>
-        <p:spPr>
-          <a:xfrm>
-            <a:off x="1005840" y="2286000"/>
-            <a:ext cx="4480560" cy="1005840"/>
-          </a:xfrm>
-          <a:prstGeom prst="rect">
-            <a:avLst/>
-          </a:prstGeom>
-          <a:noFill/>
-        </p:spPr>
-        <p:txBody>
-          <a:bodyPr wrap="square">
-            <a:spAutoFit/>
-          </a:bodyPr>
-          <a:lstStyle/>
-          <a:p>
-            <a:pPr algn="l">
-              <a:defRPr sz="1300" b="0">
-                <a:solidFill>
-                  <a:srgbClr val="CCCCCC"/>
-                </a:solidFill>
-                <a:latin typeface="Microsoft YaHei"/>
-              </a:defRPr>
-            </a:pPr>
-            <a:r>
-              <a:t>🛡️ 持牌运营目标</a:t>
-            </a:r>
-            <a:br/>
-            <a:r>
-              <a:t>🔍 严格KYC/AML体系</a:t>
-            </a:r>
-            <a:br/>
-            <a:r>
-              <a:t>📊 定期审计与透明度报告</a:t>
-            </a:r>
-            <a:br/>
-            <a:r>
-              <a:t>🌐 国际合规标准对标</a:t>
-            </a:r>
-          </a:p>
-        </p:txBody>
-      </p:sp>
-      <p:sp>
-        <p:nvSpPr>
-          <p:cNvPr id="10" name="Rounded Rectangle 9"/>
+              <a:t>→</a:t>
+            </a:r>
+          </a:p>
+        </p:txBody>
+      </p:sp>
+      <p:sp>
+        <p:nvSpPr>
+          <p:cNvPr id="12" name="Rounded Rectangle 11"/>
           <p:cNvSpPr/>
           <p:nvPr/>
         </p:nvSpPr>
         <p:spPr>
           <a:xfrm>
-            <a:off x="6217920" y="1645920"/>
-            <a:ext cx="5029200" cy="1828800"/>
+            <a:off x="3383280" y="1645920"/>
+            <a:ext cx="2651760" cy="822960"/>
           </a:xfrm>
           <a:prstGeom prst="roundRect">
             <a:avLst/>
           </a:prstGeom>
           <a:solidFill>
-            <a:srgbClr val="222E44"/>
+            <a:srgbClr val="B8860B"/>
           </a:solidFill>
-          <a:ln w="12700">
-            <a:solidFill>
-              <a:srgbClr val="B8860B"/>
-            </a:solidFill>
+          <a:ln>
+            <a:noFill/>
           </a:ln>
         </p:spPr>
         <p:style>
@@ -6035,28 +6178,187 @@
       </p:sp>
       <p:sp>
         <p:nvSpPr>
-          <p:cNvPr id="11" name="TextBox 10"/>
-          <p:cNvSpPr txBox="1"/>
-          <p:nvPr/>
-        </p:nvSpPr>
-        <p:spPr>
-          <a:xfrm>
-            <a:off x="6492240" y="1828800"/>
-            <a:ext cx="4480560" cy="457200"/>
-          </a:xfrm>
-          <a:prstGeom prst="rect">
-            <a:avLst/>
-          </a:prstGeom>
-          <a:noFill/>
-        </p:spPr>
-        <p:txBody>
-          <a:bodyPr wrap="square">
-            <a:spAutoFit/>
-          </a:bodyPr>
-          <a:lstStyle/>
-          <a:p>
-            <a:pPr algn="l">
-              <a:defRPr sz="1600" b="1">
+          <p:cNvPr id="13" name="TextBox 12"/>
+          <p:cNvSpPr txBox="1"/>
+          <p:nvPr/>
+        </p:nvSpPr>
+        <p:spPr>
+          <a:xfrm>
+            <a:off x="3383280" y="1691640"/>
+            <a:ext cx="2651760" cy="274320"/>
+          </a:xfrm>
+          <a:prstGeom prst="rect">
+            <a:avLst/>
+          </a:prstGeom>
+          <a:noFill/>
+        </p:spPr>
+        <p:txBody>
+          <a:bodyPr wrap="square">
+            <a:spAutoFit/>
+          </a:bodyPr>
+          <a:lstStyle/>
+          <a:p>
+            <a:pPr algn="ctr">
+              <a:defRPr sz="1300" b="1">
+                <a:solidFill>
+                  <a:srgbClr val="FFFFFF"/>
+                </a:solidFill>
+                <a:latin typeface="Microsoft YaHei"/>
+              </a:defRPr>
+            </a:pPr>
+            <a:r>
+              <a:t>Phase 2 | Q4 2026</a:t>
+            </a:r>
+          </a:p>
+        </p:txBody>
+      </p:sp>
+      <p:sp>
+        <p:nvSpPr>
+          <p:cNvPr id="14" name="TextBox 13"/>
+          <p:cNvSpPr txBox="1"/>
+          <p:nvPr/>
+        </p:nvSpPr>
+        <p:spPr>
+          <a:xfrm>
+            <a:off x="3383280" y="2011680"/>
+            <a:ext cx="2651760" cy="274320"/>
+          </a:xfrm>
+          <a:prstGeom prst="rect">
+            <a:avLst/>
+          </a:prstGeom>
+          <a:noFill/>
+        </p:spPr>
+        <p:txBody>
+          <a:bodyPr wrap="square">
+            <a:spAutoFit/>
+          </a:bodyPr>
+          <a:lstStyle/>
+          <a:p>
+            <a:pPr algn="ctr">
+              <a:defRPr sz="1200" b="0">
+                <a:solidFill>
+                  <a:srgbClr val="F0D060"/>
+                </a:solidFill>
+                <a:latin typeface="Microsoft YaHei"/>
+              </a:defRPr>
+            </a:pPr>
+            <a:r>
+              <a:t>正式运营启动</a:t>
+            </a:r>
+          </a:p>
+        </p:txBody>
+      </p:sp>
+      <p:sp>
+        <p:nvSpPr>
+          <p:cNvPr id="15" name="TextBox 14"/>
+          <p:cNvSpPr txBox="1"/>
+          <p:nvPr/>
+        </p:nvSpPr>
+        <p:spPr>
+          <a:xfrm>
+            <a:off x="3566160" y="2651760"/>
+            <a:ext cx="2377440" cy="2286000"/>
+          </a:xfrm>
+          <a:prstGeom prst="rect">
+            <a:avLst/>
+          </a:prstGeom>
+          <a:noFill/>
+        </p:spPr>
+        <p:txBody>
+          <a:bodyPr wrap="square">
+            <a:spAutoFit/>
+          </a:bodyPr>
+          <a:lstStyle/>
+          <a:p>
+            <a:pPr>
+              <a:spcAft>
+                <a:spcPts val="800"/>
+              </a:spcAft>
+              <a:defRPr sz="1200">
+                <a:solidFill>
+                  <a:srgbClr val="CCCCCC"/>
+                </a:solidFill>
+                <a:latin typeface="Microsoft YaHei"/>
+              </a:defRPr>
+            </a:pPr>
+            <a:r>
+              <a:t>• 主网上线与交易平台开放</a:t>
+            </a:r>
+          </a:p>
+          <a:p>
+            <a:pPr>
+              <a:spcAft>
+                <a:spcPts val="800"/>
+              </a:spcAft>
+              <a:defRPr sz="1200">
+                <a:solidFill>
+                  <a:srgbClr val="CCCCCC"/>
+                </a:solidFill>
+                <a:latin typeface="Microsoft YaHei"/>
+              </a:defRPr>
+            </a:pPr>
+            <a:r>
+              <a:t>• GPC上线交易</a:t>
+            </a:r>
+          </a:p>
+          <a:p>
+            <a:pPr>
+              <a:spcAft>
+                <a:spcPts val="800"/>
+              </a:spcAft>
+              <a:defRPr sz="1200">
+                <a:solidFill>
+                  <a:srgbClr val="CCCCCC"/>
+                </a:solidFill>
+                <a:latin typeface="Microsoft YaHei"/>
+              </a:defRPr>
+            </a:pPr>
+            <a:r>
+              <a:t>• Launchpad功能上线</a:t>
+            </a:r>
+          </a:p>
+          <a:p>
+            <a:pPr>
+              <a:spcAft>
+                <a:spcPts val="800"/>
+              </a:spcAft>
+              <a:defRPr sz="1200">
+                <a:solidFill>
+                  <a:srgbClr val="CCCCCC"/>
+                </a:solidFill>
+                <a:latin typeface="Microsoft YaHei"/>
+              </a:defRPr>
+            </a:pPr>
+            <a:r>
+              <a:t>• 全球社区建设启动</a:t>
+            </a:r>
+          </a:p>
+        </p:txBody>
+      </p:sp>
+      <p:sp>
+        <p:nvSpPr>
+          <p:cNvPr id="16" name="TextBox 15"/>
+          <p:cNvSpPr txBox="1"/>
+          <p:nvPr/>
+        </p:nvSpPr>
+        <p:spPr>
+          <a:xfrm>
+            <a:off x="6126480" y="1828800"/>
+            <a:ext cx="274320" cy="457200"/>
+          </a:xfrm>
+          <a:prstGeom prst="rect">
+            <a:avLst/>
+          </a:prstGeom>
+          <a:noFill/>
+        </p:spPr>
+        <p:txBody>
+          <a:bodyPr wrap="square">
+            <a:spAutoFit/>
+          </a:bodyPr>
+          <a:lstStyle/>
+          <a:p>
+            <a:pPr algn="ctr">
+              <a:defRPr sz="2000" b="0">
                 <a:solidFill>
                   <a:srgbClr val="D4A537"/>
                 </a:solidFill>
@@ -6064,80 +6366,30 @@
               </a:defRPr>
             </a:pPr>
             <a:r>
-              <a:t>安全保障</a:t>
-            </a:r>
-          </a:p>
-        </p:txBody>
-      </p:sp>
-      <p:sp>
-        <p:nvSpPr>
-          <p:cNvPr id="12" name="TextBox 11"/>
-          <p:cNvSpPr txBox="1"/>
-          <p:nvPr/>
-        </p:nvSpPr>
-        <p:spPr>
-          <a:xfrm>
-            <a:off x="6492240" y="2286000"/>
-            <a:ext cx="4480560" cy="1005840"/>
-          </a:xfrm>
-          <a:prstGeom prst="rect">
-            <a:avLst/>
-          </a:prstGeom>
-          <a:noFill/>
-        </p:spPr>
-        <p:txBody>
-          <a:bodyPr wrap="square">
-            <a:spAutoFit/>
-          </a:bodyPr>
-          <a:lstStyle/>
-          <a:p>
-            <a:pPr algn="l">
-              <a:defRPr sz="1300" b="0">
-                <a:solidFill>
-                  <a:srgbClr val="CCCCCC"/>
-                </a:solidFill>
-                <a:latin typeface="Microsoft YaHei"/>
-              </a:defRPr>
-            </a:pPr>
-            <a:r>
-              <a:t>🔒 冷热钱包分离</a:t>
-            </a:r>
-            <a:br/>
-            <a:r>
-              <a:t>🤖 智能合约多重审计</a:t>
-            </a:r>
-            <a:br/>
-            <a:r>
-              <a:t>🕵️ 24/7风控监控</a:t>
-            </a:r>
-            <a:br/>
-            <a:r>
-              <a:t>✅ 多重签名管理</a:t>
-            </a:r>
-          </a:p>
-        </p:txBody>
-      </p:sp>
-      <p:sp>
-        <p:nvSpPr>
-          <p:cNvPr id="13" name="Rounded Rectangle 12"/>
+              <a:t>→</a:t>
+            </a:r>
+          </a:p>
+        </p:txBody>
+      </p:sp>
+      <p:sp>
+        <p:nvSpPr>
+          <p:cNvPr id="17" name="Rounded Rectangle 16"/>
           <p:cNvSpPr/>
           <p:nvPr/>
         </p:nvSpPr>
         <p:spPr>
           <a:xfrm>
-            <a:off x="731520" y="3840480"/>
-            <a:ext cx="2560320" cy="1645920"/>
+            <a:off x="6309360" y="1645920"/>
+            <a:ext cx="2651760" cy="822960"/>
           </a:xfrm>
           <a:prstGeom prst="roundRect">
             <a:avLst/>
           </a:prstGeom>
           <a:solidFill>
-            <a:srgbClr val="222E44"/>
+            <a:srgbClr val="2A3A50"/>
           </a:solidFill>
-          <a:ln w="12700">
-            <a:solidFill>
-              <a:srgbClr val="B8860B"/>
-            </a:solidFill>
+          <a:ln>
+            <a:noFill/>
           </a:ln>
         </p:spPr>
         <p:style>
@@ -6164,28 +6416,187 @@
       </p:sp>
       <p:sp>
         <p:nvSpPr>
-          <p:cNvPr id="14" name="TextBox 13"/>
-          <p:cNvSpPr txBox="1"/>
-          <p:nvPr/>
-        </p:nvSpPr>
-        <p:spPr>
-          <a:xfrm>
-            <a:off x="1005840" y="4023360"/>
-            <a:ext cx="2011680" cy="457200"/>
-          </a:xfrm>
-          <a:prstGeom prst="rect">
-            <a:avLst/>
-          </a:prstGeom>
-          <a:noFill/>
-        </p:spPr>
-        <p:txBody>
-          <a:bodyPr wrap="square">
-            <a:spAutoFit/>
-          </a:bodyPr>
-          <a:lstStyle/>
-          <a:p>
-            <a:pPr algn="l">
-              <a:defRPr sz="1600" b="1">
+          <p:cNvPr id="18" name="TextBox 17"/>
+          <p:cNvSpPr txBox="1"/>
+          <p:nvPr/>
+        </p:nvSpPr>
+        <p:spPr>
+          <a:xfrm>
+            <a:off x="6309360" y="1691640"/>
+            <a:ext cx="2651760" cy="274320"/>
+          </a:xfrm>
+          <a:prstGeom prst="rect">
+            <a:avLst/>
+          </a:prstGeom>
+          <a:noFill/>
+        </p:spPr>
+        <p:txBody>
+          <a:bodyPr wrap="square">
+            <a:spAutoFit/>
+          </a:bodyPr>
+          <a:lstStyle/>
+          <a:p>
+            <a:pPr algn="ctr">
+              <a:defRPr sz="1300" b="1">
+                <a:solidFill>
+                  <a:srgbClr val="FFFFFF"/>
+                </a:solidFill>
+                <a:latin typeface="Microsoft YaHei"/>
+              </a:defRPr>
+            </a:pPr>
+            <a:r>
+              <a:t>Phase 3 | 2027</a:t>
+            </a:r>
+          </a:p>
+        </p:txBody>
+      </p:sp>
+      <p:sp>
+        <p:nvSpPr>
+          <p:cNvPr id="19" name="TextBox 18"/>
+          <p:cNvSpPr txBox="1"/>
+          <p:nvPr/>
+        </p:nvSpPr>
+        <p:spPr>
+          <a:xfrm>
+            <a:off x="6309360" y="2011680"/>
+            <a:ext cx="2651760" cy="274320"/>
+          </a:xfrm>
+          <a:prstGeom prst="rect">
+            <a:avLst/>
+          </a:prstGeom>
+          <a:noFill/>
+        </p:spPr>
+        <p:txBody>
+          <a:bodyPr wrap="square">
+            <a:spAutoFit/>
+          </a:bodyPr>
+          <a:lstStyle/>
+          <a:p>
+            <a:pPr algn="ctr">
+              <a:defRPr sz="1200" b="0">
+                <a:solidFill>
+                  <a:srgbClr val="F0D060"/>
+                </a:solidFill>
+                <a:latin typeface="Microsoft YaHei"/>
+              </a:defRPr>
+            </a:pPr>
+            <a:r>
+              <a:t>生态扩张</a:t>
+            </a:r>
+          </a:p>
+        </p:txBody>
+      </p:sp>
+      <p:sp>
+        <p:nvSpPr>
+          <p:cNvPr id="20" name="TextBox 19"/>
+          <p:cNvSpPr txBox="1"/>
+          <p:nvPr/>
+        </p:nvSpPr>
+        <p:spPr>
+          <a:xfrm>
+            <a:off x="6492240" y="2651760"/>
+            <a:ext cx="2377440" cy="2286000"/>
+          </a:xfrm>
+          <a:prstGeom prst="rect">
+            <a:avLst/>
+          </a:prstGeom>
+          <a:noFill/>
+        </p:spPr>
+        <p:txBody>
+          <a:bodyPr wrap="square">
+            <a:spAutoFit/>
+          </a:bodyPr>
+          <a:lstStyle/>
+          <a:p>
+            <a:pPr>
+              <a:spcAft>
+                <a:spcPts val="800"/>
+              </a:spcAft>
+              <a:defRPr sz="1200">
+                <a:solidFill>
+                  <a:srgbClr val="CCCCCC"/>
+                </a:solidFill>
+                <a:latin typeface="Microsoft YaHei"/>
+              </a:defRPr>
+            </a:pPr>
+            <a:r>
+              <a:t>• 多区域拓展</a:t>
+            </a:r>
+          </a:p>
+          <a:p>
+            <a:pPr>
+              <a:spcAft>
+                <a:spcPts val="800"/>
+              </a:spcAft>
+              <a:defRPr sz="1200">
+                <a:solidFill>
+                  <a:srgbClr val="CCCCCC"/>
+                </a:solidFill>
+                <a:latin typeface="Microsoft YaHei"/>
+              </a:defRPr>
+            </a:pPr>
+            <a:r>
+              <a:t>• 更多交易对上线</a:t>
+            </a:r>
+          </a:p>
+          <a:p>
+            <a:pPr>
+              <a:spcAft>
+                <a:spcPts val="800"/>
+              </a:spcAft>
+              <a:defRPr sz="1200">
+                <a:solidFill>
+                  <a:srgbClr val="CCCCCC"/>
+                </a:solidFill>
+                <a:latin typeface="Microsoft YaHei"/>
+              </a:defRPr>
+            </a:pPr>
+            <a:r>
+              <a:t>• 用户规模增长</a:t>
+            </a:r>
+          </a:p>
+          <a:p>
+            <a:pPr>
+              <a:spcAft>
+                <a:spcPts val="800"/>
+              </a:spcAft>
+              <a:defRPr sz="1200">
+                <a:solidFill>
+                  <a:srgbClr val="CCCCCC"/>
+                </a:solidFill>
+                <a:latin typeface="Microsoft YaHei"/>
+              </a:defRPr>
+            </a:pPr>
+            <a:r>
+              <a:t>• RWA试点项目启动</a:t>
+            </a:r>
+          </a:p>
+        </p:txBody>
+      </p:sp>
+      <p:sp>
+        <p:nvSpPr>
+          <p:cNvPr id="21" name="TextBox 20"/>
+          <p:cNvSpPr txBox="1"/>
+          <p:nvPr/>
+        </p:nvSpPr>
+        <p:spPr>
+          <a:xfrm>
+            <a:off x="9052560" y="1828800"/>
+            <a:ext cx="274320" cy="457200"/>
+          </a:xfrm>
+          <a:prstGeom prst="rect">
+            <a:avLst/>
+          </a:prstGeom>
+          <a:noFill/>
+        </p:spPr>
+        <p:txBody>
+          <a:bodyPr wrap="square">
+            <a:spAutoFit/>
+          </a:bodyPr>
+          <a:lstStyle/>
+          <a:p>
+            <a:pPr algn="ctr">
+              <a:defRPr sz="2000" b="0">
                 <a:solidFill>
                   <a:srgbClr val="D4A537"/>
                 </a:solidFill>
@@ -6193,76 +6604,30 @@
               </a:defRPr>
             </a:pPr>
             <a:r>
-              <a:t>第一层: 账户安全</a:t>
-            </a:r>
-          </a:p>
-        </p:txBody>
-      </p:sp>
-      <p:sp>
-        <p:nvSpPr>
-          <p:cNvPr id="15" name="TextBox 14"/>
-          <p:cNvSpPr txBox="1"/>
-          <p:nvPr/>
-        </p:nvSpPr>
-        <p:spPr>
-          <a:xfrm>
-            <a:off x="1005840" y="4480560"/>
-            <a:ext cx="2011680" cy="822960"/>
-          </a:xfrm>
-          <a:prstGeom prst="rect">
-            <a:avLst/>
-          </a:prstGeom>
-          <a:noFill/>
-        </p:spPr>
-        <p:txBody>
-          <a:bodyPr wrap="square">
-            <a:spAutoFit/>
-          </a:bodyPr>
-          <a:lstStyle/>
-          <a:p>
-            <a:pPr algn="l">
-              <a:defRPr sz="1300" b="0">
-                <a:solidFill>
-                  <a:srgbClr val="CCCCCC"/>
-                </a:solidFill>
-                <a:latin typeface="Microsoft YaHei"/>
-              </a:defRPr>
-            </a:pPr>
-            <a:r>
-              <a:t>二次验证(2FA)</a:t>
-            </a:r>
-            <a:br/>
-            <a:r>
-              <a:t>反钓鱼保护</a:t>
-            </a:r>
-            <a:br/>
-            <a:r>
-              <a:t>登录监控</a:t>
-            </a:r>
-          </a:p>
-        </p:txBody>
-      </p:sp>
-      <p:sp>
-        <p:nvSpPr>
-          <p:cNvPr id="16" name="Rounded Rectangle 15"/>
+              <a:t>→</a:t>
+            </a:r>
+          </a:p>
+        </p:txBody>
+      </p:sp>
+      <p:sp>
+        <p:nvSpPr>
+          <p:cNvPr id="22" name="Rounded Rectangle 21"/>
           <p:cNvSpPr/>
           <p:nvPr/>
         </p:nvSpPr>
         <p:spPr>
           <a:xfrm>
-            <a:off x="3566160" y="3840480"/>
-            <a:ext cx="2560320" cy="1645920"/>
+            <a:off x="9235440" y="1645920"/>
+            <a:ext cx="2651760" cy="822960"/>
           </a:xfrm>
           <a:prstGeom prst="roundRect">
             <a:avLst/>
           </a:prstGeom>
           <a:solidFill>
-            <a:srgbClr val="222E44"/>
+            <a:srgbClr val="2A3A50"/>
           </a:solidFill>
-          <a:ln w="12700">
-            <a:solidFill>
-              <a:srgbClr val="B8860B"/>
-            </a:solidFill>
+          <a:ln>
+            <a:noFill/>
           </a:ln>
         </p:spPr>
         <p:style>
@@ -6289,64 +6654,103 @@
       </p:sp>
       <p:sp>
         <p:nvSpPr>
-          <p:cNvPr id="17" name="TextBox 16"/>
-          <p:cNvSpPr txBox="1"/>
-          <p:nvPr/>
-        </p:nvSpPr>
-        <p:spPr>
-          <a:xfrm>
-            <a:off x="3840480" y="4023360"/>
-            <a:ext cx="2011680" cy="457200"/>
-          </a:xfrm>
-          <a:prstGeom prst="rect">
-            <a:avLst/>
-          </a:prstGeom>
-          <a:noFill/>
-        </p:spPr>
-        <p:txBody>
-          <a:bodyPr wrap="square">
-            <a:spAutoFit/>
-          </a:bodyPr>
-          <a:lstStyle/>
-          <a:p>
-            <a:pPr algn="l">
-              <a:defRPr sz="1600" b="1">
-                <a:solidFill>
-                  <a:srgbClr val="D4A537"/>
-                </a:solidFill>
-                <a:latin typeface="Microsoft YaHei"/>
-              </a:defRPr>
-            </a:pPr>
-            <a:r>
-              <a:t>第二层: 交易安全</a:t>
-            </a:r>
-          </a:p>
-        </p:txBody>
-      </p:sp>
-      <p:sp>
-        <p:nvSpPr>
-          <p:cNvPr id="18" name="TextBox 17"/>
-          <p:cNvSpPr txBox="1"/>
-          <p:nvPr/>
-        </p:nvSpPr>
-        <p:spPr>
-          <a:xfrm>
-            <a:off x="3840480" y="4480560"/>
-            <a:ext cx="2011680" cy="822960"/>
-          </a:xfrm>
-          <a:prstGeom prst="rect">
-            <a:avLst/>
-          </a:prstGeom>
-          <a:noFill/>
-        </p:spPr>
-        <p:txBody>
-          <a:bodyPr wrap="square">
-            <a:spAutoFit/>
-          </a:bodyPr>
-          <a:lstStyle/>
-          <a:p>
-            <a:pPr algn="l">
-              <a:defRPr sz="1300" b="0">
+          <p:cNvPr id="23" name="TextBox 22"/>
+          <p:cNvSpPr txBox="1"/>
+          <p:nvPr/>
+        </p:nvSpPr>
+        <p:spPr>
+          <a:xfrm>
+            <a:off x="9235440" y="1691640"/>
+            <a:ext cx="2651760" cy="274320"/>
+          </a:xfrm>
+          <a:prstGeom prst="rect">
+            <a:avLst/>
+          </a:prstGeom>
+          <a:noFill/>
+        </p:spPr>
+        <p:txBody>
+          <a:bodyPr wrap="square">
+            <a:spAutoFit/>
+          </a:bodyPr>
+          <a:lstStyle/>
+          <a:p>
+            <a:pPr algn="ctr">
+              <a:defRPr sz="1300" b="1">
+                <a:solidFill>
+                  <a:srgbClr val="FFFFFF"/>
+                </a:solidFill>
+                <a:latin typeface="Microsoft YaHei"/>
+              </a:defRPr>
+            </a:pPr>
+            <a:r>
+              <a:t>Phase 4 | 2028+</a:t>
+            </a:r>
+          </a:p>
+        </p:txBody>
+      </p:sp>
+      <p:sp>
+        <p:nvSpPr>
+          <p:cNvPr id="24" name="TextBox 23"/>
+          <p:cNvSpPr txBox="1"/>
+          <p:nvPr/>
+        </p:nvSpPr>
+        <p:spPr>
+          <a:xfrm>
+            <a:off x="9235440" y="2011680"/>
+            <a:ext cx="2651760" cy="274320"/>
+          </a:xfrm>
+          <a:prstGeom prst="rect">
+            <a:avLst/>
+          </a:prstGeom>
+          <a:noFill/>
+        </p:spPr>
+        <p:txBody>
+          <a:bodyPr wrap="square">
+            <a:spAutoFit/>
+          </a:bodyPr>
+          <a:lstStyle/>
+          <a:p>
+            <a:pPr algn="ctr">
+              <a:defRPr sz="1200" b="0">
+                <a:solidFill>
+                  <a:srgbClr val="F0D060"/>
+                </a:solidFill>
+                <a:latin typeface="Microsoft YaHei"/>
+              </a:defRPr>
+            </a:pPr>
+            <a:r>
+              <a:t>RWA全面布局</a:t>
+            </a:r>
+          </a:p>
+        </p:txBody>
+      </p:sp>
+      <p:sp>
+        <p:nvSpPr>
+          <p:cNvPr id="25" name="TextBox 24"/>
+          <p:cNvSpPr txBox="1"/>
+          <p:nvPr/>
+        </p:nvSpPr>
+        <p:spPr>
+          <a:xfrm>
+            <a:off x="9418320" y="2651760"/>
+            <a:ext cx="2377440" cy="2286000"/>
+          </a:xfrm>
+          <a:prstGeom prst="rect">
+            <a:avLst/>
+          </a:prstGeom>
+          <a:noFill/>
+        </p:spPr>
+        <p:txBody>
+          <a:bodyPr wrap="square">
+            <a:spAutoFit/>
+          </a:bodyPr>
+          <a:lstStyle/>
+          <a:p>
+            <a:pPr>
+              <a:spcAft>
+                <a:spcPts val="800"/>
+              </a:spcAft>
+              <a:defRPr sz="1200">
                 <a:solidFill>
                   <a:srgbClr val="CCCCCC"/>
                 </a:solidFill>
@@ -6354,124 +6758,15 @@
               </a:defRPr>
             </a:pPr>
             <a:r>
-              <a:t>风控引擎</a:t>
-            </a:r>
-            <a:br/>
-            <a:r>
-              <a:t>异常交易检测</a:t>
-            </a:r>
-            <a:br/>
-            <a:r>
-              <a:t>提现审核</a:t>
-            </a:r>
-          </a:p>
-        </p:txBody>
-      </p:sp>
-      <p:sp>
-        <p:nvSpPr>
-          <p:cNvPr id="19" name="Rounded Rectangle 18"/>
-          <p:cNvSpPr/>
-          <p:nvPr/>
-        </p:nvSpPr>
-        <p:spPr>
-          <a:xfrm>
-            <a:off x="6400800" y="3840480"/>
-            <a:ext cx="2560320" cy="1645920"/>
-          </a:xfrm>
-          <a:prstGeom prst="roundRect">
-            <a:avLst/>
-          </a:prstGeom>
-          <a:solidFill>
-            <a:srgbClr val="222E44"/>
-          </a:solidFill>
-          <a:ln w="12700">
-            <a:solidFill>
-              <a:srgbClr val="B8860B"/>
-            </a:solidFill>
-          </a:ln>
-        </p:spPr>
-        <p:style>
-          <a:lnRef idx="1">
-            <a:schemeClr val="accent1"/>
-          </a:lnRef>
-          <a:fillRef idx="3">
-            <a:schemeClr val="accent1"/>
-          </a:fillRef>
-          <a:effectRef idx="2">
-            <a:schemeClr val="accent1"/>
-          </a:effectRef>
-          <a:fontRef idx="minor">
-            <a:schemeClr val="lt1"/>
-          </a:fontRef>
-        </p:style>
-        <p:txBody>
-          <a:bodyPr rtlCol="0" anchor="ctr"/>
-          <a:lstStyle/>
-          <a:p>
-            <a:pPr algn="ctr"/>
-          </a:p>
-        </p:txBody>
-      </p:sp>
-      <p:sp>
-        <p:nvSpPr>
-          <p:cNvPr id="20" name="TextBox 19"/>
-          <p:cNvSpPr txBox="1"/>
-          <p:nvPr/>
-        </p:nvSpPr>
-        <p:spPr>
-          <a:xfrm>
-            <a:off x="6675120" y="4023360"/>
-            <a:ext cx="2011680" cy="457200"/>
-          </a:xfrm>
-          <a:prstGeom prst="rect">
-            <a:avLst/>
-          </a:prstGeom>
-          <a:noFill/>
-        </p:spPr>
-        <p:txBody>
-          <a:bodyPr wrap="square">
-            <a:spAutoFit/>
-          </a:bodyPr>
-          <a:lstStyle/>
-          <a:p>
-            <a:pPr algn="l">
-              <a:defRPr sz="1600" b="1">
-                <a:solidFill>
-                  <a:srgbClr val="D4A537"/>
-                </a:solidFill>
-                <a:latin typeface="Microsoft YaHei"/>
-              </a:defRPr>
-            </a:pPr>
-            <a:r>
-              <a:t>第三层: 资产安全</a:t>
-            </a:r>
-          </a:p>
-        </p:txBody>
-      </p:sp>
-      <p:sp>
-        <p:nvSpPr>
-          <p:cNvPr id="21" name="TextBox 20"/>
-          <p:cNvSpPr txBox="1"/>
-          <p:nvPr/>
-        </p:nvSpPr>
-        <p:spPr>
-          <a:xfrm>
-            <a:off x="6675120" y="4480560"/>
-            <a:ext cx="2011680" cy="822960"/>
-          </a:xfrm>
-          <a:prstGeom prst="rect">
-            <a:avLst/>
-          </a:prstGeom>
-          <a:noFill/>
-        </p:spPr>
-        <p:txBody>
-          <a:bodyPr wrap="square">
-            <a:spAutoFit/>
-          </a:bodyPr>
-          <a:lstStyle/>
-          <a:p>
-            <a:pPr algn="l">
-              <a:defRPr sz="1300" b="0">
+              <a:t>• RWA资产发行平台上线</a:t>
+            </a:r>
+          </a:p>
+          <a:p>
+            <a:pPr>
+              <a:spcAft>
+                <a:spcPts val="800"/>
+              </a:spcAft>
+              <a:defRPr sz="1200">
                 <a:solidFill>
                   <a:srgbClr val="CCCCCC"/>
                 </a:solidFill>
@@ -6479,124 +6774,15 @@
               </a:defRPr>
             </a:pPr>
             <a:r>
-              <a:t>冷钱包离线存储</a:t>
-            </a:r>
-            <a:br/>
-            <a:r>
-              <a:t>多签钱包</a:t>
-            </a:r>
-            <a:br/>
-            <a:r>
-              <a:t>保险机制</a:t>
-            </a:r>
-          </a:p>
-        </p:txBody>
-      </p:sp>
-      <p:sp>
-        <p:nvSpPr>
-          <p:cNvPr id="22" name="Rounded Rectangle 21"/>
-          <p:cNvSpPr/>
-          <p:nvPr/>
-        </p:nvSpPr>
-        <p:spPr>
-          <a:xfrm>
-            <a:off x="9235440" y="3840480"/>
-            <a:ext cx="2560320" cy="1645920"/>
-          </a:xfrm>
-          <a:prstGeom prst="roundRect">
-            <a:avLst/>
-          </a:prstGeom>
-          <a:solidFill>
-            <a:srgbClr val="222E44"/>
-          </a:solidFill>
-          <a:ln w="12700">
-            <a:solidFill>
-              <a:srgbClr val="B8860B"/>
-            </a:solidFill>
-          </a:ln>
-        </p:spPr>
-        <p:style>
-          <a:lnRef idx="1">
-            <a:schemeClr val="accent1"/>
-          </a:lnRef>
-          <a:fillRef idx="3">
-            <a:schemeClr val="accent1"/>
-          </a:fillRef>
-          <a:effectRef idx="2">
-            <a:schemeClr val="accent1"/>
-          </a:effectRef>
-          <a:fontRef idx="minor">
-            <a:schemeClr val="lt1"/>
-          </a:fontRef>
-        </p:style>
-        <p:txBody>
-          <a:bodyPr rtlCol="0" anchor="ctr"/>
-          <a:lstStyle/>
-          <a:p>
-            <a:pPr algn="ctr"/>
-          </a:p>
-        </p:txBody>
-      </p:sp>
-      <p:sp>
-        <p:nvSpPr>
-          <p:cNvPr id="23" name="TextBox 22"/>
-          <p:cNvSpPr txBox="1"/>
-          <p:nvPr/>
-        </p:nvSpPr>
-        <p:spPr>
-          <a:xfrm>
-            <a:off x="9509760" y="4023360"/>
-            <a:ext cx="2011680" cy="457200"/>
-          </a:xfrm>
-          <a:prstGeom prst="rect">
-            <a:avLst/>
-          </a:prstGeom>
-          <a:noFill/>
-        </p:spPr>
-        <p:txBody>
-          <a:bodyPr wrap="square">
-            <a:spAutoFit/>
-          </a:bodyPr>
-          <a:lstStyle/>
-          <a:p>
-            <a:pPr algn="l">
-              <a:defRPr sz="1600" b="1">
-                <a:solidFill>
-                  <a:srgbClr val="D4A537"/>
-                </a:solidFill>
-                <a:latin typeface="Microsoft YaHei"/>
-              </a:defRPr>
-            </a:pPr>
-            <a:r>
-              <a:t>第四层: 系统安全</a:t>
-            </a:r>
-          </a:p>
-        </p:txBody>
-      </p:sp>
-      <p:sp>
-        <p:nvSpPr>
-          <p:cNvPr id="24" name="TextBox 23"/>
-          <p:cNvSpPr txBox="1"/>
-          <p:nvPr/>
-        </p:nvSpPr>
-        <p:spPr>
-          <a:xfrm>
-            <a:off x="9509760" y="4480560"/>
-            <a:ext cx="2011680" cy="822960"/>
-          </a:xfrm>
-          <a:prstGeom prst="rect">
-            <a:avLst/>
-          </a:prstGeom>
-          <a:noFill/>
-        </p:spPr>
-        <p:txBody>
-          <a:bodyPr wrap="square">
-            <a:spAutoFit/>
-          </a:bodyPr>
-          <a:lstStyle/>
-          <a:p>
-            <a:pPr algn="l">
-              <a:defRPr sz="1300" b="0">
+              <a:t>• 多类型RWA资产开放</a:t>
+            </a:r>
+          </a:p>
+          <a:p>
+            <a:pPr>
+              <a:spcAft>
+                <a:spcPts val="800"/>
+              </a:spcAft>
+              <a:defRPr sz="1200">
                 <a:solidFill>
                   <a:srgbClr val="CCCCCC"/>
                 </a:solidFill>
@@ -6604,15 +6790,23 @@
               </a:defRPr>
             </a:pPr>
             <a:r>
-              <a:t>代码审计</a:t>
-            </a:r>
-            <a:br/>
-            <a:r>
-              <a:t>渗透测试</a:t>
-            </a:r>
-            <a:br/>
-            <a:r>
-              <a:t>DDoS防护</a:t>
+              <a:t>• 成为东南亚RWA标杆</a:t>
+            </a:r>
+          </a:p>
+          <a:p>
+            <a:pPr>
+              <a:spcAft>
+                <a:spcPts val="800"/>
+              </a:spcAft>
+              <a:defRPr sz="1200">
+                <a:solidFill>
+                  <a:srgbClr val="CCCCCC"/>
+                </a:solidFill>
+                <a:latin typeface="Microsoft YaHei"/>
+              </a:defRPr>
+            </a:pPr>
+            <a:r>
+              <a:t>• 建立行业标准</a:t>
             </a:r>
           </a:p>
         </p:txBody>
@@ -6717,7 +6911,7 @@
               </a:defRPr>
             </a:pPr>
             <a:r>
-              <a:t>风控体系</a:t>
+              <a:t>合规与安全</a:t>
             </a:r>
           </a:p>
         </p:txBody>
@@ -6753,7 +6947,7 @@
               </a:defRPr>
             </a:pPr>
             <a:r>
-              <a:t>Risk Control Framework</a:t>
+              <a:t>Compliance &amp; Security</a:t>
             </a:r>
           </a:p>
         </p:txBody>
@@ -6832,7 +7026,7 @@
               </a:defRPr>
             </a:pPr>
             <a:r>
-              <a:t>13/15</a:t>
+              <a:t>13/16</a:t>
             </a:r>
           </a:p>
         </p:txBody>
@@ -6846,17 +7040,17 @@
         <p:spPr>
           <a:xfrm>
             <a:off x="731520" y="1645920"/>
-            <a:ext cx="2560320" cy="2103120"/>
+            <a:ext cx="5029200" cy="1828800"/>
           </a:xfrm>
           <a:prstGeom prst="roundRect">
             <a:avLst/>
           </a:prstGeom>
           <a:solidFill>
-            <a:srgbClr val="1A2A3E"/>
+            <a:srgbClr val="222E44"/>
           </a:solidFill>
-          <a:ln w="25400">
+          <a:ln w="12700">
             <a:solidFill>
-              <a:srgbClr val="2ECC71"/>
+              <a:srgbClr val="B8860B"/>
             </a:solidFill>
           </a:ln>
         </p:spPr>
@@ -6890,30 +7084,30 @@
         </p:nvSpPr>
         <p:spPr>
           <a:xfrm>
-            <a:off x="731520" y="1737360"/>
-            <a:ext cx="2560320" cy="365760"/>
-          </a:xfrm>
-          <a:prstGeom prst="rect">
-            <a:avLst/>
-          </a:prstGeom>
-          <a:noFill/>
-        </p:spPr>
-        <p:txBody>
-          <a:bodyPr wrap="square">
-            <a:spAutoFit/>
-          </a:bodyPr>
-          <a:lstStyle/>
-          <a:p>
-            <a:pPr algn="ctr">
-              <a:defRPr sz="1400" b="1">
-                <a:solidFill>
-                  <a:srgbClr val="2ECC71"/>
-                </a:solidFill>
-                <a:latin typeface="Microsoft YaHei"/>
-              </a:defRPr>
-            </a:pPr>
-            <a:r>
-              <a:t>第一层</a:t>
+            <a:off x="1005840" y="1828800"/>
+            <a:ext cx="4480560" cy="457200"/>
+          </a:xfrm>
+          <a:prstGeom prst="rect">
+            <a:avLst/>
+          </a:prstGeom>
+          <a:noFill/>
+        </p:spPr>
+        <p:txBody>
+          <a:bodyPr wrap="square">
+            <a:spAutoFit/>
+          </a:bodyPr>
+          <a:lstStyle/>
+          <a:p>
+            <a:pPr algn="l">
+              <a:defRPr sz="1600" b="1">
+                <a:solidFill>
+                  <a:srgbClr val="D4A537"/>
+                </a:solidFill>
+                <a:latin typeface="Microsoft YaHei"/>
+              </a:defRPr>
+            </a:pPr>
+            <a:r>
+              <a:t>合规体系</a:t>
             </a:r>
           </a:p>
         </p:txBody>
@@ -6926,57 +7120,21 @@
         </p:nvSpPr>
         <p:spPr>
           <a:xfrm>
-            <a:off x="731520" y="2103120"/>
-            <a:ext cx="2560320" cy="365760"/>
-          </a:xfrm>
-          <a:prstGeom prst="rect">
-            <a:avLst/>
-          </a:prstGeom>
-          <a:noFill/>
-        </p:spPr>
-        <p:txBody>
-          <a:bodyPr wrap="square">
-            <a:spAutoFit/>
-          </a:bodyPr>
-          <a:lstStyle/>
-          <a:p>
-            <a:pPr algn="ctr">
-              <a:defRPr sz="1600" b="1">
-                <a:solidFill>
-                  <a:srgbClr val="FFFFFF"/>
-                </a:solidFill>
-                <a:latin typeface="Microsoft YaHei"/>
-              </a:defRPr>
-            </a:pPr>
-            <a:r>
-              <a:t>内部风控</a:t>
-            </a:r>
-          </a:p>
-        </p:txBody>
-      </p:sp>
-      <p:sp>
-        <p:nvSpPr>
-          <p:cNvPr id="10" name="TextBox 9"/>
-          <p:cNvSpPr txBox="1"/>
-          <p:nvPr/>
-        </p:nvSpPr>
-        <p:spPr>
-          <a:xfrm>
-            <a:off x="822960" y="2560320"/>
-            <a:ext cx="2377440" cy="914400"/>
-          </a:xfrm>
-          <a:prstGeom prst="rect">
-            <a:avLst/>
-          </a:prstGeom>
-          <a:noFill/>
-        </p:spPr>
-        <p:txBody>
-          <a:bodyPr wrap="square">
-            <a:spAutoFit/>
-          </a:bodyPr>
-          <a:lstStyle/>
-          <a:p>
-            <a:pPr algn="ctr">
+            <a:off x="1005840" y="2286000"/>
+            <a:ext cx="4480560" cy="1005840"/>
+          </a:xfrm>
+          <a:prstGeom prst="rect">
+            <a:avLst/>
+          </a:prstGeom>
+          <a:noFill/>
+        </p:spPr>
+        <p:txBody>
+          <a:bodyPr wrap="square">
+            <a:spAutoFit/>
+          </a:bodyPr>
+          <a:lstStyle/>
+          <a:p>
+            <a:pPr algn="l">
               <a:defRPr sz="1300" b="0">
                 <a:solidFill>
                   <a:srgbClr val="CCCCCC"/>
@@ -6985,39 +7143,43 @@
               </a:defRPr>
             </a:pPr>
             <a:r>
-              <a:t>内控制度健全</a:t>
+              <a:t>🛡️ 持牌运营目标</a:t>
             </a:r>
             <a:br/>
             <a:r>
-              <a:t>操作权限管理</a:t>
+              <a:t>🔍 严格KYC/AML体系</a:t>
             </a:r>
             <a:br/>
             <a:r>
-              <a:t>定期内部审计</a:t>
-            </a:r>
-          </a:p>
-        </p:txBody>
-      </p:sp>
-      <p:sp>
-        <p:nvSpPr>
-          <p:cNvPr id="11" name="Rounded Rectangle 10"/>
+              <a:t>📊 定期审计与透明度报告</a:t>
+            </a:r>
+            <a:br/>
+            <a:r>
+              <a:t>🌐 国际合规标准对标</a:t>
+            </a:r>
+          </a:p>
+        </p:txBody>
+      </p:sp>
+      <p:sp>
+        <p:nvSpPr>
+          <p:cNvPr id="10" name="Rounded Rectangle 9"/>
           <p:cNvSpPr/>
           <p:nvPr/>
         </p:nvSpPr>
         <p:spPr>
           <a:xfrm>
-            <a:off x="3566160" y="1645920"/>
-            <a:ext cx="2560320" cy="2103120"/>
+            <a:off x="6217920" y="1645920"/>
+            <a:ext cx="5029200" cy="1828800"/>
           </a:xfrm>
           <a:prstGeom prst="roundRect">
             <a:avLst/>
           </a:prstGeom>
           <a:solidFill>
-            <a:srgbClr val="1A2A3E"/>
+            <a:srgbClr val="222E44"/>
           </a:solidFill>
-          <a:ln w="25400">
+          <a:ln w="12700">
             <a:solidFill>
-              <a:srgbClr val="549BFF"/>
+              <a:srgbClr val="B8860B"/>
             </a:solidFill>
           </a:ln>
         </p:spPr>
@@ -7045,99 +7207,63 @@
       </p:sp>
       <p:sp>
         <p:nvSpPr>
+          <p:cNvPr id="11" name="TextBox 10"/>
+          <p:cNvSpPr txBox="1"/>
+          <p:nvPr/>
+        </p:nvSpPr>
+        <p:spPr>
+          <a:xfrm>
+            <a:off x="6492240" y="1828800"/>
+            <a:ext cx="4480560" cy="457200"/>
+          </a:xfrm>
+          <a:prstGeom prst="rect">
+            <a:avLst/>
+          </a:prstGeom>
+          <a:noFill/>
+        </p:spPr>
+        <p:txBody>
+          <a:bodyPr wrap="square">
+            <a:spAutoFit/>
+          </a:bodyPr>
+          <a:lstStyle/>
+          <a:p>
+            <a:pPr algn="l">
+              <a:defRPr sz="1600" b="1">
+                <a:solidFill>
+                  <a:srgbClr val="D4A537"/>
+                </a:solidFill>
+                <a:latin typeface="Microsoft YaHei"/>
+              </a:defRPr>
+            </a:pPr>
+            <a:r>
+              <a:t>安全保障</a:t>
+            </a:r>
+          </a:p>
+        </p:txBody>
+      </p:sp>
+      <p:sp>
+        <p:nvSpPr>
           <p:cNvPr id="12" name="TextBox 11"/>
           <p:cNvSpPr txBox="1"/>
           <p:nvPr/>
         </p:nvSpPr>
         <p:spPr>
           <a:xfrm>
-            <a:off x="3566160" y="1737360"/>
-            <a:ext cx="2560320" cy="365760"/>
-          </a:xfrm>
-          <a:prstGeom prst="rect">
-            <a:avLst/>
-          </a:prstGeom>
-          <a:noFill/>
-        </p:spPr>
-        <p:txBody>
-          <a:bodyPr wrap="square">
-            <a:spAutoFit/>
-          </a:bodyPr>
-          <a:lstStyle/>
-          <a:p>
-            <a:pPr algn="ctr">
-              <a:defRPr sz="1400" b="1">
-                <a:solidFill>
-                  <a:srgbClr val="549BFF"/>
-                </a:solidFill>
-                <a:latin typeface="Microsoft YaHei"/>
-              </a:defRPr>
-            </a:pPr>
-            <a:r>
-              <a:t>第二层</a:t>
-            </a:r>
-          </a:p>
-        </p:txBody>
-      </p:sp>
-      <p:sp>
-        <p:nvSpPr>
-          <p:cNvPr id="13" name="TextBox 12"/>
-          <p:cNvSpPr txBox="1"/>
-          <p:nvPr/>
-        </p:nvSpPr>
-        <p:spPr>
-          <a:xfrm>
-            <a:off x="3566160" y="2103120"/>
-            <a:ext cx="2560320" cy="365760"/>
-          </a:xfrm>
-          <a:prstGeom prst="rect">
-            <a:avLst/>
-          </a:prstGeom>
-          <a:noFill/>
-        </p:spPr>
-        <p:txBody>
-          <a:bodyPr wrap="square">
-            <a:spAutoFit/>
-          </a:bodyPr>
-          <a:lstStyle/>
-          <a:p>
-            <a:pPr algn="ctr">
-              <a:defRPr sz="1600" b="1">
-                <a:solidFill>
-                  <a:srgbClr val="FFFFFF"/>
-                </a:solidFill>
-                <a:latin typeface="Microsoft YaHei"/>
-              </a:defRPr>
-            </a:pPr>
-            <a:r>
-              <a:t>技术风控</a:t>
-            </a:r>
-          </a:p>
-        </p:txBody>
-      </p:sp>
-      <p:sp>
-        <p:nvSpPr>
-          <p:cNvPr id="14" name="TextBox 13"/>
-          <p:cNvSpPr txBox="1"/>
-          <p:nvPr/>
-        </p:nvSpPr>
-        <p:spPr>
-          <a:xfrm>
-            <a:off x="3657600" y="2560320"/>
-            <a:ext cx="2377440" cy="914400"/>
-          </a:xfrm>
-          <a:prstGeom prst="rect">
-            <a:avLst/>
-          </a:prstGeom>
-          <a:noFill/>
-        </p:spPr>
-        <p:txBody>
-          <a:bodyPr wrap="square">
-            <a:spAutoFit/>
-          </a:bodyPr>
-          <a:lstStyle/>
-          <a:p>
-            <a:pPr algn="ctr">
+            <a:off x="6492240" y="2286000"/>
+            <a:ext cx="4480560" cy="1005840"/>
+          </a:xfrm>
+          <a:prstGeom prst="rect">
+            <a:avLst/>
+          </a:prstGeom>
+          <a:noFill/>
+        </p:spPr>
+        <p:txBody>
+          <a:bodyPr wrap="square">
+            <a:spAutoFit/>
+          </a:bodyPr>
+          <a:lstStyle/>
+          <a:p>
+            <a:pPr algn="l">
               <a:defRPr sz="1300" b="0">
                 <a:solidFill>
                   <a:srgbClr val="CCCCCC"/>
@@ -7146,39 +7272,43 @@
               </a:defRPr>
             </a:pPr>
             <a:r>
-              <a:t>智能合约审计</a:t>
+              <a:t>🔒 冷热钱包分离</a:t>
             </a:r>
             <a:br/>
             <a:r>
-              <a:t>链上监控预警</a:t>
+              <a:t>🤖 智能合约多重审计</a:t>
             </a:r>
             <a:br/>
             <a:r>
-              <a:t>安全事件响应</a:t>
-            </a:r>
-          </a:p>
-        </p:txBody>
-      </p:sp>
-      <p:sp>
-        <p:nvSpPr>
-          <p:cNvPr id="15" name="Rounded Rectangle 14"/>
+              <a:t>🕵️ 24/7风控监控</a:t>
+            </a:r>
+            <a:br/>
+            <a:r>
+              <a:t>✅ 多重签名管理</a:t>
+            </a:r>
+          </a:p>
+        </p:txBody>
+      </p:sp>
+      <p:sp>
+        <p:nvSpPr>
+          <p:cNvPr id="13" name="Rounded Rectangle 12"/>
           <p:cNvSpPr/>
           <p:nvPr/>
         </p:nvSpPr>
         <p:spPr>
           <a:xfrm>
-            <a:off x="6400800" y="1645920"/>
-            <a:ext cx="2560320" cy="2103120"/>
+            <a:off x="731520" y="3840480"/>
+            <a:ext cx="2560320" cy="1645920"/>
           </a:xfrm>
           <a:prstGeom prst="roundRect">
             <a:avLst/>
           </a:prstGeom>
           <a:solidFill>
-            <a:srgbClr val="1A2A3E"/>
+            <a:srgbClr val="222E44"/>
           </a:solidFill>
-          <a:ln w="25400">
+          <a:ln w="12700">
             <a:solidFill>
-              <a:srgbClr val="D4A537"/>
+              <a:srgbClr val="B8860B"/>
             </a:solidFill>
           </a:ln>
         </p:spPr>
@@ -7206,28 +7336,28 @@
       </p:sp>
       <p:sp>
         <p:nvSpPr>
-          <p:cNvPr id="16" name="TextBox 15"/>
-          <p:cNvSpPr txBox="1"/>
-          <p:nvPr/>
-        </p:nvSpPr>
-        <p:spPr>
-          <a:xfrm>
-            <a:off x="6400800" y="1737360"/>
-            <a:ext cx="2560320" cy="365760"/>
-          </a:xfrm>
-          <a:prstGeom prst="rect">
-            <a:avLst/>
-          </a:prstGeom>
-          <a:noFill/>
-        </p:spPr>
-        <p:txBody>
-          <a:bodyPr wrap="square">
-            <a:spAutoFit/>
-          </a:bodyPr>
-          <a:lstStyle/>
-          <a:p>
-            <a:pPr algn="ctr">
-              <a:defRPr sz="1400" b="1">
+          <p:cNvPr id="14" name="TextBox 13"/>
+          <p:cNvSpPr txBox="1"/>
+          <p:nvPr/>
+        </p:nvSpPr>
+        <p:spPr>
+          <a:xfrm>
+            <a:off x="1005840" y="4023360"/>
+            <a:ext cx="2011680" cy="457200"/>
+          </a:xfrm>
+          <a:prstGeom prst="rect">
+            <a:avLst/>
+          </a:prstGeom>
+          <a:noFill/>
+        </p:spPr>
+        <p:txBody>
+          <a:bodyPr wrap="square">
+            <a:spAutoFit/>
+          </a:bodyPr>
+          <a:lstStyle/>
+          <a:p>
+            <a:pPr algn="l">
+              <a:defRPr sz="1600" b="1">
                 <a:solidFill>
                   <a:srgbClr val="D4A537"/>
                 </a:solidFill>
@@ -7235,70 +7365,34 @@
               </a:defRPr>
             </a:pPr>
             <a:r>
-              <a:t>第三层</a:t>
-            </a:r>
-          </a:p>
-        </p:txBody>
-      </p:sp>
-      <p:sp>
-        <p:nvSpPr>
-          <p:cNvPr id="17" name="TextBox 16"/>
-          <p:cNvSpPr txBox="1"/>
-          <p:nvPr/>
-        </p:nvSpPr>
-        <p:spPr>
-          <a:xfrm>
-            <a:off x="6400800" y="2103120"/>
-            <a:ext cx="2560320" cy="365760"/>
-          </a:xfrm>
-          <a:prstGeom prst="rect">
-            <a:avLst/>
-          </a:prstGeom>
-          <a:noFill/>
-        </p:spPr>
-        <p:txBody>
-          <a:bodyPr wrap="square">
-            <a:spAutoFit/>
-          </a:bodyPr>
-          <a:lstStyle/>
-          <a:p>
-            <a:pPr algn="ctr">
-              <a:defRPr sz="1600" b="1">
-                <a:solidFill>
-                  <a:srgbClr val="FFFFFF"/>
-                </a:solidFill>
-                <a:latin typeface="Microsoft YaHei"/>
-              </a:defRPr>
-            </a:pPr>
-            <a:r>
-              <a:t>合规风控</a:t>
-            </a:r>
-          </a:p>
-        </p:txBody>
-      </p:sp>
-      <p:sp>
-        <p:nvSpPr>
-          <p:cNvPr id="18" name="TextBox 17"/>
-          <p:cNvSpPr txBox="1"/>
-          <p:nvPr/>
-        </p:nvSpPr>
-        <p:spPr>
-          <a:xfrm>
-            <a:off x="6492240" y="2560320"/>
-            <a:ext cx="2377440" cy="914400"/>
-          </a:xfrm>
-          <a:prstGeom prst="rect">
-            <a:avLst/>
-          </a:prstGeom>
-          <a:noFill/>
-        </p:spPr>
-        <p:txBody>
-          <a:bodyPr wrap="square">
-            <a:spAutoFit/>
-          </a:bodyPr>
-          <a:lstStyle/>
-          <a:p>
-            <a:pPr algn="ctr">
+              <a:t>第一层: 账户安全</a:t>
+            </a:r>
+          </a:p>
+        </p:txBody>
+      </p:sp>
+      <p:sp>
+        <p:nvSpPr>
+          <p:cNvPr id="15" name="TextBox 14"/>
+          <p:cNvSpPr txBox="1"/>
+          <p:nvPr/>
+        </p:nvSpPr>
+        <p:spPr>
+          <a:xfrm>
+            <a:off x="1005840" y="4480560"/>
+            <a:ext cx="2011680" cy="822960"/>
+          </a:xfrm>
+          <a:prstGeom prst="rect">
+            <a:avLst/>
+          </a:prstGeom>
+          <a:noFill/>
+        </p:spPr>
+        <p:txBody>
+          <a:bodyPr wrap="square">
+            <a:spAutoFit/>
+          </a:bodyPr>
+          <a:lstStyle/>
+          <a:p>
+            <a:pPr algn="l">
               <a:defRPr sz="1300" b="0">
                 <a:solidFill>
                   <a:srgbClr val="CCCCCC"/>
@@ -7307,39 +7401,39 @@
               </a:defRPr>
             </a:pPr>
             <a:r>
-              <a:t>KYC/AML审核</a:t>
+              <a:t>二次验证(2FA)</a:t>
             </a:r>
             <a:br/>
             <a:r>
-              <a:t>交易监控</a:t>
+              <a:t>反钓鱼保护</a:t>
             </a:r>
             <a:br/>
             <a:r>
-              <a:t>举报与处置</a:t>
-            </a:r>
-          </a:p>
-        </p:txBody>
-      </p:sp>
-      <p:sp>
-        <p:nvSpPr>
-          <p:cNvPr id="19" name="Rounded Rectangle 18"/>
+              <a:t>登录监控</a:t>
+            </a:r>
+          </a:p>
+        </p:txBody>
+      </p:sp>
+      <p:sp>
+        <p:nvSpPr>
+          <p:cNvPr id="16" name="Rounded Rectangle 15"/>
           <p:cNvSpPr/>
           <p:nvPr/>
         </p:nvSpPr>
         <p:spPr>
           <a:xfrm>
-            <a:off x="9235440" y="1645920"/>
-            <a:ext cx="2560320" cy="2103120"/>
+            <a:off x="3566160" y="3840480"/>
+            <a:ext cx="2560320" cy="1645920"/>
           </a:xfrm>
           <a:prstGeom prst="roundRect">
             <a:avLst/>
           </a:prstGeom>
           <a:solidFill>
-            <a:srgbClr val="1A2A3E"/>
+            <a:srgbClr val="222E44"/>
           </a:solidFill>
-          <a:ln w="25400">
+          <a:ln w="12700">
             <a:solidFill>
-              <a:srgbClr val="E74C3C"/>
+              <a:srgbClr val="B8860B"/>
             </a:solidFill>
           </a:ln>
         </p:spPr>
@@ -7367,99 +7461,63 @@
       </p:sp>
       <p:sp>
         <p:nvSpPr>
-          <p:cNvPr id="20" name="TextBox 19"/>
-          <p:cNvSpPr txBox="1"/>
-          <p:nvPr/>
-        </p:nvSpPr>
-        <p:spPr>
-          <a:xfrm>
-            <a:off x="9235440" y="1737360"/>
-            <a:ext cx="2560320" cy="365760"/>
-          </a:xfrm>
-          <a:prstGeom prst="rect">
-            <a:avLst/>
-          </a:prstGeom>
-          <a:noFill/>
-        </p:spPr>
-        <p:txBody>
-          <a:bodyPr wrap="square">
-            <a:spAutoFit/>
-          </a:bodyPr>
-          <a:lstStyle/>
-          <a:p>
-            <a:pPr algn="ctr">
-              <a:defRPr sz="1400" b="1">
-                <a:solidFill>
-                  <a:srgbClr val="E74C3C"/>
-                </a:solidFill>
-                <a:latin typeface="Microsoft YaHei"/>
-              </a:defRPr>
-            </a:pPr>
-            <a:r>
-              <a:t>第四层</a:t>
-            </a:r>
-          </a:p>
-        </p:txBody>
-      </p:sp>
-      <p:sp>
-        <p:nvSpPr>
-          <p:cNvPr id="21" name="TextBox 20"/>
-          <p:cNvSpPr txBox="1"/>
-          <p:nvPr/>
-        </p:nvSpPr>
-        <p:spPr>
-          <a:xfrm>
-            <a:off x="9235440" y="2103120"/>
-            <a:ext cx="2560320" cy="365760"/>
-          </a:xfrm>
-          <a:prstGeom prst="rect">
-            <a:avLst/>
-          </a:prstGeom>
-          <a:noFill/>
-        </p:spPr>
-        <p:txBody>
-          <a:bodyPr wrap="square">
-            <a:spAutoFit/>
-          </a:bodyPr>
-          <a:lstStyle/>
-          <a:p>
-            <a:pPr algn="ctr">
+          <p:cNvPr id="17" name="TextBox 16"/>
+          <p:cNvSpPr txBox="1"/>
+          <p:nvPr/>
+        </p:nvSpPr>
+        <p:spPr>
+          <a:xfrm>
+            <a:off x="3840480" y="4023360"/>
+            <a:ext cx="2011680" cy="457200"/>
+          </a:xfrm>
+          <a:prstGeom prst="rect">
+            <a:avLst/>
+          </a:prstGeom>
+          <a:noFill/>
+        </p:spPr>
+        <p:txBody>
+          <a:bodyPr wrap="square">
+            <a:spAutoFit/>
+          </a:bodyPr>
+          <a:lstStyle/>
+          <a:p>
+            <a:pPr algn="l">
               <a:defRPr sz="1600" b="1">
                 <a:solidFill>
-                  <a:srgbClr val="FFFFFF"/>
-                </a:solidFill>
-                <a:latin typeface="Microsoft YaHei"/>
-              </a:defRPr>
-            </a:pPr>
-            <a:r>
-              <a:t>外部风控</a:t>
-            </a:r>
-          </a:p>
-        </p:txBody>
-      </p:sp>
-      <p:sp>
-        <p:nvSpPr>
-          <p:cNvPr id="22" name="TextBox 21"/>
-          <p:cNvSpPr txBox="1"/>
-          <p:nvPr/>
-        </p:nvSpPr>
-        <p:spPr>
-          <a:xfrm>
-            <a:off x="9326880" y="2560320"/>
-            <a:ext cx="2377440" cy="914400"/>
-          </a:xfrm>
-          <a:prstGeom prst="rect">
-            <a:avLst/>
-          </a:prstGeom>
-          <a:noFill/>
-        </p:spPr>
-        <p:txBody>
-          <a:bodyPr wrap="square">
-            <a:spAutoFit/>
-          </a:bodyPr>
-          <a:lstStyle/>
-          <a:p>
-            <a:pPr algn="ctr">
+                  <a:srgbClr val="D4A537"/>
+                </a:solidFill>
+                <a:latin typeface="Microsoft YaHei"/>
+              </a:defRPr>
+            </a:pPr>
+            <a:r>
+              <a:t>第二层: 交易安全</a:t>
+            </a:r>
+          </a:p>
+        </p:txBody>
+      </p:sp>
+      <p:sp>
+        <p:nvSpPr>
+          <p:cNvPr id="18" name="TextBox 17"/>
+          <p:cNvSpPr txBox="1"/>
+          <p:nvPr/>
+        </p:nvSpPr>
+        <p:spPr>
+          <a:xfrm>
+            <a:off x="3840480" y="4480560"/>
+            <a:ext cx="2011680" cy="822960"/>
+          </a:xfrm>
+          <a:prstGeom prst="rect">
+            <a:avLst/>
+          </a:prstGeom>
+          <a:noFill/>
+        </p:spPr>
+        <p:txBody>
+          <a:bodyPr wrap="square">
+            <a:spAutoFit/>
+          </a:bodyPr>
+          <a:lstStyle/>
+          <a:p>
+            <a:pPr algn="l">
               <a:defRPr sz="1300" b="0">
                 <a:solidFill>
                   <a:srgbClr val="CCCCCC"/>
@@ -7468,38 +7526,40 @@
               </a:defRPr>
             </a:pPr>
             <a:r>
-              <a:t>第三方审计</a:t>
+              <a:t>风控引擎</a:t>
             </a:r>
             <a:br/>
             <a:r>
-              <a:t>法律顾问</a:t>
+              <a:t>异常交易检测</a:t>
             </a:r>
             <a:br/>
             <a:r>
-              <a:t>保险保障</a:t>
-            </a:r>
-          </a:p>
-        </p:txBody>
-      </p:sp>
-      <p:sp>
-        <p:nvSpPr>
-          <p:cNvPr id="23" name="Rectangle 22"/>
+              <a:t>提现审核</a:t>
+            </a:r>
+          </a:p>
+        </p:txBody>
+      </p:sp>
+      <p:sp>
+        <p:nvSpPr>
+          <p:cNvPr id="19" name="Rounded Rectangle 18"/>
           <p:cNvSpPr/>
           <p:nvPr/>
         </p:nvSpPr>
         <p:spPr>
           <a:xfrm>
-            <a:off x="731520" y="4114800"/>
-            <a:ext cx="10698480" cy="1371600"/>
-          </a:xfrm>
-          <a:prstGeom prst="rect">
+            <a:off x="6400800" y="3840480"/>
+            <a:ext cx="2560320" cy="1645920"/>
+          </a:xfrm>
+          <a:prstGeom prst="roundRect">
             <a:avLst/>
           </a:prstGeom>
           <a:solidFill>
             <a:srgbClr val="222E44"/>
           </a:solidFill>
-          <a:ln>
-            <a:noFill/>
+          <a:ln w="12700">
+            <a:solidFill>
+              <a:srgbClr val="B8860B"/>
+            </a:solidFill>
           </a:ln>
         </p:spPr>
         <p:style>
@@ -7526,14 +7586,14 @@
       </p:sp>
       <p:sp>
         <p:nvSpPr>
-          <p:cNvPr id="24" name="TextBox 23"/>
-          <p:cNvSpPr txBox="1"/>
-          <p:nvPr/>
-        </p:nvSpPr>
-        <p:spPr>
-          <a:xfrm>
-            <a:off x="914400" y="4206240"/>
-            <a:ext cx="10332720" cy="274320"/>
+          <p:cNvPr id="20" name="TextBox 19"/>
+          <p:cNvSpPr txBox="1"/>
+          <p:nvPr/>
+        </p:nvSpPr>
+        <p:spPr>
+          <a:xfrm>
+            <a:off x="6675120" y="4023360"/>
+            <a:ext cx="2011680" cy="457200"/>
           </a:xfrm>
           <a:prstGeom prst="rect">
             <a:avLst/>
@@ -7555,38 +7615,35 @@
               </a:defRPr>
             </a:pPr>
             <a:r>
-              <a:t>📋 信息披露与透明度</a:t>
-            </a:r>
-          </a:p>
-        </p:txBody>
-      </p:sp>
-      <p:sp>
-        <p:nvSpPr>
-          <p:cNvPr id="25" name="TextBox 24"/>
-          <p:cNvSpPr txBox="1"/>
-          <p:nvPr/>
-        </p:nvSpPr>
-        <p:spPr>
-          <a:xfrm>
-            <a:off x="914400" y="4572000"/>
-            <a:ext cx="10332720" cy="822960"/>
-          </a:xfrm>
-          <a:prstGeom prst="rect">
-            <a:avLst/>
-          </a:prstGeom>
-          <a:noFill/>
-        </p:spPr>
-        <p:txBody>
-          <a:bodyPr wrap="square">
-            <a:spAutoFit/>
-          </a:bodyPr>
-          <a:lstStyle/>
-          <a:p>
-            <a:pPr>
-              <a:spcAft>
-                <a:spcPts val="800"/>
-              </a:spcAft>
-              <a:defRPr sz="1400">
+              <a:t>第三层: 资产安全</a:t>
+            </a:r>
+          </a:p>
+        </p:txBody>
+      </p:sp>
+      <p:sp>
+        <p:nvSpPr>
+          <p:cNvPr id="21" name="TextBox 20"/>
+          <p:cNvSpPr txBox="1"/>
+          <p:nvPr/>
+        </p:nvSpPr>
+        <p:spPr>
+          <a:xfrm>
+            <a:off x="6675120" y="4480560"/>
+            <a:ext cx="2011680" cy="822960"/>
+          </a:xfrm>
+          <a:prstGeom prst="rect">
+            <a:avLst/>
+          </a:prstGeom>
+          <a:noFill/>
+        </p:spPr>
+        <p:txBody>
+          <a:bodyPr wrap="square">
+            <a:spAutoFit/>
+          </a:bodyPr>
+          <a:lstStyle/>
+          <a:p>
+            <a:pPr algn="l">
+              <a:defRPr sz="1300" b="0">
                 <a:solidFill>
                   <a:srgbClr val="CCCCCC"/>
                 </a:solidFill>
@@ -7594,15 +7651,124 @@
               </a:defRPr>
             </a:pPr>
             <a:r>
-              <a:t>▸ 链上资产数据实时可查 — 所有GPC链上交易公开透明</a:t>
-            </a:r>
-          </a:p>
-          <a:p>
-            <a:pPr>
-              <a:spcAft>
-                <a:spcPts val="800"/>
-              </a:spcAft>
-              <a:defRPr sz="1400">
+              <a:t>冷钱包离线存储</a:t>
+            </a:r>
+            <a:br/>
+            <a:r>
+              <a:t>多签钱包</a:t>
+            </a:r>
+            <a:br/>
+            <a:r>
+              <a:t>保险机制</a:t>
+            </a:r>
+          </a:p>
+        </p:txBody>
+      </p:sp>
+      <p:sp>
+        <p:nvSpPr>
+          <p:cNvPr id="22" name="Rounded Rectangle 21"/>
+          <p:cNvSpPr/>
+          <p:nvPr/>
+        </p:nvSpPr>
+        <p:spPr>
+          <a:xfrm>
+            <a:off x="9235440" y="3840480"/>
+            <a:ext cx="2560320" cy="1645920"/>
+          </a:xfrm>
+          <a:prstGeom prst="roundRect">
+            <a:avLst/>
+          </a:prstGeom>
+          <a:solidFill>
+            <a:srgbClr val="222E44"/>
+          </a:solidFill>
+          <a:ln w="12700">
+            <a:solidFill>
+              <a:srgbClr val="B8860B"/>
+            </a:solidFill>
+          </a:ln>
+        </p:spPr>
+        <p:style>
+          <a:lnRef idx="1">
+            <a:schemeClr val="accent1"/>
+          </a:lnRef>
+          <a:fillRef idx="3">
+            <a:schemeClr val="accent1"/>
+          </a:fillRef>
+          <a:effectRef idx="2">
+            <a:schemeClr val="accent1"/>
+          </a:effectRef>
+          <a:fontRef idx="minor">
+            <a:schemeClr val="lt1"/>
+          </a:fontRef>
+        </p:style>
+        <p:txBody>
+          <a:bodyPr rtlCol="0" anchor="ctr"/>
+          <a:lstStyle/>
+          <a:p>
+            <a:pPr algn="ctr"/>
+          </a:p>
+        </p:txBody>
+      </p:sp>
+      <p:sp>
+        <p:nvSpPr>
+          <p:cNvPr id="23" name="TextBox 22"/>
+          <p:cNvSpPr txBox="1"/>
+          <p:nvPr/>
+        </p:nvSpPr>
+        <p:spPr>
+          <a:xfrm>
+            <a:off x="9509760" y="4023360"/>
+            <a:ext cx="2011680" cy="457200"/>
+          </a:xfrm>
+          <a:prstGeom prst="rect">
+            <a:avLst/>
+          </a:prstGeom>
+          <a:noFill/>
+        </p:spPr>
+        <p:txBody>
+          <a:bodyPr wrap="square">
+            <a:spAutoFit/>
+          </a:bodyPr>
+          <a:lstStyle/>
+          <a:p>
+            <a:pPr algn="l">
+              <a:defRPr sz="1600" b="1">
+                <a:solidFill>
+                  <a:srgbClr val="D4A537"/>
+                </a:solidFill>
+                <a:latin typeface="Microsoft YaHei"/>
+              </a:defRPr>
+            </a:pPr>
+            <a:r>
+              <a:t>第四层: 系统安全</a:t>
+            </a:r>
+          </a:p>
+        </p:txBody>
+      </p:sp>
+      <p:sp>
+        <p:nvSpPr>
+          <p:cNvPr id="24" name="TextBox 23"/>
+          <p:cNvSpPr txBox="1"/>
+          <p:nvPr/>
+        </p:nvSpPr>
+        <p:spPr>
+          <a:xfrm>
+            <a:off x="9509760" y="4480560"/>
+            <a:ext cx="2011680" cy="822960"/>
+          </a:xfrm>
+          <a:prstGeom prst="rect">
+            <a:avLst/>
+          </a:prstGeom>
+          <a:noFill/>
+        </p:spPr>
+        <p:txBody>
+          <a:bodyPr wrap="square">
+            <a:spAutoFit/>
+          </a:bodyPr>
+          <a:lstStyle/>
+          <a:p>
+            <a:pPr algn="l">
+              <a:defRPr sz="1300" b="0">
                 <a:solidFill>
                   <a:srgbClr val="CCCCCC"/>
                 </a:solidFill>
@@ -7610,23 +7776,15 @@
               </a:defRPr>
             </a:pPr>
             <a:r>
-              <a:t>▸ 定期第三方审计报告 — 平台资金与代币储备定期披露</a:t>
-            </a:r>
-          </a:p>
-          <a:p>
-            <a:pPr>
-              <a:spcAft>
-                <a:spcPts val="800"/>
-              </a:spcAft>
-              <a:defRPr sz="1400">
-                <a:solidFill>
-                  <a:srgbClr val="CCCCCC"/>
-                </a:solidFill>
-                <a:latin typeface="Microsoft YaHei"/>
-              </a:defRPr>
-            </a:pPr>
-            <a:r>
-              <a:t>▸ 用户资产独立托管 — 平台运营资金与用户资产严格分离</a:t>
+              <a:t>代码审计</a:t>
+            </a:r>
+            <a:br/>
+            <a:r>
+              <a:t>渗透测试</a:t>
+            </a:r>
+            <a:br/>
+            <a:r>
+              <a:t>DDoS防护</a:t>
             </a:r>
           </a:p>
         </p:txBody>
@@ -7731,7 +7889,7 @@
               </a:defRPr>
             </a:pPr>
             <a:r>
-              <a:t>核心团队</a:t>
+              <a:t>风控体系</a:t>
             </a:r>
           </a:p>
         </p:txBody>
@@ -7767,7 +7925,7 @@
               </a:defRPr>
             </a:pPr>
             <a:r>
-              <a:t>Core Team</a:t>
+              <a:t>Risk Control Framework</a:t>
             </a:r>
           </a:p>
         </p:txBody>
@@ -7846,7 +8004,7 @@
               </a:defRPr>
             </a:pPr>
             <a:r>
-              <a:t>14/15</a:t>
+              <a:t>14/16</a:t>
             </a:r>
           </a:p>
         </p:txBody>
@@ -7860,17 +8018,17 @@
         <p:spPr>
           <a:xfrm>
             <a:off x="731520" y="1645920"/>
-            <a:ext cx="2560320" cy="1828800"/>
+            <a:ext cx="2560320" cy="2103120"/>
           </a:xfrm>
           <a:prstGeom prst="roundRect">
             <a:avLst/>
           </a:prstGeom>
           <a:solidFill>
-            <a:srgbClr val="222E44"/>
+            <a:srgbClr val="1A2A3E"/>
           </a:solidFill>
-          <a:ln w="12700">
+          <a:ln w="25400">
             <a:solidFill>
-              <a:srgbClr val="B8860B"/>
+              <a:srgbClr val="2ECC71"/>
             </a:solidFill>
           </a:ln>
         </p:spPr>
@@ -7904,57 +8062,93 @@
         </p:nvSpPr>
         <p:spPr>
           <a:xfrm>
-            <a:off x="1005840" y="1828800"/>
-            <a:ext cx="2011680" cy="457200"/>
-          </a:xfrm>
-          <a:prstGeom prst="rect">
-            <a:avLst/>
-          </a:prstGeom>
-          <a:noFill/>
-        </p:spPr>
-        <p:txBody>
-          <a:bodyPr wrap="square">
-            <a:spAutoFit/>
-          </a:bodyPr>
-          <a:lstStyle/>
-          <a:p>
-            <a:pPr algn="l">
+            <a:off x="731520" y="1737360"/>
+            <a:ext cx="2560320" cy="365760"/>
+          </a:xfrm>
+          <a:prstGeom prst="rect">
+            <a:avLst/>
+          </a:prstGeom>
+          <a:noFill/>
+        </p:spPr>
+        <p:txBody>
+          <a:bodyPr wrap="square">
+            <a:spAutoFit/>
+          </a:bodyPr>
+          <a:lstStyle/>
+          <a:p>
+            <a:pPr algn="ctr">
+              <a:defRPr sz="1400" b="1">
+                <a:solidFill>
+                  <a:srgbClr val="2ECC71"/>
+                </a:solidFill>
+                <a:latin typeface="Microsoft YaHei"/>
+              </a:defRPr>
+            </a:pPr>
+            <a:r>
+              <a:t>第一层</a:t>
+            </a:r>
+          </a:p>
+        </p:txBody>
+      </p:sp>
+      <p:sp>
+        <p:nvSpPr>
+          <p:cNvPr id="9" name="TextBox 8"/>
+          <p:cNvSpPr txBox="1"/>
+          <p:nvPr/>
+        </p:nvSpPr>
+        <p:spPr>
+          <a:xfrm>
+            <a:off x="731520" y="2103120"/>
+            <a:ext cx="2560320" cy="365760"/>
+          </a:xfrm>
+          <a:prstGeom prst="rect">
+            <a:avLst/>
+          </a:prstGeom>
+          <a:noFill/>
+        </p:spPr>
+        <p:txBody>
+          <a:bodyPr wrap="square">
+            <a:spAutoFit/>
+          </a:bodyPr>
+          <a:lstStyle/>
+          <a:p>
+            <a:pPr algn="ctr">
               <a:defRPr sz="1600" b="1">
                 <a:solidFill>
-                  <a:srgbClr val="D4A537"/>
-                </a:solidFill>
-                <a:latin typeface="Microsoft YaHei"/>
-              </a:defRPr>
-            </a:pPr>
-            <a:r>
-              <a:t>👤 CEO / 创始人</a:t>
-            </a:r>
-          </a:p>
-        </p:txBody>
-      </p:sp>
-      <p:sp>
-        <p:nvSpPr>
-          <p:cNvPr id="9" name="TextBox 8"/>
-          <p:cNvSpPr txBox="1"/>
-          <p:nvPr/>
-        </p:nvSpPr>
-        <p:spPr>
-          <a:xfrm>
-            <a:off x="1005840" y="2286000"/>
-            <a:ext cx="2011680" cy="1005840"/>
-          </a:xfrm>
-          <a:prstGeom prst="rect">
-            <a:avLst/>
-          </a:prstGeom>
-          <a:noFill/>
-        </p:spPr>
-        <p:txBody>
-          <a:bodyPr wrap="square">
-            <a:spAutoFit/>
-          </a:bodyPr>
-          <a:lstStyle/>
-          <a:p>
-            <a:pPr algn="l">
+                  <a:srgbClr val="FFFFFF"/>
+                </a:solidFill>
+                <a:latin typeface="Microsoft YaHei"/>
+              </a:defRPr>
+            </a:pPr>
+            <a:r>
+              <a:t>内部风控</a:t>
+            </a:r>
+          </a:p>
+        </p:txBody>
+      </p:sp>
+      <p:sp>
+        <p:nvSpPr>
+          <p:cNvPr id="10" name="TextBox 9"/>
+          <p:cNvSpPr txBox="1"/>
+          <p:nvPr/>
+        </p:nvSpPr>
+        <p:spPr>
+          <a:xfrm>
+            <a:off x="822960" y="2560320"/>
+            <a:ext cx="2377440" cy="914400"/>
+          </a:xfrm>
+          <a:prstGeom prst="rect">
+            <a:avLst/>
+          </a:prstGeom>
+          <a:noFill/>
+        </p:spPr>
+        <p:txBody>
+          <a:bodyPr wrap="square">
+            <a:spAutoFit/>
+          </a:bodyPr>
+          <a:lstStyle/>
+          <a:p>
+            <a:pPr algn="ctr">
               <a:defRPr sz="1300" b="0">
                 <a:solidFill>
                   <a:srgbClr val="CCCCCC"/>
@@ -7963,31 +8157,39 @@
               </a:defRPr>
             </a:pPr>
             <a:r>
-              <a:t>待定</a:t>
-            </a:r>
-          </a:p>
-        </p:txBody>
-      </p:sp>
-      <p:sp>
-        <p:nvSpPr>
-          <p:cNvPr id="10" name="Rounded Rectangle 9"/>
+              <a:t>内控制度健全</a:t>
+            </a:r>
+            <a:br/>
+            <a:r>
+              <a:t>操作权限管理</a:t>
+            </a:r>
+            <a:br/>
+            <a:r>
+              <a:t>定期内部审计</a:t>
+            </a:r>
+          </a:p>
+        </p:txBody>
+      </p:sp>
+      <p:sp>
+        <p:nvSpPr>
+          <p:cNvPr id="11" name="Rounded Rectangle 10"/>
           <p:cNvSpPr/>
           <p:nvPr/>
         </p:nvSpPr>
         <p:spPr>
           <a:xfrm>
             <a:off x="3566160" y="1645920"/>
-            <a:ext cx="2560320" cy="1828800"/>
+            <a:ext cx="2560320" cy="2103120"/>
           </a:xfrm>
           <a:prstGeom prst="roundRect">
             <a:avLst/>
           </a:prstGeom>
           <a:solidFill>
-            <a:srgbClr val="222E44"/>
+            <a:srgbClr val="1A2A3E"/>
           </a:solidFill>
-          <a:ln w="12700">
+          <a:ln w="25400">
             <a:solidFill>
-              <a:srgbClr val="B8860B"/>
+              <a:srgbClr val="549BFF"/>
             </a:solidFill>
           </a:ln>
         </p:spPr>
@@ -8015,63 +8217,99 @@
       </p:sp>
       <p:sp>
         <p:nvSpPr>
-          <p:cNvPr id="11" name="TextBox 10"/>
-          <p:cNvSpPr txBox="1"/>
-          <p:nvPr/>
-        </p:nvSpPr>
-        <p:spPr>
-          <a:xfrm>
-            <a:off x="3840480" y="1828800"/>
-            <a:ext cx="2011680" cy="457200"/>
-          </a:xfrm>
-          <a:prstGeom prst="rect">
-            <a:avLst/>
-          </a:prstGeom>
-          <a:noFill/>
-        </p:spPr>
-        <p:txBody>
-          <a:bodyPr wrap="square">
-            <a:spAutoFit/>
-          </a:bodyPr>
-          <a:lstStyle/>
-          <a:p>
-            <a:pPr algn="l">
+          <p:cNvPr id="12" name="TextBox 11"/>
+          <p:cNvSpPr txBox="1"/>
+          <p:nvPr/>
+        </p:nvSpPr>
+        <p:spPr>
+          <a:xfrm>
+            <a:off x="3566160" y="1737360"/>
+            <a:ext cx="2560320" cy="365760"/>
+          </a:xfrm>
+          <a:prstGeom prst="rect">
+            <a:avLst/>
+          </a:prstGeom>
+          <a:noFill/>
+        </p:spPr>
+        <p:txBody>
+          <a:bodyPr wrap="square">
+            <a:spAutoFit/>
+          </a:bodyPr>
+          <a:lstStyle/>
+          <a:p>
+            <a:pPr algn="ctr">
+              <a:defRPr sz="1400" b="1">
+                <a:solidFill>
+                  <a:srgbClr val="549BFF"/>
+                </a:solidFill>
+                <a:latin typeface="Microsoft YaHei"/>
+              </a:defRPr>
+            </a:pPr>
+            <a:r>
+              <a:t>第二层</a:t>
+            </a:r>
+          </a:p>
+        </p:txBody>
+      </p:sp>
+      <p:sp>
+        <p:nvSpPr>
+          <p:cNvPr id="13" name="TextBox 12"/>
+          <p:cNvSpPr txBox="1"/>
+          <p:nvPr/>
+        </p:nvSpPr>
+        <p:spPr>
+          <a:xfrm>
+            <a:off x="3566160" y="2103120"/>
+            <a:ext cx="2560320" cy="365760"/>
+          </a:xfrm>
+          <a:prstGeom prst="rect">
+            <a:avLst/>
+          </a:prstGeom>
+          <a:noFill/>
+        </p:spPr>
+        <p:txBody>
+          <a:bodyPr wrap="square">
+            <a:spAutoFit/>
+          </a:bodyPr>
+          <a:lstStyle/>
+          <a:p>
+            <a:pPr algn="ctr">
               <a:defRPr sz="1600" b="1">
                 <a:solidFill>
-                  <a:srgbClr val="D4A537"/>
-                </a:solidFill>
-                <a:latin typeface="Microsoft YaHei"/>
-              </a:defRPr>
-            </a:pPr>
-            <a:r>
-              <a:t>👤 CTO</a:t>
-            </a:r>
-          </a:p>
-        </p:txBody>
-      </p:sp>
-      <p:sp>
-        <p:nvSpPr>
-          <p:cNvPr id="12" name="TextBox 11"/>
-          <p:cNvSpPr txBox="1"/>
-          <p:nvPr/>
-        </p:nvSpPr>
-        <p:spPr>
-          <a:xfrm>
-            <a:off x="3840480" y="2286000"/>
-            <a:ext cx="2011680" cy="1005840"/>
-          </a:xfrm>
-          <a:prstGeom prst="rect">
-            <a:avLst/>
-          </a:prstGeom>
-          <a:noFill/>
-        </p:spPr>
-        <p:txBody>
-          <a:bodyPr wrap="square">
-            <a:spAutoFit/>
-          </a:bodyPr>
-          <a:lstStyle/>
-          <a:p>
-            <a:pPr algn="l">
+                  <a:srgbClr val="FFFFFF"/>
+                </a:solidFill>
+                <a:latin typeface="Microsoft YaHei"/>
+              </a:defRPr>
+            </a:pPr>
+            <a:r>
+              <a:t>技术风控</a:t>
+            </a:r>
+          </a:p>
+        </p:txBody>
+      </p:sp>
+      <p:sp>
+        <p:nvSpPr>
+          <p:cNvPr id="14" name="TextBox 13"/>
+          <p:cNvSpPr txBox="1"/>
+          <p:nvPr/>
+        </p:nvSpPr>
+        <p:spPr>
+          <a:xfrm>
+            <a:off x="3657600" y="2560320"/>
+            <a:ext cx="2377440" cy="914400"/>
+          </a:xfrm>
+          <a:prstGeom prst="rect">
+            <a:avLst/>
+          </a:prstGeom>
+          <a:noFill/>
+        </p:spPr>
+        <p:txBody>
+          <a:bodyPr wrap="square">
+            <a:spAutoFit/>
+          </a:bodyPr>
+          <a:lstStyle/>
+          <a:p>
+            <a:pPr algn="ctr">
               <a:defRPr sz="1300" b="0">
                 <a:solidFill>
                   <a:srgbClr val="CCCCCC"/>
@@ -8080,31 +8318,39 @@
               </a:defRPr>
             </a:pPr>
             <a:r>
-              <a:t>待定</a:t>
-            </a:r>
-          </a:p>
-        </p:txBody>
-      </p:sp>
-      <p:sp>
-        <p:nvSpPr>
-          <p:cNvPr id="13" name="Rounded Rectangle 12"/>
+              <a:t>智能合约审计</a:t>
+            </a:r>
+            <a:br/>
+            <a:r>
+              <a:t>链上监控预警</a:t>
+            </a:r>
+            <a:br/>
+            <a:r>
+              <a:t>安全事件响应</a:t>
+            </a:r>
+          </a:p>
+        </p:txBody>
+      </p:sp>
+      <p:sp>
+        <p:nvSpPr>
+          <p:cNvPr id="15" name="Rounded Rectangle 14"/>
           <p:cNvSpPr/>
           <p:nvPr/>
         </p:nvSpPr>
         <p:spPr>
           <a:xfrm>
             <a:off x="6400800" y="1645920"/>
-            <a:ext cx="2560320" cy="1828800"/>
+            <a:ext cx="2560320" cy="2103120"/>
           </a:xfrm>
           <a:prstGeom prst="roundRect">
             <a:avLst/>
           </a:prstGeom>
           <a:solidFill>
-            <a:srgbClr val="222E44"/>
+            <a:srgbClr val="1A2A3E"/>
           </a:solidFill>
-          <a:ln w="12700">
+          <a:ln w="25400">
             <a:solidFill>
-              <a:srgbClr val="B8860B"/>
+              <a:srgbClr val="D4A537"/>
             </a:solidFill>
           </a:ln>
         </p:spPr>
@@ -8132,63 +8378,99 @@
       </p:sp>
       <p:sp>
         <p:nvSpPr>
-          <p:cNvPr id="14" name="TextBox 13"/>
-          <p:cNvSpPr txBox="1"/>
-          <p:nvPr/>
-        </p:nvSpPr>
-        <p:spPr>
-          <a:xfrm>
-            <a:off x="6675120" y="1828800"/>
-            <a:ext cx="2011680" cy="457200"/>
-          </a:xfrm>
-          <a:prstGeom prst="rect">
-            <a:avLst/>
-          </a:prstGeom>
-          <a:noFill/>
-        </p:spPr>
-        <p:txBody>
-          <a:bodyPr wrap="square">
-            <a:spAutoFit/>
-          </a:bodyPr>
-          <a:lstStyle/>
-          <a:p>
-            <a:pPr algn="l">
+          <p:cNvPr id="16" name="TextBox 15"/>
+          <p:cNvSpPr txBox="1"/>
+          <p:nvPr/>
+        </p:nvSpPr>
+        <p:spPr>
+          <a:xfrm>
+            <a:off x="6400800" y="1737360"/>
+            <a:ext cx="2560320" cy="365760"/>
+          </a:xfrm>
+          <a:prstGeom prst="rect">
+            <a:avLst/>
+          </a:prstGeom>
+          <a:noFill/>
+        </p:spPr>
+        <p:txBody>
+          <a:bodyPr wrap="square">
+            <a:spAutoFit/>
+          </a:bodyPr>
+          <a:lstStyle/>
+          <a:p>
+            <a:pPr algn="ctr">
+              <a:defRPr sz="1400" b="1">
+                <a:solidFill>
+                  <a:srgbClr val="D4A537"/>
+                </a:solidFill>
+                <a:latin typeface="Microsoft YaHei"/>
+              </a:defRPr>
+            </a:pPr>
+            <a:r>
+              <a:t>第三层</a:t>
+            </a:r>
+          </a:p>
+        </p:txBody>
+      </p:sp>
+      <p:sp>
+        <p:nvSpPr>
+          <p:cNvPr id="17" name="TextBox 16"/>
+          <p:cNvSpPr txBox="1"/>
+          <p:nvPr/>
+        </p:nvSpPr>
+        <p:spPr>
+          <a:xfrm>
+            <a:off x="6400800" y="2103120"/>
+            <a:ext cx="2560320" cy="365760"/>
+          </a:xfrm>
+          <a:prstGeom prst="rect">
+            <a:avLst/>
+          </a:prstGeom>
+          <a:noFill/>
+        </p:spPr>
+        <p:txBody>
+          <a:bodyPr wrap="square">
+            <a:spAutoFit/>
+          </a:bodyPr>
+          <a:lstStyle/>
+          <a:p>
+            <a:pPr algn="ctr">
               <a:defRPr sz="1600" b="1">
                 <a:solidFill>
-                  <a:srgbClr val="D4A537"/>
-                </a:solidFill>
-                <a:latin typeface="Microsoft YaHei"/>
-              </a:defRPr>
-            </a:pPr>
-            <a:r>
-              <a:t>👤 首席合规官</a:t>
-            </a:r>
-          </a:p>
-        </p:txBody>
-      </p:sp>
-      <p:sp>
-        <p:nvSpPr>
-          <p:cNvPr id="15" name="TextBox 14"/>
-          <p:cNvSpPr txBox="1"/>
-          <p:nvPr/>
-        </p:nvSpPr>
-        <p:spPr>
-          <a:xfrm>
-            <a:off x="6675120" y="2286000"/>
-            <a:ext cx="2011680" cy="1005840"/>
-          </a:xfrm>
-          <a:prstGeom prst="rect">
-            <a:avLst/>
-          </a:prstGeom>
-          <a:noFill/>
-        </p:spPr>
-        <p:txBody>
-          <a:bodyPr wrap="square">
-            <a:spAutoFit/>
-          </a:bodyPr>
-          <a:lstStyle/>
-          <a:p>
-            <a:pPr algn="l">
+                  <a:srgbClr val="FFFFFF"/>
+                </a:solidFill>
+                <a:latin typeface="Microsoft YaHei"/>
+              </a:defRPr>
+            </a:pPr>
+            <a:r>
+              <a:t>合规风控</a:t>
+            </a:r>
+          </a:p>
+        </p:txBody>
+      </p:sp>
+      <p:sp>
+        <p:nvSpPr>
+          <p:cNvPr id="18" name="TextBox 17"/>
+          <p:cNvSpPr txBox="1"/>
+          <p:nvPr/>
+        </p:nvSpPr>
+        <p:spPr>
+          <a:xfrm>
+            <a:off x="6492240" y="2560320"/>
+            <a:ext cx="2377440" cy="914400"/>
+          </a:xfrm>
+          <a:prstGeom prst="rect">
+            <a:avLst/>
+          </a:prstGeom>
+          <a:noFill/>
+        </p:spPr>
+        <p:txBody>
+          <a:bodyPr wrap="square">
+            <a:spAutoFit/>
+          </a:bodyPr>
+          <a:lstStyle/>
+          <a:p>
+            <a:pPr algn="ctr">
               <a:defRPr sz="1300" b="0">
                 <a:solidFill>
                   <a:srgbClr val="CCCCCC"/>
@@ -8197,31 +8479,39 @@
               </a:defRPr>
             </a:pPr>
             <a:r>
-              <a:t>待定</a:t>
-            </a:r>
-          </a:p>
-        </p:txBody>
-      </p:sp>
-      <p:sp>
-        <p:nvSpPr>
-          <p:cNvPr id="16" name="Rounded Rectangle 15"/>
+              <a:t>KYC/AML审核</a:t>
+            </a:r>
+            <a:br/>
+            <a:r>
+              <a:t>交易监控</a:t>
+            </a:r>
+            <a:br/>
+            <a:r>
+              <a:t>举报与处置</a:t>
+            </a:r>
+          </a:p>
+        </p:txBody>
+      </p:sp>
+      <p:sp>
+        <p:nvSpPr>
+          <p:cNvPr id="19" name="Rounded Rectangle 18"/>
           <p:cNvSpPr/>
           <p:nvPr/>
         </p:nvSpPr>
         <p:spPr>
           <a:xfrm>
             <a:off x="9235440" y="1645920"/>
-            <a:ext cx="2560320" cy="1828800"/>
+            <a:ext cx="2560320" cy="2103120"/>
           </a:xfrm>
           <a:prstGeom prst="roundRect">
             <a:avLst/>
           </a:prstGeom>
           <a:solidFill>
-            <a:srgbClr val="222E44"/>
+            <a:srgbClr val="1A2A3E"/>
           </a:solidFill>
-          <a:ln w="12700">
+          <a:ln w="25400">
             <a:solidFill>
-              <a:srgbClr val="B8860B"/>
+              <a:srgbClr val="E74C3C"/>
             </a:solidFill>
           </a:ln>
         </p:spPr>
@@ -8249,63 +8539,99 @@
       </p:sp>
       <p:sp>
         <p:nvSpPr>
-          <p:cNvPr id="17" name="TextBox 16"/>
-          <p:cNvSpPr txBox="1"/>
-          <p:nvPr/>
-        </p:nvSpPr>
-        <p:spPr>
-          <a:xfrm>
-            <a:off x="9509760" y="1828800"/>
-            <a:ext cx="2011680" cy="457200"/>
-          </a:xfrm>
-          <a:prstGeom prst="rect">
-            <a:avLst/>
-          </a:prstGeom>
-          <a:noFill/>
-        </p:spPr>
-        <p:txBody>
-          <a:bodyPr wrap="square">
-            <a:spAutoFit/>
-          </a:bodyPr>
-          <a:lstStyle/>
-          <a:p>
-            <a:pPr algn="l">
+          <p:cNvPr id="20" name="TextBox 19"/>
+          <p:cNvSpPr txBox="1"/>
+          <p:nvPr/>
+        </p:nvSpPr>
+        <p:spPr>
+          <a:xfrm>
+            <a:off x="9235440" y="1737360"/>
+            <a:ext cx="2560320" cy="365760"/>
+          </a:xfrm>
+          <a:prstGeom prst="rect">
+            <a:avLst/>
+          </a:prstGeom>
+          <a:noFill/>
+        </p:spPr>
+        <p:txBody>
+          <a:bodyPr wrap="square">
+            <a:spAutoFit/>
+          </a:bodyPr>
+          <a:lstStyle/>
+          <a:p>
+            <a:pPr algn="ctr">
+              <a:defRPr sz="1400" b="1">
+                <a:solidFill>
+                  <a:srgbClr val="E74C3C"/>
+                </a:solidFill>
+                <a:latin typeface="Microsoft YaHei"/>
+              </a:defRPr>
+            </a:pPr>
+            <a:r>
+              <a:t>第四层</a:t>
+            </a:r>
+          </a:p>
+        </p:txBody>
+      </p:sp>
+      <p:sp>
+        <p:nvSpPr>
+          <p:cNvPr id="21" name="TextBox 20"/>
+          <p:cNvSpPr txBox="1"/>
+          <p:nvPr/>
+        </p:nvSpPr>
+        <p:spPr>
+          <a:xfrm>
+            <a:off x="9235440" y="2103120"/>
+            <a:ext cx="2560320" cy="365760"/>
+          </a:xfrm>
+          <a:prstGeom prst="rect">
+            <a:avLst/>
+          </a:prstGeom>
+          <a:noFill/>
+        </p:spPr>
+        <p:txBody>
+          <a:bodyPr wrap="square">
+            <a:spAutoFit/>
+          </a:bodyPr>
+          <a:lstStyle/>
+          <a:p>
+            <a:pPr algn="ctr">
               <a:defRPr sz="1600" b="1">
                 <a:solidFill>
-                  <a:srgbClr val="D4A537"/>
-                </a:solidFill>
-                <a:latin typeface="Microsoft YaHei"/>
-              </a:defRPr>
-            </a:pPr>
-            <a:r>
-              <a:t>👤 首席运营官</a:t>
-            </a:r>
-          </a:p>
-        </p:txBody>
-      </p:sp>
-      <p:sp>
-        <p:nvSpPr>
-          <p:cNvPr id="18" name="TextBox 17"/>
-          <p:cNvSpPr txBox="1"/>
-          <p:nvPr/>
-        </p:nvSpPr>
-        <p:spPr>
-          <a:xfrm>
-            <a:off x="9509760" y="2286000"/>
-            <a:ext cx="2011680" cy="1005840"/>
-          </a:xfrm>
-          <a:prstGeom prst="rect">
-            <a:avLst/>
-          </a:prstGeom>
-          <a:noFill/>
-        </p:spPr>
-        <p:txBody>
-          <a:bodyPr wrap="square">
-            <a:spAutoFit/>
-          </a:bodyPr>
-          <a:lstStyle/>
-          <a:p>
-            <a:pPr algn="l">
+                  <a:srgbClr val="FFFFFF"/>
+                </a:solidFill>
+                <a:latin typeface="Microsoft YaHei"/>
+              </a:defRPr>
+            </a:pPr>
+            <a:r>
+              <a:t>外部风控</a:t>
+            </a:r>
+          </a:p>
+        </p:txBody>
+      </p:sp>
+      <p:sp>
+        <p:nvSpPr>
+          <p:cNvPr id="22" name="TextBox 21"/>
+          <p:cNvSpPr txBox="1"/>
+          <p:nvPr/>
+        </p:nvSpPr>
+        <p:spPr>
+          <a:xfrm>
+            <a:off x="9326880" y="2560320"/>
+            <a:ext cx="2377440" cy="914400"/>
+          </a:xfrm>
+          <a:prstGeom prst="rect">
+            <a:avLst/>
+          </a:prstGeom>
+          <a:noFill/>
+        </p:spPr>
+        <p:txBody>
+          <a:bodyPr wrap="square">
+            <a:spAutoFit/>
+          </a:bodyPr>
+          <a:lstStyle/>
+          <a:p>
+            <a:pPr algn="ctr">
               <a:defRPr sz="1300" b="0">
                 <a:solidFill>
                   <a:srgbClr val="CCCCCC"/>
@@ -8314,267 +8640,29 @@
               </a:defRPr>
             </a:pPr>
             <a:r>
-              <a:t>待定</a:t>
-            </a:r>
-          </a:p>
-        </p:txBody>
-      </p:sp>
-      <p:sp>
-        <p:nvSpPr>
-          <p:cNvPr id="19" name="Rounded Rectangle 18"/>
+              <a:t>第三方审计</a:t>
+            </a:r>
+            <a:br/>
+            <a:r>
+              <a:t>法律顾问</a:t>
+            </a:r>
+            <a:br/>
+            <a:r>
+              <a:t>保险保障</a:t>
+            </a:r>
+          </a:p>
+        </p:txBody>
+      </p:sp>
+      <p:sp>
+        <p:nvSpPr>
+          <p:cNvPr id="23" name="Rectangle 22"/>
           <p:cNvSpPr/>
           <p:nvPr/>
         </p:nvSpPr>
         <p:spPr>
           <a:xfrm>
-            <a:off x="731520" y="3840480"/>
-            <a:ext cx="5029200" cy="1371600"/>
-          </a:xfrm>
-          <a:prstGeom prst="roundRect">
-            <a:avLst/>
-          </a:prstGeom>
-          <a:solidFill>
-            <a:srgbClr val="222E44"/>
-          </a:solidFill>
-          <a:ln w="12700">
-            <a:solidFill>
-              <a:srgbClr val="B8860B"/>
-            </a:solidFill>
-          </a:ln>
-        </p:spPr>
-        <p:style>
-          <a:lnRef idx="1">
-            <a:schemeClr val="accent1"/>
-          </a:lnRef>
-          <a:fillRef idx="3">
-            <a:schemeClr val="accent1"/>
-          </a:fillRef>
-          <a:effectRef idx="2">
-            <a:schemeClr val="accent1"/>
-          </a:effectRef>
-          <a:fontRef idx="minor">
-            <a:schemeClr val="lt1"/>
-          </a:fontRef>
-        </p:style>
-        <p:txBody>
-          <a:bodyPr rtlCol="0" anchor="ctr"/>
-          <a:lstStyle/>
-          <a:p>
-            <a:pPr algn="ctr"/>
-          </a:p>
-        </p:txBody>
-      </p:sp>
-      <p:sp>
-        <p:nvSpPr>
-          <p:cNvPr id="20" name="TextBox 19"/>
-          <p:cNvSpPr txBox="1"/>
-          <p:nvPr/>
-        </p:nvSpPr>
-        <p:spPr>
-          <a:xfrm>
-            <a:off x="1005840" y="4023360"/>
-            <a:ext cx="4480560" cy="457200"/>
-          </a:xfrm>
-          <a:prstGeom prst="rect">
-            <a:avLst/>
-          </a:prstGeom>
-          <a:noFill/>
-        </p:spPr>
-        <p:txBody>
-          <a:bodyPr wrap="square">
-            <a:spAutoFit/>
-          </a:bodyPr>
-          <a:lstStyle/>
-          <a:p>
-            <a:pPr algn="l">
-              <a:defRPr sz="1600" b="1">
-                <a:solidFill>
-                  <a:srgbClr val="D4A537"/>
-                </a:solidFill>
-                <a:latin typeface="Microsoft YaHei"/>
-              </a:defRPr>
-            </a:pPr>
-            <a:r>
-              <a:t>顾问团队（拟邀）</a:t>
-            </a:r>
-          </a:p>
-        </p:txBody>
-      </p:sp>
-      <p:sp>
-        <p:nvSpPr>
-          <p:cNvPr id="21" name="TextBox 20"/>
-          <p:cNvSpPr txBox="1"/>
-          <p:nvPr/>
-        </p:nvSpPr>
-        <p:spPr>
-          <a:xfrm>
-            <a:off x="1005840" y="4480560"/>
-            <a:ext cx="4480560" cy="548640"/>
-          </a:xfrm>
-          <a:prstGeom prst="rect">
-            <a:avLst/>
-          </a:prstGeom>
-          <a:noFill/>
-        </p:spPr>
-        <p:txBody>
-          <a:bodyPr wrap="square">
-            <a:spAutoFit/>
-          </a:bodyPr>
-          <a:lstStyle/>
-          <a:p>
-            <a:pPr algn="l">
-              <a:defRPr sz="1300" b="0">
-                <a:solidFill>
-                  <a:srgbClr val="CCCCCC"/>
-                </a:solidFill>
-                <a:latin typeface="Microsoft YaHei"/>
-              </a:defRPr>
-            </a:pPr>
-            <a:r>
-              <a:t>区块链 / 金融 / 法律领域知名专家与机构顾问</a:t>
-            </a:r>
-            <a:br/>
-            <a:r>
-              <a:t>具体名单待定</a:t>
-            </a:r>
-          </a:p>
-        </p:txBody>
-      </p:sp>
-      <p:sp>
-        <p:nvSpPr>
-          <p:cNvPr id="22" name="Rounded Rectangle 21"/>
-          <p:cNvSpPr/>
-          <p:nvPr/>
-        </p:nvSpPr>
-        <p:spPr>
-          <a:xfrm>
-            <a:off x="6217920" y="3840480"/>
-            <a:ext cx="5029200" cy="1371600"/>
-          </a:xfrm>
-          <a:prstGeom prst="roundRect">
-            <a:avLst/>
-          </a:prstGeom>
-          <a:solidFill>
-            <a:srgbClr val="222E44"/>
-          </a:solidFill>
-          <a:ln w="12700">
-            <a:solidFill>
-              <a:srgbClr val="B8860B"/>
-            </a:solidFill>
-          </a:ln>
-        </p:spPr>
-        <p:style>
-          <a:lnRef idx="1">
-            <a:schemeClr val="accent1"/>
-          </a:lnRef>
-          <a:fillRef idx="3">
-            <a:schemeClr val="accent1"/>
-          </a:fillRef>
-          <a:effectRef idx="2">
-            <a:schemeClr val="accent1"/>
-          </a:effectRef>
-          <a:fontRef idx="minor">
-            <a:schemeClr val="lt1"/>
-          </a:fontRef>
-        </p:style>
-        <p:txBody>
-          <a:bodyPr rtlCol="0" anchor="ctr"/>
-          <a:lstStyle/>
-          <a:p>
-            <a:pPr algn="ctr"/>
-          </a:p>
-        </p:txBody>
-      </p:sp>
-      <p:sp>
-        <p:nvSpPr>
-          <p:cNvPr id="23" name="TextBox 22"/>
-          <p:cNvSpPr txBox="1"/>
-          <p:nvPr/>
-        </p:nvSpPr>
-        <p:spPr>
-          <a:xfrm>
-            <a:off x="6492240" y="4023360"/>
-            <a:ext cx="4480560" cy="457200"/>
-          </a:xfrm>
-          <a:prstGeom prst="rect">
-            <a:avLst/>
-          </a:prstGeom>
-          <a:noFill/>
-        </p:spPr>
-        <p:txBody>
-          <a:bodyPr wrap="square">
-            <a:spAutoFit/>
-          </a:bodyPr>
-          <a:lstStyle/>
-          <a:p>
-            <a:pPr algn="l">
-              <a:defRPr sz="1600" b="1">
-                <a:solidFill>
-                  <a:srgbClr val="D4A537"/>
-                </a:solidFill>
-                <a:latin typeface="Microsoft YaHei"/>
-              </a:defRPr>
-            </a:pPr>
-            <a:r>
-              <a:t>技术合作伙伴（拟邀）</a:t>
-            </a:r>
-          </a:p>
-        </p:txBody>
-      </p:sp>
-      <p:sp>
-        <p:nvSpPr>
-          <p:cNvPr id="24" name="TextBox 23"/>
-          <p:cNvSpPr txBox="1"/>
-          <p:nvPr/>
-        </p:nvSpPr>
-        <p:spPr>
-          <a:xfrm>
-            <a:off x="6492240" y="4480560"/>
-            <a:ext cx="4480560" cy="548640"/>
-          </a:xfrm>
-          <a:prstGeom prst="rect">
-            <a:avLst/>
-          </a:prstGeom>
-          <a:noFill/>
-        </p:spPr>
-        <p:txBody>
-          <a:bodyPr wrap="square">
-            <a:spAutoFit/>
-          </a:bodyPr>
-          <a:lstStyle/>
-          <a:p>
-            <a:pPr algn="l">
-              <a:defRPr sz="1300" b="0">
-                <a:solidFill>
-                  <a:srgbClr val="CCCCCC"/>
-                </a:solidFill>
-                <a:latin typeface="Microsoft YaHei"/>
-              </a:defRPr>
-            </a:pPr>
-            <a:r>
-              <a:t>币安链生态合作伙伴</a:t>
-            </a:r>
-            <a:br/>
-            <a:r>
-              <a:t>区块链安全审计机构</a:t>
-            </a:r>
-            <a:br/>
-            <a:r>
-              <a:t>做市商与流动性合作伙伴</a:t>
-            </a:r>
-          </a:p>
-        </p:txBody>
-      </p:sp>
-      <p:sp>
-        <p:nvSpPr>
-          <p:cNvPr id="25" name="Rectangle 24"/>
-          <p:cNvSpPr/>
-          <p:nvPr/>
-        </p:nvSpPr>
-        <p:spPr>
-          <a:xfrm>
-            <a:off x="731520" y="5486400"/>
-            <a:ext cx="10698480" cy="457200"/>
+            <a:off x="731520" y="4114800"/>
+            <a:ext cx="10698480" cy="1371600"/>
           </a:xfrm>
           <a:prstGeom prst="rect">
             <a:avLst/>
@@ -8610,28 +8698,67 @@
       </p:sp>
       <p:sp>
         <p:nvSpPr>
-          <p:cNvPr id="26" name="TextBox 25"/>
-          <p:cNvSpPr txBox="1"/>
-          <p:nvPr/>
-        </p:nvSpPr>
-        <p:spPr>
-          <a:xfrm>
-            <a:off x="914400" y="5532120"/>
-            <a:ext cx="10332720" cy="365760"/>
-          </a:xfrm>
-          <a:prstGeom prst="rect">
-            <a:avLst/>
-          </a:prstGeom>
-          <a:noFill/>
-        </p:spPr>
-        <p:txBody>
-          <a:bodyPr wrap="square">
-            <a:spAutoFit/>
-          </a:bodyPr>
-          <a:lstStyle/>
-          <a:p>
-            <a:pPr algn="ctr">
-              <a:defRPr sz="1400" b="0">
+          <p:cNvPr id="24" name="TextBox 23"/>
+          <p:cNvSpPr txBox="1"/>
+          <p:nvPr/>
+        </p:nvSpPr>
+        <p:spPr>
+          <a:xfrm>
+            <a:off x="914400" y="4206240"/>
+            <a:ext cx="10332720" cy="274320"/>
+          </a:xfrm>
+          <a:prstGeom prst="rect">
+            <a:avLst/>
+          </a:prstGeom>
+          <a:noFill/>
+        </p:spPr>
+        <p:txBody>
+          <a:bodyPr wrap="square">
+            <a:spAutoFit/>
+          </a:bodyPr>
+          <a:lstStyle/>
+          <a:p>
+            <a:pPr algn="l">
+              <a:defRPr sz="1600" b="1">
+                <a:solidFill>
+                  <a:srgbClr val="D4A537"/>
+                </a:solidFill>
+                <a:latin typeface="Microsoft YaHei"/>
+              </a:defRPr>
+            </a:pPr>
+            <a:r>
+              <a:t>📋 信息披露与透明度</a:t>
+            </a:r>
+          </a:p>
+        </p:txBody>
+      </p:sp>
+      <p:sp>
+        <p:nvSpPr>
+          <p:cNvPr id="25" name="TextBox 24"/>
+          <p:cNvSpPr txBox="1"/>
+          <p:nvPr/>
+        </p:nvSpPr>
+        <p:spPr>
+          <a:xfrm>
+            <a:off x="914400" y="4572000"/>
+            <a:ext cx="10332720" cy="822960"/>
+          </a:xfrm>
+          <a:prstGeom prst="rect">
+            <a:avLst/>
+          </a:prstGeom>
+          <a:noFill/>
+        </p:spPr>
+        <p:txBody>
+          <a:bodyPr wrap="square">
+            <a:spAutoFit/>
+          </a:bodyPr>
+          <a:lstStyle/>
+          <a:p>
+            <a:pPr>
+              <a:spcAft>
+                <a:spcPts val="800"/>
+              </a:spcAft>
+              <a:defRPr sz="1400">
                 <a:solidFill>
                   <a:srgbClr val="CCCCCC"/>
                 </a:solidFill>
@@ -8639,7 +8766,39 @@
               </a:defRPr>
             </a:pPr>
             <a:r>
-              <a:t>团队成员信息持续更新中，敬请期待</a:t>
+              <a:t>▸ 链上资产数据实时可查 — 所有GPC链上交易公开透明</a:t>
+            </a:r>
+          </a:p>
+          <a:p>
+            <a:pPr>
+              <a:spcAft>
+                <a:spcPts val="800"/>
+              </a:spcAft>
+              <a:defRPr sz="1400">
+                <a:solidFill>
+                  <a:srgbClr val="CCCCCC"/>
+                </a:solidFill>
+                <a:latin typeface="Microsoft YaHei"/>
+              </a:defRPr>
+            </a:pPr>
+            <a:r>
+              <a:t>▸ 定期第三方审计报告 — 平台资金与代币储备定期披露</a:t>
+            </a:r>
+          </a:p>
+          <a:p>
+            <a:pPr>
+              <a:spcAft>
+                <a:spcPts val="800"/>
+              </a:spcAft>
+              <a:defRPr sz="1400">
+                <a:solidFill>
+                  <a:srgbClr val="CCCCCC"/>
+                </a:solidFill>
+                <a:latin typeface="Microsoft YaHei"/>
+              </a:defRPr>
+            </a:pPr>
+            <a:r>
+              <a:t>▸ 用户资产独立托管 — 平台运营资金与用户资产严格分离</a:t>
             </a:r>
           </a:p>
         </p:txBody>
@@ -8653,6 +8812,1019 @@
 </file>
 
 <file path=ppt/slides/slide15.xml><?xml version="1.0" encoding="utf-8"?>
+<p:sld xmlns:a="http://schemas.openxmlformats.org/drawingml/2006/main" xmlns:p="http://schemas.openxmlformats.org/presentationml/2006/main" xmlns:r="http://schemas.openxmlformats.org/officeDocument/2006/relationships">
+  <p:cSld>
+    <p:bg>
+      <p:bgPr>
+        <a:solidFill>
+          <a:srgbClr val="162138"/>
+        </a:solidFill>
+        <a:effectLst/>
+      </p:bgPr>
+    </p:bg>
+    <p:spTree>
+      <p:nvGrpSpPr>
+        <p:cNvPr id="1" name=""/>
+        <p:cNvGrpSpPr/>
+        <p:nvPr/>
+      </p:nvGrpSpPr>
+      <p:grpSpPr/>
+      <p:sp>
+        <p:nvSpPr>
+          <p:cNvPr id="2" name="Rectangle 1"/>
+          <p:cNvSpPr/>
+          <p:nvPr/>
+        </p:nvSpPr>
+        <p:spPr>
+          <a:xfrm>
+            <a:off x="0" y="0"/>
+            <a:ext cx="12191695" cy="50800"/>
+          </a:xfrm>
+          <a:prstGeom prst="rect">
+            <a:avLst/>
+          </a:prstGeom>
+          <a:solidFill>
+            <a:srgbClr val="D4A537"/>
+          </a:solidFill>
+          <a:ln>
+            <a:noFill/>
+          </a:ln>
+        </p:spPr>
+        <p:style>
+          <a:lnRef idx="1">
+            <a:schemeClr val="accent1"/>
+          </a:lnRef>
+          <a:fillRef idx="3">
+            <a:schemeClr val="accent1"/>
+          </a:fillRef>
+          <a:effectRef idx="2">
+            <a:schemeClr val="accent1"/>
+          </a:effectRef>
+          <a:fontRef idx="minor">
+            <a:schemeClr val="lt1"/>
+          </a:fontRef>
+        </p:style>
+        <p:txBody>
+          <a:bodyPr rtlCol="0" anchor="ctr"/>
+          <a:lstStyle/>
+          <a:p>
+            <a:pPr algn="ctr"/>
+          </a:p>
+        </p:txBody>
+      </p:sp>
+      <p:sp>
+        <p:nvSpPr>
+          <p:cNvPr id="3" name="TextBox 2"/>
+          <p:cNvSpPr txBox="1"/>
+          <p:nvPr/>
+        </p:nvSpPr>
+        <p:spPr>
+          <a:xfrm>
+            <a:off x="731520" y="365760"/>
+            <a:ext cx="9144000" cy="640080"/>
+          </a:xfrm>
+          <a:prstGeom prst="rect">
+            <a:avLst/>
+          </a:prstGeom>
+          <a:noFill/>
+        </p:spPr>
+        <p:txBody>
+          <a:bodyPr wrap="square">
+            <a:spAutoFit/>
+          </a:bodyPr>
+          <a:lstStyle/>
+          <a:p>
+            <a:pPr algn="l">
+              <a:defRPr sz="3200" b="1">
+                <a:solidFill>
+                  <a:srgbClr val="D4A537"/>
+                </a:solidFill>
+                <a:latin typeface="Microsoft YaHei"/>
+              </a:defRPr>
+            </a:pPr>
+            <a:r>
+              <a:t>核心团队</a:t>
+            </a:r>
+          </a:p>
+        </p:txBody>
+      </p:sp>
+      <p:sp>
+        <p:nvSpPr>
+          <p:cNvPr id="4" name="TextBox 3"/>
+          <p:cNvSpPr txBox="1"/>
+          <p:nvPr/>
+        </p:nvSpPr>
+        <p:spPr>
+          <a:xfrm>
+            <a:off x="731520" y="914400"/>
+            <a:ext cx="9144000" cy="457200"/>
+          </a:xfrm>
+          <a:prstGeom prst="rect">
+            <a:avLst/>
+          </a:prstGeom>
+          <a:noFill/>
+        </p:spPr>
+        <p:txBody>
+          <a:bodyPr wrap="square">
+            <a:spAutoFit/>
+          </a:bodyPr>
+          <a:lstStyle/>
+          <a:p>
+            <a:pPr algn="l">
+              <a:defRPr sz="1600" b="0">
+                <a:solidFill>
+                  <a:srgbClr val="CCCCCC"/>
+                </a:solidFill>
+                <a:latin typeface="Microsoft YaHei"/>
+              </a:defRPr>
+            </a:pPr>
+            <a:r>
+              <a:t>Core Team</a:t>
+            </a:r>
+          </a:p>
+        </p:txBody>
+      </p:sp>
+      <p:sp>
+        <p:nvSpPr>
+          <p:cNvPr id="5" name="Rectangle 4"/>
+          <p:cNvSpPr/>
+          <p:nvPr/>
+        </p:nvSpPr>
+        <p:spPr>
+          <a:xfrm>
+            <a:off x="731520" y="1280160"/>
+            <a:ext cx="2743200" cy="25400"/>
+          </a:xfrm>
+          <a:prstGeom prst="rect">
+            <a:avLst/>
+          </a:prstGeom>
+          <a:solidFill>
+            <a:srgbClr val="D4A537"/>
+          </a:solidFill>
+          <a:ln>
+            <a:noFill/>
+          </a:ln>
+        </p:spPr>
+        <p:style>
+          <a:lnRef idx="1">
+            <a:schemeClr val="accent1"/>
+          </a:lnRef>
+          <a:fillRef idx="3">
+            <a:schemeClr val="accent1"/>
+          </a:fillRef>
+          <a:effectRef idx="2">
+            <a:schemeClr val="accent1"/>
+          </a:effectRef>
+          <a:fontRef idx="minor">
+            <a:schemeClr val="lt1"/>
+          </a:fontRef>
+        </p:style>
+        <p:txBody>
+          <a:bodyPr rtlCol="0" anchor="ctr"/>
+          <a:lstStyle/>
+          <a:p>
+            <a:pPr algn="ctr"/>
+          </a:p>
+        </p:txBody>
+      </p:sp>
+      <p:sp>
+        <p:nvSpPr>
+          <p:cNvPr id="6" name="TextBox 5"/>
+          <p:cNvSpPr txBox="1"/>
+          <p:nvPr/>
+        </p:nvSpPr>
+        <p:spPr>
+          <a:xfrm>
+            <a:off x="10972800" y="6400800"/>
+            <a:ext cx="1097280" cy="365760"/>
+          </a:xfrm>
+          <a:prstGeom prst="rect">
+            <a:avLst/>
+          </a:prstGeom>
+          <a:noFill/>
+        </p:spPr>
+        <p:txBody>
+          <a:bodyPr wrap="square">
+            <a:spAutoFit/>
+          </a:bodyPr>
+          <a:lstStyle/>
+          <a:p>
+            <a:pPr algn="r">
+              <a:defRPr sz="1100" b="0">
+                <a:solidFill>
+                  <a:srgbClr val="B8860B"/>
+                </a:solidFill>
+                <a:latin typeface="Microsoft YaHei"/>
+              </a:defRPr>
+            </a:pPr>
+            <a:r>
+              <a:t>15/16</a:t>
+            </a:r>
+          </a:p>
+        </p:txBody>
+      </p:sp>
+      <p:sp>
+        <p:nvSpPr>
+          <p:cNvPr id="7" name="Rounded Rectangle 6"/>
+          <p:cNvSpPr/>
+          <p:nvPr/>
+        </p:nvSpPr>
+        <p:spPr>
+          <a:xfrm>
+            <a:off x="731520" y="1645920"/>
+            <a:ext cx="2560320" cy="1828800"/>
+          </a:xfrm>
+          <a:prstGeom prst="roundRect">
+            <a:avLst/>
+          </a:prstGeom>
+          <a:solidFill>
+            <a:srgbClr val="222E44"/>
+          </a:solidFill>
+          <a:ln w="12700">
+            <a:solidFill>
+              <a:srgbClr val="B8860B"/>
+            </a:solidFill>
+          </a:ln>
+        </p:spPr>
+        <p:style>
+          <a:lnRef idx="1">
+            <a:schemeClr val="accent1"/>
+          </a:lnRef>
+          <a:fillRef idx="3">
+            <a:schemeClr val="accent1"/>
+          </a:fillRef>
+          <a:effectRef idx="2">
+            <a:schemeClr val="accent1"/>
+          </a:effectRef>
+          <a:fontRef idx="minor">
+            <a:schemeClr val="lt1"/>
+          </a:fontRef>
+        </p:style>
+        <p:txBody>
+          <a:bodyPr rtlCol="0" anchor="ctr"/>
+          <a:lstStyle/>
+          <a:p>
+            <a:pPr algn="ctr"/>
+          </a:p>
+        </p:txBody>
+      </p:sp>
+      <p:sp>
+        <p:nvSpPr>
+          <p:cNvPr id="8" name="TextBox 7"/>
+          <p:cNvSpPr txBox="1"/>
+          <p:nvPr/>
+        </p:nvSpPr>
+        <p:spPr>
+          <a:xfrm>
+            <a:off x="1005840" y="1828800"/>
+            <a:ext cx="2011680" cy="457200"/>
+          </a:xfrm>
+          <a:prstGeom prst="rect">
+            <a:avLst/>
+          </a:prstGeom>
+          <a:noFill/>
+        </p:spPr>
+        <p:txBody>
+          <a:bodyPr wrap="square">
+            <a:spAutoFit/>
+          </a:bodyPr>
+          <a:lstStyle/>
+          <a:p>
+            <a:pPr algn="l">
+              <a:defRPr sz="1600" b="1">
+                <a:solidFill>
+                  <a:srgbClr val="D4A537"/>
+                </a:solidFill>
+                <a:latin typeface="Microsoft YaHei"/>
+              </a:defRPr>
+            </a:pPr>
+            <a:r>
+              <a:t>👤 CEO / 创始人</a:t>
+            </a:r>
+          </a:p>
+        </p:txBody>
+      </p:sp>
+      <p:sp>
+        <p:nvSpPr>
+          <p:cNvPr id="9" name="TextBox 8"/>
+          <p:cNvSpPr txBox="1"/>
+          <p:nvPr/>
+        </p:nvSpPr>
+        <p:spPr>
+          <a:xfrm>
+            <a:off x="1005840" y="2286000"/>
+            <a:ext cx="2011680" cy="1005840"/>
+          </a:xfrm>
+          <a:prstGeom prst="rect">
+            <a:avLst/>
+          </a:prstGeom>
+          <a:noFill/>
+        </p:spPr>
+        <p:txBody>
+          <a:bodyPr wrap="square">
+            <a:spAutoFit/>
+          </a:bodyPr>
+          <a:lstStyle/>
+          <a:p>
+            <a:pPr algn="l">
+              <a:defRPr sz="1300" b="0">
+                <a:solidFill>
+                  <a:srgbClr val="CCCCCC"/>
+                </a:solidFill>
+                <a:latin typeface="Microsoft YaHei"/>
+              </a:defRPr>
+            </a:pPr>
+            <a:r>
+              <a:t>待定</a:t>
+            </a:r>
+          </a:p>
+        </p:txBody>
+      </p:sp>
+      <p:sp>
+        <p:nvSpPr>
+          <p:cNvPr id="10" name="Rounded Rectangle 9"/>
+          <p:cNvSpPr/>
+          <p:nvPr/>
+        </p:nvSpPr>
+        <p:spPr>
+          <a:xfrm>
+            <a:off x="3566160" y="1645920"/>
+            <a:ext cx="2560320" cy="1828800"/>
+          </a:xfrm>
+          <a:prstGeom prst="roundRect">
+            <a:avLst/>
+          </a:prstGeom>
+          <a:solidFill>
+            <a:srgbClr val="222E44"/>
+          </a:solidFill>
+          <a:ln w="12700">
+            <a:solidFill>
+              <a:srgbClr val="B8860B"/>
+            </a:solidFill>
+          </a:ln>
+        </p:spPr>
+        <p:style>
+          <a:lnRef idx="1">
+            <a:schemeClr val="accent1"/>
+          </a:lnRef>
+          <a:fillRef idx="3">
+            <a:schemeClr val="accent1"/>
+          </a:fillRef>
+          <a:effectRef idx="2">
+            <a:schemeClr val="accent1"/>
+          </a:effectRef>
+          <a:fontRef idx="minor">
+            <a:schemeClr val="lt1"/>
+          </a:fontRef>
+        </p:style>
+        <p:txBody>
+          <a:bodyPr rtlCol="0" anchor="ctr"/>
+          <a:lstStyle/>
+          <a:p>
+            <a:pPr algn="ctr"/>
+          </a:p>
+        </p:txBody>
+      </p:sp>
+      <p:sp>
+        <p:nvSpPr>
+          <p:cNvPr id="11" name="TextBox 10"/>
+          <p:cNvSpPr txBox="1"/>
+          <p:nvPr/>
+        </p:nvSpPr>
+        <p:spPr>
+          <a:xfrm>
+            <a:off x="3840480" y="1828800"/>
+            <a:ext cx="2011680" cy="457200"/>
+          </a:xfrm>
+          <a:prstGeom prst="rect">
+            <a:avLst/>
+          </a:prstGeom>
+          <a:noFill/>
+        </p:spPr>
+        <p:txBody>
+          <a:bodyPr wrap="square">
+            <a:spAutoFit/>
+          </a:bodyPr>
+          <a:lstStyle/>
+          <a:p>
+            <a:pPr algn="l">
+              <a:defRPr sz="1600" b="1">
+                <a:solidFill>
+                  <a:srgbClr val="D4A537"/>
+                </a:solidFill>
+                <a:latin typeface="Microsoft YaHei"/>
+              </a:defRPr>
+            </a:pPr>
+            <a:r>
+              <a:t>👤 CTO</a:t>
+            </a:r>
+          </a:p>
+        </p:txBody>
+      </p:sp>
+      <p:sp>
+        <p:nvSpPr>
+          <p:cNvPr id="12" name="TextBox 11"/>
+          <p:cNvSpPr txBox="1"/>
+          <p:nvPr/>
+        </p:nvSpPr>
+        <p:spPr>
+          <a:xfrm>
+            <a:off x="3840480" y="2286000"/>
+            <a:ext cx="2011680" cy="1005840"/>
+          </a:xfrm>
+          <a:prstGeom prst="rect">
+            <a:avLst/>
+          </a:prstGeom>
+          <a:noFill/>
+        </p:spPr>
+        <p:txBody>
+          <a:bodyPr wrap="square">
+            <a:spAutoFit/>
+          </a:bodyPr>
+          <a:lstStyle/>
+          <a:p>
+            <a:pPr algn="l">
+              <a:defRPr sz="1300" b="0">
+                <a:solidFill>
+                  <a:srgbClr val="CCCCCC"/>
+                </a:solidFill>
+                <a:latin typeface="Microsoft YaHei"/>
+              </a:defRPr>
+            </a:pPr>
+            <a:r>
+              <a:t>待定</a:t>
+            </a:r>
+          </a:p>
+        </p:txBody>
+      </p:sp>
+      <p:sp>
+        <p:nvSpPr>
+          <p:cNvPr id="13" name="Rounded Rectangle 12"/>
+          <p:cNvSpPr/>
+          <p:nvPr/>
+        </p:nvSpPr>
+        <p:spPr>
+          <a:xfrm>
+            <a:off x="6400800" y="1645920"/>
+            <a:ext cx="2560320" cy="1828800"/>
+          </a:xfrm>
+          <a:prstGeom prst="roundRect">
+            <a:avLst/>
+          </a:prstGeom>
+          <a:solidFill>
+            <a:srgbClr val="222E44"/>
+          </a:solidFill>
+          <a:ln w="12700">
+            <a:solidFill>
+              <a:srgbClr val="B8860B"/>
+            </a:solidFill>
+          </a:ln>
+        </p:spPr>
+        <p:style>
+          <a:lnRef idx="1">
+            <a:schemeClr val="accent1"/>
+          </a:lnRef>
+          <a:fillRef idx="3">
+            <a:schemeClr val="accent1"/>
+          </a:fillRef>
+          <a:effectRef idx="2">
+            <a:schemeClr val="accent1"/>
+          </a:effectRef>
+          <a:fontRef idx="minor">
+            <a:schemeClr val="lt1"/>
+          </a:fontRef>
+        </p:style>
+        <p:txBody>
+          <a:bodyPr rtlCol="0" anchor="ctr"/>
+          <a:lstStyle/>
+          <a:p>
+            <a:pPr algn="ctr"/>
+          </a:p>
+        </p:txBody>
+      </p:sp>
+      <p:sp>
+        <p:nvSpPr>
+          <p:cNvPr id="14" name="TextBox 13"/>
+          <p:cNvSpPr txBox="1"/>
+          <p:nvPr/>
+        </p:nvSpPr>
+        <p:spPr>
+          <a:xfrm>
+            <a:off x="6675120" y="1828800"/>
+            <a:ext cx="2011680" cy="457200"/>
+          </a:xfrm>
+          <a:prstGeom prst="rect">
+            <a:avLst/>
+          </a:prstGeom>
+          <a:noFill/>
+        </p:spPr>
+        <p:txBody>
+          <a:bodyPr wrap="square">
+            <a:spAutoFit/>
+          </a:bodyPr>
+          <a:lstStyle/>
+          <a:p>
+            <a:pPr algn="l">
+              <a:defRPr sz="1600" b="1">
+                <a:solidFill>
+                  <a:srgbClr val="D4A537"/>
+                </a:solidFill>
+                <a:latin typeface="Microsoft YaHei"/>
+              </a:defRPr>
+            </a:pPr>
+            <a:r>
+              <a:t>👤 首席合规官</a:t>
+            </a:r>
+          </a:p>
+        </p:txBody>
+      </p:sp>
+      <p:sp>
+        <p:nvSpPr>
+          <p:cNvPr id="15" name="TextBox 14"/>
+          <p:cNvSpPr txBox="1"/>
+          <p:nvPr/>
+        </p:nvSpPr>
+        <p:spPr>
+          <a:xfrm>
+            <a:off x="6675120" y="2286000"/>
+            <a:ext cx="2011680" cy="1005840"/>
+          </a:xfrm>
+          <a:prstGeom prst="rect">
+            <a:avLst/>
+          </a:prstGeom>
+          <a:noFill/>
+        </p:spPr>
+        <p:txBody>
+          <a:bodyPr wrap="square">
+            <a:spAutoFit/>
+          </a:bodyPr>
+          <a:lstStyle/>
+          <a:p>
+            <a:pPr algn="l">
+              <a:defRPr sz="1300" b="0">
+                <a:solidFill>
+                  <a:srgbClr val="CCCCCC"/>
+                </a:solidFill>
+                <a:latin typeface="Microsoft YaHei"/>
+              </a:defRPr>
+            </a:pPr>
+            <a:r>
+              <a:t>待定</a:t>
+            </a:r>
+          </a:p>
+        </p:txBody>
+      </p:sp>
+      <p:sp>
+        <p:nvSpPr>
+          <p:cNvPr id="16" name="Rounded Rectangle 15"/>
+          <p:cNvSpPr/>
+          <p:nvPr/>
+        </p:nvSpPr>
+        <p:spPr>
+          <a:xfrm>
+            <a:off x="9235440" y="1645920"/>
+            <a:ext cx="2560320" cy="1828800"/>
+          </a:xfrm>
+          <a:prstGeom prst="roundRect">
+            <a:avLst/>
+          </a:prstGeom>
+          <a:solidFill>
+            <a:srgbClr val="222E44"/>
+          </a:solidFill>
+          <a:ln w="12700">
+            <a:solidFill>
+              <a:srgbClr val="B8860B"/>
+            </a:solidFill>
+          </a:ln>
+        </p:spPr>
+        <p:style>
+          <a:lnRef idx="1">
+            <a:schemeClr val="accent1"/>
+          </a:lnRef>
+          <a:fillRef idx="3">
+            <a:schemeClr val="accent1"/>
+          </a:fillRef>
+          <a:effectRef idx="2">
+            <a:schemeClr val="accent1"/>
+          </a:effectRef>
+          <a:fontRef idx="minor">
+            <a:schemeClr val="lt1"/>
+          </a:fontRef>
+        </p:style>
+        <p:txBody>
+          <a:bodyPr rtlCol="0" anchor="ctr"/>
+          <a:lstStyle/>
+          <a:p>
+            <a:pPr algn="ctr"/>
+          </a:p>
+        </p:txBody>
+      </p:sp>
+      <p:sp>
+        <p:nvSpPr>
+          <p:cNvPr id="17" name="TextBox 16"/>
+          <p:cNvSpPr txBox="1"/>
+          <p:nvPr/>
+        </p:nvSpPr>
+        <p:spPr>
+          <a:xfrm>
+            <a:off x="9509760" y="1828800"/>
+            <a:ext cx="2011680" cy="457200"/>
+          </a:xfrm>
+          <a:prstGeom prst="rect">
+            <a:avLst/>
+          </a:prstGeom>
+          <a:noFill/>
+        </p:spPr>
+        <p:txBody>
+          <a:bodyPr wrap="square">
+            <a:spAutoFit/>
+          </a:bodyPr>
+          <a:lstStyle/>
+          <a:p>
+            <a:pPr algn="l">
+              <a:defRPr sz="1600" b="1">
+                <a:solidFill>
+                  <a:srgbClr val="D4A537"/>
+                </a:solidFill>
+                <a:latin typeface="Microsoft YaHei"/>
+              </a:defRPr>
+            </a:pPr>
+            <a:r>
+              <a:t>👤 首席运营官</a:t>
+            </a:r>
+          </a:p>
+        </p:txBody>
+      </p:sp>
+      <p:sp>
+        <p:nvSpPr>
+          <p:cNvPr id="18" name="TextBox 17"/>
+          <p:cNvSpPr txBox="1"/>
+          <p:nvPr/>
+        </p:nvSpPr>
+        <p:spPr>
+          <a:xfrm>
+            <a:off x="9509760" y="2286000"/>
+            <a:ext cx="2011680" cy="1005840"/>
+          </a:xfrm>
+          <a:prstGeom prst="rect">
+            <a:avLst/>
+          </a:prstGeom>
+          <a:noFill/>
+        </p:spPr>
+        <p:txBody>
+          <a:bodyPr wrap="square">
+            <a:spAutoFit/>
+          </a:bodyPr>
+          <a:lstStyle/>
+          <a:p>
+            <a:pPr algn="l">
+              <a:defRPr sz="1300" b="0">
+                <a:solidFill>
+                  <a:srgbClr val="CCCCCC"/>
+                </a:solidFill>
+                <a:latin typeface="Microsoft YaHei"/>
+              </a:defRPr>
+            </a:pPr>
+            <a:r>
+              <a:t>待定</a:t>
+            </a:r>
+          </a:p>
+        </p:txBody>
+      </p:sp>
+      <p:sp>
+        <p:nvSpPr>
+          <p:cNvPr id="19" name="Rounded Rectangle 18"/>
+          <p:cNvSpPr/>
+          <p:nvPr/>
+        </p:nvSpPr>
+        <p:spPr>
+          <a:xfrm>
+            <a:off x="731520" y="3840480"/>
+            <a:ext cx="5029200" cy="1371600"/>
+          </a:xfrm>
+          <a:prstGeom prst="roundRect">
+            <a:avLst/>
+          </a:prstGeom>
+          <a:solidFill>
+            <a:srgbClr val="222E44"/>
+          </a:solidFill>
+          <a:ln w="12700">
+            <a:solidFill>
+              <a:srgbClr val="B8860B"/>
+            </a:solidFill>
+          </a:ln>
+        </p:spPr>
+        <p:style>
+          <a:lnRef idx="1">
+            <a:schemeClr val="accent1"/>
+          </a:lnRef>
+          <a:fillRef idx="3">
+            <a:schemeClr val="accent1"/>
+          </a:fillRef>
+          <a:effectRef idx="2">
+            <a:schemeClr val="accent1"/>
+          </a:effectRef>
+          <a:fontRef idx="minor">
+            <a:schemeClr val="lt1"/>
+          </a:fontRef>
+        </p:style>
+        <p:txBody>
+          <a:bodyPr rtlCol="0" anchor="ctr"/>
+          <a:lstStyle/>
+          <a:p>
+            <a:pPr algn="ctr"/>
+          </a:p>
+        </p:txBody>
+      </p:sp>
+      <p:sp>
+        <p:nvSpPr>
+          <p:cNvPr id="20" name="TextBox 19"/>
+          <p:cNvSpPr txBox="1"/>
+          <p:nvPr/>
+        </p:nvSpPr>
+        <p:spPr>
+          <a:xfrm>
+            <a:off x="1005840" y="4023360"/>
+            <a:ext cx="4480560" cy="457200"/>
+          </a:xfrm>
+          <a:prstGeom prst="rect">
+            <a:avLst/>
+          </a:prstGeom>
+          <a:noFill/>
+        </p:spPr>
+        <p:txBody>
+          <a:bodyPr wrap="square">
+            <a:spAutoFit/>
+          </a:bodyPr>
+          <a:lstStyle/>
+          <a:p>
+            <a:pPr algn="l">
+              <a:defRPr sz="1600" b="1">
+                <a:solidFill>
+                  <a:srgbClr val="D4A537"/>
+                </a:solidFill>
+                <a:latin typeface="Microsoft YaHei"/>
+              </a:defRPr>
+            </a:pPr>
+            <a:r>
+              <a:t>顾问团队（拟邀）</a:t>
+            </a:r>
+          </a:p>
+        </p:txBody>
+      </p:sp>
+      <p:sp>
+        <p:nvSpPr>
+          <p:cNvPr id="21" name="TextBox 20"/>
+          <p:cNvSpPr txBox="1"/>
+          <p:nvPr/>
+        </p:nvSpPr>
+        <p:spPr>
+          <a:xfrm>
+            <a:off x="1005840" y="4480560"/>
+            <a:ext cx="4480560" cy="548640"/>
+          </a:xfrm>
+          <a:prstGeom prst="rect">
+            <a:avLst/>
+          </a:prstGeom>
+          <a:noFill/>
+        </p:spPr>
+        <p:txBody>
+          <a:bodyPr wrap="square">
+            <a:spAutoFit/>
+          </a:bodyPr>
+          <a:lstStyle/>
+          <a:p>
+            <a:pPr algn="l">
+              <a:defRPr sz="1300" b="0">
+                <a:solidFill>
+                  <a:srgbClr val="CCCCCC"/>
+                </a:solidFill>
+                <a:latin typeface="Microsoft YaHei"/>
+              </a:defRPr>
+            </a:pPr>
+            <a:r>
+              <a:t>区块链 / 金融 / 法律领域知名专家与机构顾问</a:t>
+            </a:r>
+            <a:br/>
+            <a:r>
+              <a:t>具体名单待定</a:t>
+            </a:r>
+          </a:p>
+        </p:txBody>
+      </p:sp>
+      <p:sp>
+        <p:nvSpPr>
+          <p:cNvPr id="22" name="Rounded Rectangle 21"/>
+          <p:cNvSpPr/>
+          <p:nvPr/>
+        </p:nvSpPr>
+        <p:spPr>
+          <a:xfrm>
+            <a:off x="6217920" y="3840480"/>
+            <a:ext cx="5029200" cy="1371600"/>
+          </a:xfrm>
+          <a:prstGeom prst="roundRect">
+            <a:avLst/>
+          </a:prstGeom>
+          <a:solidFill>
+            <a:srgbClr val="222E44"/>
+          </a:solidFill>
+          <a:ln w="12700">
+            <a:solidFill>
+              <a:srgbClr val="B8860B"/>
+            </a:solidFill>
+          </a:ln>
+        </p:spPr>
+        <p:style>
+          <a:lnRef idx="1">
+            <a:schemeClr val="accent1"/>
+          </a:lnRef>
+          <a:fillRef idx="3">
+            <a:schemeClr val="accent1"/>
+          </a:fillRef>
+          <a:effectRef idx="2">
+            <a:schemeClr val="accent1"/>
+          </a:effectRef>
+          <a:fontRef idx="minor">
+            <a:schemeClr val="lt1"/>
+          </a:fontRef>
+        </p:style>
+        <p:txBody>
+          <a:bodyPr rtlCol="0" anchor="ctr"/>
+          <a:lstStyle/>
+          <a:p>
+            <a:pPr algn="ctr"/>
+          </a:p>
+        </p:txBody>
+      </p:sp>
+      <p:sp>
+        <p:nvSpPr>
+          <p:cNvPr id="23" name="TextBox 22"/>
+          <p:cNvSpPr txBox="1"/>
+          <p:nvPr/>
+        </p:nvSpPr>
+        <p:spPr>
+          <a:xfrm>
+            <a:off x="6492240" y="4023360"/>
+            <a:ext cx="4480560" cy="457200"/>
+          </a:xfrm>
+          <a:prstGeom prst="rect">
+            <a:avLst/>
+          </a:prstGeom>
+          <a:noFill/>
+        </p:spPr>
+        <p:txBody>
+          <a:bodyPr wrap="square">
+            <a:spAutoFit/>
+          </a:bodyPr>
+          <a:lstStyle/>
+          <a:p>
+            <a:pPr algn="l">
+              <a:defRPr sz="1600" b="1">
+                <a:solidFill>
+                  <a:srgbClr val="D4A537"/>
+                </a:solidFill>
+                <a:latin typeface="Microsoft YaHei"/>
+              </a:defRPr>
+            </a:pPr>
+            <a:r>
+              <a:t>技术合作伙伴（拟邀）</a:t>
+            </a:r>
+          </a:p>
+        </p:txBody>
+      </p:sp>
+      <p:sp>
+        <p:nvSpPr>
+          <p:cNvPr id="24" name="TextBox 23"/>
+          <p:cNvSpPr txBox="1"/>
+          <p:nvPr/>
+        </p:nvSpPr>
+        <p:spPr>
+          <a:xfrm>
+            <a:off x="6492240" y="4480560"/>
+            <a:ext cx="4480560" cy="548640"/>
+          </a:xfrm>
+          <a:prstGeom prst="rect">
+            <a:avLst/>
+          </a:prstGeom>
+          <a:noFill/>
+        </p:spPr>
+        <p:txBody>
+          <a:bodyPr wrap="square">
+            <a:spAutoFit/>
+          </a:bodyPr>
+          <a:lstStyle/>
+          <a:p>
+            <a:pPr algn="l">
+              <a:defRPr sz="1300" b="0">
+                <a:solidFill>
+                  <a:srgbClr val="CCCCCC"/>
+                </a:solidFill>
+                <a:latin typeface="Microsoft YaHei"/>
+              </a:defRPr>
+            </a:pPr>
+            <a:r>
+              <a:t>币安链生态合作伙伴</a:t>
+            </a:r>
+            <a:br/>
+            <a:r>
+              <a:t>区块链安全审计机构</a:t>
+            </a:r>
+            <a:br/>
+            <a:r>
+              <a:t>做市商与流动性合作伙伴</a:t>
+            </a:r>
+          </a:p>
+        </p:txBody>
+      </p:sp>
+      <p:sp>
+        <p:nvSpPr>
+          <p:cNvPr id="25" name="Rectangle 24"/>
+          <p:cNvSpPr/>
+          <p:nvPr/>
+        </p:nvSpPr>
+        <p:spPr>
+          <a:xfrm>
+            <a:off x="731520" y="5486400"/>
+            <a:ext cx="10698480" cy="457200"/>
+          </a:xfrm>
+          <a:prstGeom prst="rect">
+            <a:avLst/>
+          </a:prstGeom>
+          <a:solidFill>
+            <a:srgbClr val="222E44"/>
+          </a:solidFill>
+          <a:ln>
+            <a:noFill/>
+          </a:ln>
+        </p:spPr>
+        <p:style>
+          <a:lnRef idx="1">
+            <a:schemeClr val="accent1"/>
+          </a:lnRef>
+          <a:fillRef idx="3">
+            <a:schemeClr val="accent1"/>
+          </a:fillRef>
+          <a:effectRef idx="2">
+            <a:schemeClr val="accent1"/>
+          </a:effectRef>
+          <a:fontRef idx="minor">
+            <a:schemeClr val="lt1"/>
+          </a:fontRef>
+        </p:style>
+        <p:txBody>
+          <a:bodyPr rtlCol="0" anchor="ctr"/>
+          <a:lstStyle/>
+          <a:p>
+            <a:pPr algn="ctr"/>
+          </a:p>
+        </p:txBody>
+      </p:sp>
+      <p:sp>
+        <p:nvSpPr>
+          <p:cNvPr id="26" name="TextBox 25"/>
+          <p:cNvSpPr txBox="1"/>
+          <p:nvPr/>
+        </p:nvSpPr>
+        <p:spPr>
+          <a:xfrm>
+            <a:off x="914400" y="5532120"/>
+            <a:ext cx="10332720" cy="365760"/>
+          </a:xfrm>
+          <a:prstGeom prst="rect">
+            <a:avLst/>
+          </a:prstGeom>
+          <a:noFill/>
+        </p:spPr>
+        <p:txBody>
+          <a:bodyPr wrap="square">
+            <a:spAutoFit/>
+          </a:bodyPr>
+          <a:lstStyle/>
+          <a:p>
+            <a:pPr algn="ctr">
+              <a:defRPr sz="1400" b="0">
+                <a:solidFill>
+                  <a:srgbClr val="CCCCCC"/>
+                </a:solidFill>
+                <a:latin typeface="Microsoft YaHei"/>
+              </a:defRPr>
+            </a:pPr>
+            <a:r>
+              <a:t>团队成员信息持续更新中，敬请期待</a:t>
+            </a:r>
+          </a:p>
+        </p:txBody>
+      </p:sp>
+    </p:spTree>
+  </p:cSld>
+  <p:clrMapOvr>
+    <a:masterClrMapping/>
+  </p:clrMapOvr>
+</p:sld>
+</file>
+
+<file path=ppt/slides/slide16.xml><?xml version="1.0" encoding="utf-8"?>
 <p:sld xmlns:a="http://schemas.openxmlformats.org/drawingml/2006/main" xmlns:p="http://schemas.openxmlformats.org/presentationml/2006/main" xmlns:r="http://schemas.openxmlformats.org/officeDocument/2006/relationships">
   <p:cSld>
     <p:bg>
@@ -9212,7 +10384,7 @@
               </a:defRPr>
             </a:pPr>
             <a:r>
-              <a:t>15/15</a:t>
+              <a:t>16/16</a:t>
             </a:r>
           </a:p>
         </p:txBody>
@@ -9432,7 +10604,7 @@
               </a:defRPr>
             </a:pPr>
             <a:r>
-              <a:t>2/15</a:t>
+              <a:t>2/16</a:t>
             </a:r>
           </a:p>
         </p:txBody>
@@ -10174,7 +11346,7 @@
               </a:defRPr>
             </a:pPr>
             <a:r>
-              <a:t>3/15</a:t>
+              <a:t>3/16</a:t>
             </a:r>
           </a:p>
         </p:txBody>
@@ -10896,7 +12068,7 @@
               </a:defRPr>
             </a:pPr>
             <a:r>
-              <a:t>4/15</a:t>
+              <a:t>4/16</a:t>
             </a:r>
           </a:p>
         </p:txBody>
@@ -11733,7 +12905,7 @@
               </a:defRPr>
             </a:pPr>
             <a:r>
-              <a:t>5/15</a:t>
+              <a:t>5/16</a:t>
             </a:r>
           </a:p>
         </p:txBody>
@@ -12560,7 +13732,7 @@
               </a:defRPr>
             </a:pPr>
             <a:r>
-              <a:t>6/15</a:t>
+              <a:t>6/16</a:t>
             </a:r>
           </a:p>
         </p:txBody>
@@ -13518,7 +14690,7 @@
               </a:defRPr>
             </a:pPr>
             <a:r>
-              <a:t>7/15</a:t>
+              <a:t>7/16</a:t>
             </a:r>
           </a:p>
         </p:txBody>
@@ -15034,7 +16206,7 @@
               </a:defRPr>
             </a:pPr>
             <a:r>
-              <a:t>8/15</a:t>
+              <a:t>8/16</a:t>
             </a:r>
           </a:p>
         </p:txBody>
@@ -15240,7 +16412,7 @@
               </a:defRPr>
             </a:pPr>
             <a:r>
-              <a:t>⛏️ 质押挖矿</a:t>
+              <a:t>💰 合伙人分润</a:t>
             </a:r>
           </a:p>
         </p:txBody>
@@ -15276,15 +16448,15 @@
               </a:defRPr>
             </a:pPr>
             <a:r>
-              <a:t>质押GPC获取</a:t>
+              <a:t>质押GPC成为平台合伙人</a:t>
             </a:r>
             <a:br/>
             <a:r>
-              <a:t>平台收益分红</a:t>
+              <a:t>分享交易所手续费收益</a:t>
             </a:r>
             <a:br/>
             <a:r>
-              <a:t>灵活选择锁仓期限</a:t>
+              <a:t>持有越多分润越高</a:t>
             </a:r>
           </a:p>
         </p:txBody>
@@ -16004,7 +17176,7 @@
               </a:defRPr>
             </a:pPr>
             <a:r>
-              <a:t>9/15</a:t>
+              <a:t>9/16</a:t>
             </a:r>
           </a:p>
         </p:txBody>

--- a/projects/金孔雀交易所PPT/金孔雀交易所_Golden_Peacock_Exchange.pptx
+++ b/projects/金孔雀交易所PPT/金孔雀交易所_Golden_Peacock_Exchange.pptx
@@ -3472,7 +3472,7 @@
               </a:defRPr>
             </a:pPr>
             <a:r>
-              <a:t>数字资产交易平台  —  GPC平台通证首发</a:t>
+              <a:t>综合性合规资产交易平台  —  GPC平台通证首发</a:t>
             </a:r>
           </a:p>
         </p:txBody>
@@ -3508,7 +3508,7 @@
               </a:defRPr>
             </a:pPr>
             <a:r>
-              <a:t>链接数字资产 · 开启价值新纪元</a:t>
+              <a:t>链接多元价值 · 开启资产新纪元</a:t>
             </a:r>
           </a:p>
         </p:txBody>
@@ -3728,7 +3728,7 @@
               </a:defRPr>
             </a:pPr>
             <a:r>
-              <a:t>Partner Revenue Sharing — Stake GPC, Share Exchange Fees</a:t>
+              <a:t>Partner Revenue Sharing</a:t>
             </a:r>
           </a:p>
         </p:txBody>
@@ -3924,7 +3924,7 @@
               </a:defRPr>
             </a:pPr>
             <a:r>
-              <a:t>持有并质押GPC，即可成为金孔雀交易所合伙人，每日分享平台交易手续费收益。质押越多，分润越高。</a:t>
+              <a:t>持有并质押GPC，即可成为金孔雀交易所合伙人，按月分享平台全部交易手续费收益。质押越多，分润越高。</a:t>
             </a:r>
           </a:p>
         </p:txBody>
@@ -4194,7 +4194,7 @@
               </a:defRPr>
             </a:pPr>
             <a:r>
-              <a:t>每日汇总结算</a:t>
+              <a:t>月终汇总结算</a:t>
             </a:r>
           </a:p>
         </p:txBody>
@@ -4464,21 +4464,64 @@
               </a:defRPr>
             </a:pPr>
             <a:r>
-              <a:t>每日自动到账</a:t>
-            </a:r>
-          </a:p>
-        </p:txBody>
-      </p:sp>
-      <p:sp>
-        <p:nvSpPr>
-          <p:cNvPr id="24" name="TextBox 23"/>
-          <p:cNvSpPr txBox="1"/>
+              <a:t>按月自动到账</a:t>
+            </a:r>
+          </a:p>
+        </p:txBody>
+      </p:sp>
+      <p:sp>
+        <p:nvSpPr>
+          <p:cNvPr id="24" name="Rectangle 23"/>
+          <p:cNvSpPr/>
           <p:nvPr/>
         </p:nvSpPr>
         <p:spPr>
           <a:xfrm>
             <a:off x="731520" y="4114800"/>
-            <a:ext cx="10698480" cy="365760"/>
+            <a:ext cx="5029200" cy="1645920"/>
+          </a:xfrm>
+          <a:prstGeom prst="rect">
+            <a:avLst/>
+          </a:prstGeom>
+          <a:solidFill>
+            <a:srgbClr val="1A2A3E"/>
+          </a:solidFill>
+          <a:ln>
+            <a:noFill/>
+          </a:ln>
+        </p:spPr>
+        <p:style>
+          <a:lnRef idx="1">
+            <a:schemeClr val="accent1"/>
+          </a:lnRef>
+          <a:fillRef idx="3">
+            <a:schemeClr val="accent1"/>
+          </a:fillRef>
+          <a:effectRef idx="2">
+            <a:schemeClr val="accent1"/>
+          </a:effectRef>
+          <a:fontRef idx="minor">
+            <a:schemeClr val="lt1"/>
+          </a:fontRef>
+        </p:style>
+        <p:txBody>
+          <a:bodyPr rtlCol="0" anchor="ctr"/>
+          <a:lstStyle/>
+          <a:p>
+            <a:pPr algn="ctr"/>
+          </a:p>
+        </p:txBody>
+      </p:sp>
+      <p:sp>
+        <p:nvSpPr>
+          <p:cNvPr id="25" name="TextBox 24"/>
+          <p:cNvSpPr txBox="1"/>
+          <p:nvPr/>
+        </p:nvSpPr>
+        <p:spPr>
+          <a:xfrm>
+            <a:off x="914400" y="4206240"/>
+            <a:ext cx="4663440" cy="274320"/>
           </a:xfrm>
           <a:prstGeom prst="rect">
             <a:avLst/>
@@ -4492,7 +4535,7 @@
           <a:lstStyle/>
           <a:p>
             <a:pPr algn="l">
-              <a:defRPr sz="2000" b="1">
+              <a:defRPr sz="1600" b="1">
                 <a:solidFill>
                   <a:srgbClr val="D4A537"/>
                 </a:solidFill>
@@ -4500,14 +4543,101 @@
               </a:defRPr>
             </a:pPr>
             <a:r>
-              <a:t>合伙人等级</a:t>
-            </a:r>
-          </a:p>
-        </p:txBody>
-      </p:sp>
-      <p:sp>
-        <p:nvSpPr>
-          <p:cNvPr id="25" name="Rounded Rectangle 24"/>
+              <a:t>🔑 核心规则</a:t>
+            </a:r>
+          </a:p>
+        </p:txBody>
+      </p:sp>
+      <p:sp>
+        <p:nvSpPr>
+          <p:cNvPr id="26" name="TextBox 25"/>
+          <p:cNvSpPr txBox="1"/>
+          <p:nvPr/>
+        </p:nvSpPr>
+        <p:spPr>
+          <a:xfrm>
+            <a:off x="914400" y="4572000"/>
+            <a:ext cx="4663440" cy="1097280"/>
+          </a:xfrm>
+          <a:prstGeom prst="rect">
+            <a:avLst/>
+          </a:prstGeom>
+          <a:noFill/>
+        </p:spPr>
+        <p:txBody>
+          <a:bodyPr wrap="square">
+            <a:spAutoFit/>
+          </a:bodyPr>
+          <a:lstStyle/>
+          <a:p>
+            <a:pPr>
+              <a:spcAft>
+                <a:spcPts val="800"/>
+              </a:spcAft>
+              <a:defRPr sz="1300">
+                <a:solidFill>
+                  <a:srgbClr val="CCCCCC"/>
+                </a:solidFill>
+                <a:latin typeface="Microsoft YaHei"/>
+              </a:defRPr>
+            </a:pPr>
+            <a:r>
+              <a:t>▸ 合伙人锁仓周期：36个月</a:t>
+            </a:r>
+          </a:p>
+          <a:p>
+            <a:pPr>
+              <a:spcAft>
+                <a:spcPts val="800"/>
+              </a:spcAft>
+              <a:defRPr sz="1300">
+                <a:solidFill>
+                  <a:srgbClr val="CCCCCC"/>
+                </a:solidFill>
+                <a:latin typeface="Microsoft YaHei"/>
+              </a:defRPr>
+            </a:pPr>
+            <a:r>
+              <a:t>▸ 手续费结算方式：按月结算</a:t>
+            </a:r>
+          </a:p>
+          <a:p>
+            <a:pPr>
+              <a:spcAft>
+                <a:spcPts val="800"/>
+              </a:spcAft>
+              <a:defRPr sz="1300">
+                <a:solidFill>
+                  <a:srgbClr val="CCCCCC"/>
+                </a:solidFill>
+                <a:latin typeface="Microsoft YaHei"/>
+              </a:defRPr>
+            </a:pPr>
+            <a:r>
+              <a:t>▸ 分润比例按质押GPC数量分配</a:t>
+            </a:r>
+          </a:p>
+          <a:p>
+            <a:pPr>
+              <a:spcAft>
+                <a:spcPts val="800"/>
+              </a:spcAft>
+              <a:defRPr sz="1300">
+                <a:solidFill>
+                  <a:srgbClr val="CCCCCC"/>
+                </a:solidFill>
+                <a:latin typeface="Microsoft YaHei"/>
+              </a:defRPr>
+            </a:pPr>
+            <a:r>
+              <a:t>▸ 每月自动到账，无需手动领取</a:t>
+            </a:r>
+          </a:p>
+        </p:txBody>
+      </p:sp>
+      <p:sp>
+        <p:nvSpPr>
+          <p:cNvPr id="27" name="Rounded Rectangle 26"/>
           <p:cNvSpPr/>
           <p:nvPr/>
         </p:nvSpPr>
@@ -4552,7 +4682,7 @@
       </p:sp>
       <p:sp>
         <p:nvSpPr>
-          <p:cNvPr id="26" name="TextBox 25"/>
+          <p:cNvPr id="28" name="TextBox 27"/>
           <p:cNvSpPr txBox="1"/>
           <p:nvPr/>
         </p:nvSpPr>
@@ -4588,7 +4718,7 @@
       </p:sp>
       <p:sp>
         <p:nvSpPr>
-          <p:cNvPr id="27" name="TextBox 26"/>
+          <p:cNvPr id="29" name="TextBox 28"/>
           <p:cNvSpPr txBox="1"/>
           <p:nvPr/>
         </p:nvSpPr>
@@ -4625,7 +4755,7 @@
             </a:r>
             <a:br/>
             <a:r>
-              <a:t>• 锁6月 · 12月线性释放</a:t>
+              <a:t>• 锁仓36个月</a:t>
             </a:r>
             <a:br/>
             <a:r>
@@ -4636,7 +4766,7 @@
       </p:sp>
       <p:sp>
         <p:nvSpPr>
-          <p:cNvPr id="28" name="Rounded Rectangle 27"/>
+          <p:cNvPr id="30" name="Rounded Rectangle 29"/>
           <p:cNvSpPr/>
           <p:nvPr/>
         </p:nvSpPr>
@@ -4681,7 +4811,7 @@
       </p:sp>
       <p:sp>
         <p:nvSpPr>
-          <p:cNvPr id="29" name="TextBox 28"/>
+          <p:cNvPr id="31" name="TextBox 30"/>
           <p:cNvSpPr txBox="1"/>
           <p:nvPr/>
         </p:nvSpPr>
@@ -4717,7 +4847,7 @@
       </p:sp>
       <p:sp>
         <p:nvSpPr>
-          <p:cNvPr id="30" name="TextBox 29"/>
+          <p:cNvPr id="32" name="TextBox 31"/>
           <p:cNvSpPr txBox="1"/>
           <p:nvPr/>
         </p:nvSpPr>
@@ -4754,11 +4884,11 @@
             </a:r>
             <a:br/>
             <a:r>
-              <a:t>• 灵活质押，随时退出</a:t>
+              <a:t>• 质押越多，分润越高</a:t>
             </a:r>
             <a:br/>
             <a:r>
-              <a:t>• 质押越多，分润越高</a:t>
+              <a:t>• 灵活的参与机制</a:t>
             </a:r>
           </a:p>
         </p:txBody>
@@ -4863,7 +4993,7 @@
               </a:defRPr>
             </a:pPr>
             <a:r>
-              <a:t>未来战略 — RWA资产生态</a:t>
+              <a:t>多元资产战略布局</a:t>
             </a:r>
           </a:p>
         </p:txBody>
@@ -4899,7 +5029,7 @@
               </a:defRPr>
             </a:pPr>
             <a:r>
-              <a:t>Future Vision: RWA Asset Ecosystem</a:t>
+              <a:t>Multi-Asset Strategy</a:t>
             </a:r>
           </a:p>
         </p:txBody>
@@ -4992,7 +5122,7 @@
         <p:spPr>
           <a:xfrm>
             <a:off x="731520" y="1645920"/>
-            <a:ext cx="10698480" cy="1097280"/>
+            <a:ext cx="10698480" cy="914400"/>
           </a:xfrm>
           <a:prstGeom prst="roundRect">
             <a:avLst/>
@@ -5073,7 +5203,7 @@
         <p:spPr>
           <a:xfrm>
             <a:off x="1005840" y="2286000"/>
-            <a:ext cx="10149840" cy="274320"/>
+            <a:ext cx="10149840" cy="91440"/>
           </a:xfrm>
           <a:prstGeom prst="rect">
             <a:avLst/>
@@ -5095,7 +5225,7 @@
               </a:defRPr>
             </a:pPr>
             <a:r>
-              <a:t>金孔雀交易所以数字资产交易平台为起点，长远目标是成为东南亚领先的RWA（真实世界资产）发行与交易平台</a:t>
+              <a:t>金孔雀交易所定位为综合性合规资产交易平台，实现三大资产类别的有机融合 — 一个平台，多种合规资产选择</a:t>
             </a:r>
           </a:p>
         </p:txBody>
@@ -5108,18 +5238,18 @@
         </p:nvSpPr>
         <p:spPr>
           <a:xfrm>
-            <a:off x="731520" y="3017520"/>
-            <a:ext cx="2560320" cy="2011680"/>
+            <a:off x="731520" y="2834640"/>
+            <a:ext cx="3383280" cy="2286000"/>
           </a:xfrm>
           <a:prstGeom prst="roundRect">
             <a:avLst/>
           </a:prstGeom>
           <a:solidFill>
-            <a:srgbClr val="222E44"/>
+            <a:srgbClr val="1A2A3E"/>
           </a:solidFill>
           <a:ln w="12700">
             <a:solidFill>
-              <a:srgbClr val="B8860B"/>
+              <a:srgbClr val="D4A537"/>
             </a:solidFill>
           </a:ln>
         </p:spPr>
@@ -5153,22 +5283,22 @@
         </p:nvSpPr>
         <p:spPr>
           <a:xfrm>
-            <a:off x="1005840" y="3200400"/>
-            <a:ext cx="2011680" cy="457200"/>
-          </a:xfrm>
-          <a:prstGeom prst="rect">
-            <a:avLst/>
-          </a:prstGeom>
-          <a:noFill/>
-        </p:spPr>
-        <p:txBody>
-          <a:bodyPr wrap="square">
-            <a:spAutoFit/>
-          </a:bodyPr>
-          <a:lstStyle/>
-          <a:p>
-            <a:pPr algn="l">
-              <a:defRPr sz="1600" b="1">
+            <a:off x="731520" y="2926080"/>
+            <a:ext cx="3383280" cy="457200"/>
+          </a:xfrm>
+          <a:prstGeom prst="rect">
+            <a:avLst/>
+          </a:prstGeom>
+          <a:noFill/>
+        </p:spPr>
+        <p:txBody>
+          <a:bodyPr wrap="square">
+            <a:spAutoFit/>
+          </a:bodyPr>
+          <a:lstStyle/>
+          <a:p>
+            <a:pPr algn="ctr">
+              <a:defRPr sz="1800" b="1">
                 <a:solidFill>
                   <a:srgbClr val="D4A537"/>
                 </a:solidFill>
@@ -5176,7 +5306,7 @@
               </a:defRPr>
             </a:pPr>
             <a:r>
-              <a:t>🏠 房地产RWA</a:t>
+              <a:t>💹 股票证券资产</a:t>
             </a:r>
           </a:p>
         </p:txBody>
@@ -5189,22 +5319,22 @@
         </p:nvSpPr>
         <p:spPr>
           <a:xfrm>
-            <a:off x="1005840" y="3657600"/>
-            <a:ext cx="2011680" cy="1188720"/>
-          </a:xfrm>
-          <a:prstGeom prst="rect">
-            <a:avLst/>
-          </a:prstGeom>
-          <a:noFill/>
-        </p:spPr>
-        <p:txBody>
-          <a:bodyPr wrap="square">
-            <a:spAutoFit/>
-          </a:bodyPr>
-          <a:lstStyle/>
-          <a:p>
-            <a:pPr algn="l">
-              <a:defRPr sz="1300" b="0">
+            <a:off x="914400" y="3474720"/>
+            <a:ext cx="3017520" cy="1371600"/>
+          </a:xfrm>
+          <a:prstGeom prst="rect">
+            <a:avLst/>
+          </a:prstGeom>
+          <a:noFill/>
+        </p:spPr>
+        <p:txBody>
+          <a:bodyPr wrap="square">
+            <a:spAutoFit/>
+          </a:bodyPr>
+          <a:lstStyle/>
+          <a:p>
+            <a:pPr algn="ctr">
+              <a:defRPr sz="1400" b="0">
                 <a:solidFill>
                   <a:srgbClr val="CCCCCC"/>
                 </a:solidFill>
@@ -5212,11 +5342,19 @@
               </a:defRPr>
             </a:pPr>
             <a:r>
-              <a:t>泰国芭提雅\高端房地产项目</a:t>
+              <a:t>合规通道接入</a:t>
             </a:r>
             <a:br/>
             <a:r>
-              <a:t>（规划中）</a:t>
+              <a:t>主流市场股票/ETF/证券交易</a:t>
+            </a:r>
+            <a:br/>
+            <a:r>
+              <a:t>多元化投资选择</a:t>
+            </a:r>
+            <a:br/>
+            <a:r>
+              <a:t>遵循各国证券法规</a:t>
             </a:r>
           </a:p>
         </p:txBody>
@@ -5229,18 +5367,18 @@
         </p:nvSpPr>
         <p:spPr>
           <a:xfrm>
-            <a:off x="3566160" y="3017520"/>
-            <a:ext cx="2560320" cy="2011680"/>
+            <a:off x="4480559" y="2834640"/>
+            <a:ext cx="3383280" cy="2286000"/>
           </a:xfrm>
           <a:prstGeom prst="roundRect">
             <a:avLst/>
           </a:prstGeom>
           <a:solidFill>
-            <a:srgbClr val="222E44"/>
+            <a:srgbClr val="1A2A3E"/>
           </a:solidFill>
           <a:ln w="12700">
             <a:solidFill>
-              <a:srgbClr val="B8860B"/>
+              <a:srgbClr val="D4A537"/>
             </a:solidFill>
           </a:ln>
         </p:spPr>
@@ -5274,22 +5412,22 @@
         </p:nvSpPr>
         <p:spPr>
           <a:xfrm>
-            <a:off x="3840480" y="3200400"/>
-            <a:ext cx="2011680" cy="457200"/>
-          </a:xfrm>
-          <a:prstGeom prst="rect">
-            <a:avLst/>
-          </a:prstGeom>
-          <a:noFill/>
-        </p:spPr>
-        <p:txBody>
-          <a:bodyPr wrap="square">
-            <a:spAutoFit/>
-          </a:bodyPr>
-          <a:lstStyle/>
-          <a:p>
-            <a:pPr algn="l">
-              <a:defRPr sz="1600" b="1">
+            <a:off x="4480559" y="2926080"/>
+            <a:ext cx="3383280" cy="457200"/>
+          </a:xfrm>
+          <a:prstGeom prst="rect">
+            <a:avLst/>
+          </a:prstGeom>
+          <a:noFill/>
+        </p:spPr>
+        <p:txBody>
+          <a:bodyPr wrap="square">
+            <a:spAutoFit/>
+          </a:bodyPr>
+          <a:lstStyle/>
+          <a:p>
+            <a:pPr algn="ctr">
+              <a:defRPr sz="1800" b="1">
                 <a:solidFill>
                   <a:srgbClr val="D4A537"/>
                 </a:solidFill>
@@ -5297,7 +5435,7 @@
               </a:defRPr>
             </a:pPr>
             <a:r>
-              <a:t>📦 多资产扩展</a:t>
+              <a:t>⚡ 数字资产</a:t>
             </a:r>
           </a:p>
         </p:txBody>
@@ -5310,22 +5448,22 @@
         </p:nvSpPr>
         <p:spPr>
           <a:xfrm>
-            <a:off x="3840480" y="3657600"/>
-            <a:ext cx="2011680" cy="1188720"/>
-          </a:xfrm>
-          <a:prstGeom prst="rect">
-            <a:avLst/>
-          </a:prstGeom>
-          <a:noFill/>
-        </p:spPr>
-        <p:txBody>
-          <a:bodyPr wrap="square">
-            <a:spAutoFit/>
-          </a:bodyPr>
-          <a:lstStyle/>
-          <a:p>
-            <a:pPr algn="l">
-              <a:defRPr sz="1300" b="0">
+            <a:off x="4663439" y="3474720"/>
+            <a:ext cx="3017520" cy="1371600"/>
+          </a:xfrm>
+          <a:prstGeom prst="rect">
+            <a:avLst/>
+          </a:prstGeom>
+          <a:noFill/>
+        </p:spPr>
+        <p:txBody>
+          <a:bodyPr wrap="square">
+            <a:spAutoFit/>
+          </a:bodyPr>
+          <a:lstStyle/>
+          <a:p>
+            <a:pPr algn="ctr">
+              <a:defRPr sz="1400" b="0">
                 <a:solidFill>
                   <a:srgbClr val="CCCCCC"/>
                 </a:solidFill>
@@ -5333,15 +5471,19 @@
               </a:defRPr>
             </a:pPr>
             <a:r>
-              <a:t>商业地产/基建</a:t>
+              <a:t>主流加密货币现货交易</a:t>
             </a:r>
             <a:br/>
             <a:r>
-              <a:t>消费金融/供应链</a:t>
+              <a:t>BNB Chain生态集成</a:t>
             </a:r>
             <a:br/>
             <a:r>
-              <a:t>等多类型RWA</a:t>
+              <a:t>安全快捷的数字资产管理</a:t>
+            </a:r>
+            <a:br/>
+            <a:r>
+              <a:t>合规KYC/AML体系</a:t>
             </a:r>
           </a:p>
         </p:txBody>
@@ -5354,18 +5496,18 @@
         </p:nvSpPr>
         <p:spPr>
           <a:xfrm>
-            <a:off x="6400800" y="3017520"/>
-            <a:ext cx="2560320" cy="2011680"/>
+            <a:off x="8229600" y="2834640"/>
+            <a:ext cx="3383280" cy="2286000"/>
           </a:xfrm>
           <a:prstGeom prst="roundRect">
             <a:avLst/>
           </a:prstGeom>
           <a:solidFill>
-            <a:srgbClr val="222E44"/>
+            <a:srgbClr val="1A2A3E"/>
           </a:solidFill>
           <a:ln w="12700">
             <a:solidFill>
-              <a:srgbClr val="B8860B"/>
+              <a:srgbClr val="D4A537"/>
             </a:solidFill>
           </a:ln>
         </p:spPr>
@@ -5399,22 +5541,22 @@
         </p:nvSpPr>
         <p:spPr>
           <a:xfrm>
-            <a:off x="6675120" y="3200400"/>
-            <a:ext cx="2011680" cy="457200"/>
-          </a:xfrm>
-          <a:prstGeom prst="rect">
-            <a:avLst/>
-          </a:prstGeom>
-          <a:noFill/>
-        </p:spPr>
-        <p:txBody>
-          <a:bodyPr wrap="square">
-            <a:spAutoFit/>
-          </a:bodyPr>
-          <a:lstStyle/>
-          <a:p>
-            <a:pPr algn="l">
-              <a:defRPr sz="1600" b="1">
+            <a:off x="8229600" y="2926080"/>
+            <a:ext cx="3383280" cy="457200"/>
+          </a:xfrm>
+          <a:prstGeom prst="rect">
+            <a:avLst/>
+          </a:prstGeom>
+          <a:noFill/>
+        </p:spPr>
+        <p:txBody>
+          <a:bodyPr wrap="square">
+            <a:spAutoFit/>
+          </a:bodyPr>
+          <a:lstStyle/>
+          <a:p>
+            <a:pPr algn="ctr">
+              <a:defRPr sz="1800" b="1">
                 <a:solidFill>
                   <a:srgbClr val="D4A537"/>
                 </a:solidFill>
@@ -5422,7 +5564,7 @@
               </a:defRPr>
             </a:pPr>
             <a:r>
-              <a:t>🌏 区域拓展</a:t>
+              <a:t>🏠 RWA现实资产</a:t>
             </a:r>
           </a:p>
         </p:txBody>
@@ -5435,22 +5577,22 @@
         </p:nvSpPr>
         <p:spPr>
           <a:xfrm>
-            <a:off x="6675120" y="3657600"/>
-            <a:ext cx="2011680" cy="1188720"/>
-          </a:xfrm>
-          <a:prstGeom prst="rect">
-            <a:avLst/>
-          </a:prstGeom>
-          <a:noFill/>
-        </p:spPr>
-        <p:txBody>
-          <a:bodyPr wrap="square">
-            <a:spAutoFit/>
-          </a:bodyPr>
-          <a:lstStyle/>
-          <a:p>
-            <a:pPr algn="l">
-              <a:defRPr sz="1300" b="0">
+            <a:off x="8412480" y="3474720"/>
+            <a:ext cx="3017520" cy="1371600"/>
+          </a:xfrm>
+          <a:prstGeom prst="rect">
+            <a:avLst/>
+          </a:prstGeom>
+          <a:noFill/>
+        </p:spPr>
+        <p:txBody>
+          <a:bodyPr wrap="square">
+            <a:spAutoFit/>
+          </a:bodyPr>
+          <a:lstStyle/>
+          <a:p>
+            <a:pPr algn="ctr">
+              <a:defRPr sz="1400" b="0">
                 <a:solidFill>
                   <a:srgbClr val="CCCCCC"/>
                 </a:solidFill>
@@ -5458,153 +5600,32 @@
               </a:defRPr>
             </a:pPr>
             <a:r>
-              <a:t>曼谷/普吉岛</a:t>
+              <a:t>房地产等实体资产代币化</a:t>
             </a:r>
             <a:br/>
             <a:r>
-              <a:t>越南/印尼/菲律宾</a:t>
+              <a:t>合规发行与交易平台</a:t>
             </a:r>
             <a:br/>
             <a:r>
-              <a:t>东南亚全覆盖</a:t>
-            </a:r>
-          </a:p>
-        </p:txBody>
-      </p:sp>
-      <p:sp>
-        <p:nvSpPr>
-          <p:cNvPr id="19" name="Rounded Rectangle 18"/>
+              <a:t>多类型RWA资产支持</a:t>
+            </a:r>
+            <a:br/>
+            <a:r>
+              <a:t>东南亚区域优先布局</a:t>
+            </a:r>
+          </a:p>
+        </p:txBody>
+      </p:sp>
+      <p:sp>
+        <p:nvSpPr>
+          <p:cNvPr id="19" name="Rectangle 18"/>
           <p:cNvSpPr/>
           <p:nvPr/>
         </p:nvSpPr>
         <p:spPr>
           <a:xfrm>
-            <a:off x="9235440" y="3017520"/>
-            <a:ext cx="2560320" cy="2011680"/>
-          </a:xfrm>
-          <a:prstGeom prst="roundRect">
-            <a:avLst/>
-          </a:prstGeom>
-          <a:solidFill>
-            <a:srgbClr val="222E44"/>
-          </a:solidFill>
-          <a:ln w="12700">
-            <a:solidFill>
-              <a:srgbClr val="B8860B"/>
-            </a:solidFill>
-          </a:ln>
-        </p:spPr>
-        <p:style>
-          <a:lnRef idx="1">
-            <a:schemeClr val="accent1"/>
-          </a:lnRef>
-          <a:fillRef idx="3">
-            <a:schemeClr val="accent1"/>
-          </a:fillRef>
-          <a:effectRef idx="2">
-            <a:schemeClr val="accent1"/>
-          </a:effectRef>
-          <a:fontRef idx="minor">
-            <a:schemeClr val="lt1"/>
-          </a:fontRef>
-        </p:style>
-        <p:txBody>
-          <a:bodyPr rtlCol="0" anchor="ctr"/>
-          <a:lstStyle/>
-          <a:p>
-            <a:pPr algn="ctr"/>
-          </a:p>
-        </p:txBody>
-      </p:sp>
-      <p:sp>
-        <p:nvSpPr>
-          <p:cNvPr id="20" name="TextBox 19"/>
-          <p:cNvSpPr txBox="1"/>
-          <p:nvPr/>
-        </p:nvSpPr>
-        <p:spPr>
-          <a:xfrm>
-            <a:off x="9509760" y="3200400"/>
-            <a:ext cx="2011680" cy="457200"/>
-          </a:xfrm>
-          <a:prstGeom prst="rect">
-            <a:avLst/>
-          </a:prstGeom>
-          <a:noFill/>
-        </p:spPr>
-        <p:txBody>
-          <a:bodyPr wrap="square">
-            <a:spAutoFit/>
-          </a:bodyPr>
-          <a:lstStyle/>
-          <a:p>
-            <a:pPr algn="l">
-              <a:defRPr sz="1600" b="1">
-                <a:solidFill>
-                  <a:srgbClr val="D4A537"/>
-                </a:solidFill>
-                <a:latin typeface="Microsoft YaHei"/>
-              </a:defRPr>
-            </a:pPr>
-            <a:r>
-              <a:t>🏛️ 合规体系</a:t>
-            </a:r>
-          </a:p>
-        </p:txBody>
-      </p:sp>
-      <p:sp>
-        <p:nvSpPr>
-          <p:cNvPr id="21" name="TextBox 20"/>
-          <p:cNvSpPr txBox="1"/>
-          <p:nvPr/>
-        </p:nvSpPr>
-        <p:spPr>
-          <a:xfrm>
-            <a:off x="9509760" y="3657600"/>
-            <a:ext cx="2011680" cy="1188720"/>
-          </a:xfrm>
-          <a:prstGeom prst="rect">
-            <a:avLst/>
-          </a:prstGeom>
-          <a:noFill/>
-        </p:spPr>
-        <p:txBody>
-          <a:bodyPr wrap="square">
-            <a:spAutoFit/>
-          </a:bodyPr>
-          <a:lstStyle/>
-          <a:p>
-            <a:pPr algn="l">
-              <a:defRPr sz="1300" b="0">
-                <a:solidFill>
-                  <a:srgbClr val="CCCCCC"/>
-                </a:solidFill>
-                <a:latin typeface="Microsoft YaHei"/>
-              </a:defRPr>
-            </a:pPr>
-            <a:r>
-              <a:t>目标区域合规牌照</a:t>
-            </a:r>
-            <a:br/>
-            <a:r>
-              <a:t>国际审计标准</a:t>
-            </a:r>
-            <a:br/>
-            <a:r>
-              <a:t>投资者权益保护</a:t>
-            </a:r>
-          </a:p>
-        </p:txBody>
-      </p:sp>
-      <p:sp>
-        <p:nvSpPr>
-          <p:cNvPr id="22" name="Rectangle 21"/>
-          <p:cNvSpPr/>
-          <p:nvPr/>
-        </p:nvSpPr>
-        <p:spPr>
-          <a:xfrm>
-            <a:off x="731520" y="5303520"/>
+            <a:off x="731520" y="5394960"/>
             <a:ext cx="10698480" cy="548640"/>
           </a:xfrm>
           <a:prstGeom prst="rect">
@@ -5641,13 +5662,13 @@
       </p:sp>
       <p:sp>
         <p:nvSpPr>
-          <p:cNvPr id="23" name="TextBox 22"/>
-          <p:cNvSpPr txBox="1"/>
-          <p:nvPr/>
-        </p:nvSpPr>
-        <p:spPr>
-          <a:xfrm>
-            <a:off x="914400" y="5349240"/>
+          <p:cNvPr id="20" name="TextBox 19"/>
+          <p:cNvSpPr txBox="1"/>
+          <p:nvPr/>
+        </p:nvSpPr>
+        <p:spPr>
+          <a:xfrm>
+            <a:off x="914400" y="5440680"/>
             <a:ext cx="10332720" cy="365760"/>
           </a:xfrm>
           <a:prstGeom prst="rect">
@@ -5664,13 +5685,13 @@
             <a:pPr algn="ctr">
               <a:defRPr sz="1400" b="0">
                 <a:solidFill>
-                  <a:srgbClr val="E74C3C"/>
-                </a:solidFill>
-                <a:latin typeface="Microsoft YaHei"/>
-              </a:defRPr>
-            </a:pPr>
-            <a:r>
-              <a:t>⚠ RWA为第二阶段战略规划，当前阶段聚焦平台建设与GPC平台通证生态发展</a:t>
+                  <a:srgbClr val="F0D060"/>
+                </a:solidFill>
+                <a:latin typeface="Microsoft YaHei"/>
+              </a:defRPr>
+            </a:pPr>
+            <a:r>
+              <a:t>⚖ 所有资产类别均严格遵循合规框架，持合法牌照运营，用户资产安全第一</a:t>
             </a:r>
           </a:p>
         </p:txBody>
@@ -6536,7 +6557,7 @@
               </a:defRPr>
             </a:pPr>
             <a:r>
-              <a:t>• 更多交易对上线</a:t>
+              <a:t>• 股票证券交易通道上线</a:t>
             </a:r>
           </a:p>
           <a:p>
@@ -6552,7 +6573,7 @@
               </a:defRPr>
             </a:pPr>
             <a:r>
-              <a:t>• 用户规模增长</a:t>
+              <a:t>• RWA资产试点启动</a:t>
             </a:r>
           </a:p>
           <a:p>
@@ -6568,7 +6589,7 @@
               </a:defRPr>
             </a:pPr>
             <a:r>
-              <a:t>• RWA试点项目启动</a:t>
+              <a:t>• 用户规模快速增长</a:t>
             </a:r>
           </a:p>
         </p:txBody>
@@ -6719,7 +6740,7 @@
               </a:defRPr>
             </a:pPr>
             <a:r>
-              <a:t>RWA全面布局</a:t>
+              <a:t>多元资产全面布局</a:t>
             </a:r>
           </a:p>
         </p:txBody>
@@ -6758,7 +6779,7 @@
               </a:defRPr>
             </a:pPr>
             <a:r>
-              <a:t>• RWA资产发行平台上线</a:t>
+              <a:t>• 多类型RWA资产全面开放</a:t>
             </a:r>
           </a:p>
           <a:p>
@@ -6774,7 +6795,7 @@
               </a:defRPr>
             </a:pPr>
             <a:r>
-              <a:t>• 多类型RWA资产开放</a:t>
+              <a:t>• 全面合规证券交易体系</a:t>
             </a:r>
           </a:p>
           <a:p>
@@ -6790,7 +6811,7 @@
               </a:defRPr>
             </a:pPr>
             <a:r>
-              <a:t>• 成为东南亚RWA标杆</a:t>
+              <a:t>• 成为东南亚多元资产交易标杆</a:t>
             </a:r>
           </a:p>
           <a:p>
@@ -6806,7 +6827,7 @@
               </a:defRPr>
             </a:pPr>
             <a:r>
-              <a:t>• 建立行业标准</a:t>
+              <a:t>• 建立行业合规标准</a:t>
             </a:r>
           </a:p>
         </p:txBody>
@@ -7151,7 +7172,7 @@
             </a:r>
             <a:br/>
             <a:r>
-              <a:t>📊 定期审计与透明度报告</a:t>
+              <a:t>📊 证券交易合规牌照</a:t>
             </a:r>
             <a:br/>
             <a:r>
@@ -8741,7 +8762,7 @@
         <p:spPr>
           <a:xfrm>
             <a:off x="914400" y="4572000"/>
-            <a:ext cx="10332720" cy="822960"/>
+            <a:ext cx="10332720" cy="914400"/>
           </a:xfrm>
           <a:prstGeom prst="rect">
             <a:avLst/>
@@ -8799,6 +8820,22 @@
             </a:pPr>
             <a:r>
               <a:t>▸ 用户资产独立托管 — 平台运营资金与用户资产严格分离</a:t>
+            </a:r>
+          </a:p>
+          <a:p>
+            <a:pPr>
+              <a:spcAft>
+                <a:spcPts val="800"/>
+              </a:spcAft>
+              <a:defRPr sz="1400">
+                <a:solidFill>
+                  <a:srgbClr val="CCCCCC"/>
+                </a:solidFill>
+                <a:latin typeface="Microsoft YaHei"/>
+              </a:defRPr>
+            </a:pPr>
+            <a:r>
+              <a:t>▸ 多元资产专属风控 — 股票/数字资产/RWA分别设立独立风控模型</a:t>
             </a:r>
           </a:p>
         </p:txBody>
@@ -10034,7 +10071,7 @@
               </a:defRPr>
             </a:pPr>
             <a:r>
-              <a:t>▸ ✅ 基于BNB Chain的数字资产交易平台</a:t>
+              <a:t>▸ ✅ 基于BNB Chain的综合性合规资产交易平台</a:t>
             </a:r>
           </a:p>
           <a:p>
@@ -10050,7 +10087,7 @@
               </a:defRPr>
             </a:pPr>
             <a:r>
-              <a:t>▸ ✅ 原生平台通证 GPC（总发行量100亿枚，BEP-20标准）</a:t>
+              <a:t>▸ ✅ 原生平台通证 GPC（总发行量10亿枚，BEP-20标准）</a:t>
             </a:r>
           </a:p>
           <a:p>
@@ -10066,7 +10103,7 @@
               </a:defRPr>
             </a:pPr>
             <a:r>
-              <a:t>▸ ✅ 现货交易 · 质押挖矿 · Launchpad · 未来RWA</a:t>
+              <a:t>▸ ✅ 股票证券 · 数字资产 · RWA 三类合规资产一体化交易</a:t>
             </a:r>
           </a:p>
           <a:p>
@@ -10082,7 +10119,7 @@
               </a:defRPr>
             </a:pPr>
             <a:r>
-              <a:t>▸ ✅ 安全合规 · 透明可信 · 全球普惠</a:t>
+              <a:t>▸ ✅ 安全合规 · 透明可信 · 多元资产 · 全球普惠</a:t>
             </a:r>
           </a:p>
         </p:txBody>
@@ -10305,7 +10342,7 @@
               </a:defRPr>
             </a:pPr>
             <a:r>
-              <a:t>「链接数字资产 · 开启价值新纪元」</a:t>
+              <a:t>「链接多元价值 · 开启资产新纪元」</a:t>
             </a:r>
           </a:p>
         </p:txBody>
@@ -10683,7 +10720,7 @@
               </a:defRPr>
             </a:pPr>
             <a:r>
-              <a:t>新一代数字资产交易平台 — 基于币安链（BNB Chain）构建，原生平台通证GPC驱动生态</a:t>
+              <a:t>多种合规复合型资产的综合性交易平台 — 基于币安链（BNB Chain）构建，原生平台通证GPC驱动生态</a:t>
             </a:r>
           </a:p>
         </p:txBody>
@@ -10800,15 +10837,15 @@
               </a:defRPr>
             </a:pPr>
             <a:r>
-              <a:t>数字资产交易平台</a:t>
+              <a:t>综合性合规资产交易平台</a:t>
             </a:r>
             <a:br/>
             <a:r>
-              <a:t>支持现货交易、质押挖矿</a:t>
+              <a:t>支持股票证券/数字资产</a:t>
             </a:r>
             <a:br/>
             <a:r>
-              <a:t>Launchpad等核心功能</a:t>
+              <a:t>质押/Launchpad/RWA</a:t>
             </a:r>
           </a:p>
         </p:txBody>
@@ -10925,7 +10962,7 @@
               </a:defRPr>
             </a:pPr>
             <a:r>
-              <a:t>总发行量 10,000,000,000</a:t>
+              <a:t>总发行量 1,000,000,000</a:t>
             </a:r>
             <a:br/>
             <a:r>
@@ -11014,7 +11051,7 @@
               </a:defRPr>
             </a:pPr>
             <a:r>
-              <a:t>🔮 未来展望</a:t>
+              <a:t>🔮 战略布局</a:t>
             </a:r>
           </a:p>
         </p:txBody>
@@ -11050,11 +11087,15 @@
               </a:defRPr>
             </a:pPr>
             <a:r>
-              <a:t>东南亚领先的数字资产交易生态</a:t>
+              <a:t>多元合规资产交易</a:t>
             </a:r>
             <a:br/>
             <a:r>
-              <a:t>RWA不动产代币化（规划中）</a:t>
+              <a:t>股票证券+RWA+</a:t>
+            </a:r>
+            <a:br/>
+            <a:r>
+              <a:t>数字资产三位一体</a:t>
             </a:r>
           </a:p>
         </p:txBody>
@@ -11126,7 +11167,7 @@
               </a:defRPr>
             </a:pPr>
             <a:r>
-              <a:t>构建安全、高效、透明的数字资产交易生态，让全球用户自由参与数字资产价值流通</a:t>
+              <a:t>构建安全、合规、透明的多元化资产交易生态，让全球用户自由参与多种合规资产的价值流通</a:t>
             </a:r>
           </a:p>
         </p:txBody>
@@ -11427,7 +11468,7 @@
               </a:defRPr>
             </a:pPr>
             <a:r>
-              <a:t>📊 全球加密市场爆发</a:t>
+              <a:t>📊 合规资产数字化浪潮</a:t>
             </a:r>
           </a:p>
         </p:txBody>
@@ -11463,19 +11504,19 @@
               </a:defRPr>
             </a:pPr>
             <a:r>
-              <a:t>• 全球加密用户超5亿</a:t>
+              <a:t>• 传统股票证券数字化交易规模持续增长</a:t>
             </a:r>
             <a:br/>
             <a:r>
-              <a:t>• 数字资产交易量持续增长</a:t>
+              <a:t>• 机构资金加速入场</a:t>
             </a:r>
             <a:br/>
             <a:r>
-              <a:t>• 合规化趋势加速</a:t>
+              <a:t>• 全球合规化趋势明显</a:t>
             </a:r>
             <a:br/>
             <a:r>
-              <a:t>• 机构资金大举入场</a:t>
+              <a:t>• 多元化资产配置需求旺盛</a:t>
             </a:r>
           </a:p>
         </p:txBody>
@@ -11556,7 +11597,7 @@
               </a:defRPr>
             </a:pPr>
             <a:r>
-              <a:t>🌏 东南亚数字浪潮</a:t>
+              <a:t>🌏 东南亚多元金融浪潮</a:t>
             </a:r>
           </a:p>
         </p:txBody>
@@ -11600,7 +11641,7 @@
             </a:r>
             <a:br/>
             <a:r>
-              <a:t>• 传统金融覆盖不足</a:t>
+              <a:t>• 多元化合规资产需求爆发</a:t>
             </a:r>
             <a:br/>
             <a:r>
@@ -11685,7 +11726,7 @@
               </a:defRPr>
             </a:pPr>
             <a:r>
-              <a:t>🏆 交易所竞争格局</a:t>
+              <a:t>🏆 平台竞争壁垒</a:t>
             </a:r>
           </a:p>
         </p:txBody>
@@ -11721,19 +11762,19 @@
               </a:defRPr>
             </a:pPr>
             <a:r>
-              <a:t>• 区域化交易所崛起</a:t>
+              <a:t>• 合规+多元化资产+本地化 = 核心壁垒</a:t>
             </a:r>
             <a:br/>
             <a:r>
-              <a:t>• BNB Chain生态快速增长</a:t>
+              <a:t>• 单一资产交易平台已不满足需求</a:t>
             </a:r>
             <a:br/>
             <a:r>
-              <a:t>• 合规+本地化 = 核心壁垒</a:t>
+              <a:t>• GPC平台币驱动生态飞轮</a:t>
             </a:r>
             <a:br/>
             <a:r>
-              <a:t>• GPC平台币驱动生态飞轮</a:t>
+              <a:t>• 股票证券+数字资产+RWA三位一体</a:t>
             </a:r>
           </a:p>
         </p:txBody>
@@ -11848,7 +11889,7 @@
               </a:defRPr>
             </a:pPr>
             <a:r>
-              <a:t>RWA（真实世界资产代币化）市场预计2030年达数万亿级别 — 金孔雀交易所将以此作为第二阶段核心战略</a:t>
+              <a:t>RWA（真实世界资产代币化）市场预计2030年达数万亿级别 — 金孔雀交易所将此作为核心战略方向之一</a:t>
             </a:r>
           </a:p>
         </p:txBody>
@@ -12524,7 +12565,7 @@
               </a:defRPr>
             </a:pPr>
             <a:r>
-              <a:t>🌐 全球普惠</a:t>
+              <a:t>🌐 多元合规</a:t>
             </a:r>
           </a:p>
         </p:txBody>
@@ -12560,15 +12601,15 @@
               </a:defRPr>
             </a:pPr>
             <a:r>
-              <a:t>低门槛参与</a:t>
+              <a:t>覆盖股票证券</a:t>
             </a:r>
             <a:br/>
             <a:r>
-              <a:t>多语言支持</a:t>
+              <a:t>数字资产、RWA</a:t>
             </a:r>
             <a:br/>
             <a:r>
-              <a:t>多元化金融服务</a:t>
+              <a:t>多资产类别合规交易</a:t>
             </a:r>
           </a:p>
         </p:txBody>
@@ -12986,7 +13027,7 @@
               </a:defRPr>
             </a:pPr>
             <a:r>
-              <a:t>💱 现货交易</a:t>
+              <a:t>💹 股票/证券交易</a:t>
             </a:r>
           </a:p>
         </p:txBody>
@@ -13022,15 +13063,15 @@
               </a:defRPr>
             </a:pPr>
             <a:r>
-              <a:t>主流交易对支持</a:t>
+              <a:t>合规股票证券交易通道</a:t>
             </a:r>
             <a:br/>
             <a:r>
-              <a:t>订单簿深度好</a:t>
+              <a:t>多元化投资选择</a:t>
             </a:r>
             <a:br/>
             <a:r>
-              <a:t>专业级交易界面</a:t>
+              <a:t>主流市场接入</a:t>
             </a:r>
           </a:p>
         </p:txBody>
@@ -13155,7 +13196,7 @@
             </a:r>
             <a:br/>
             <a:r>
-              <a:t>年化收益可观</a:t>
+              <a:t>按月手续费结算</a:t>
             </a:r>
           </a:p>
         </p:txBody>
@@ -13397,15 +13438,15 @@
               </a:defRPr>
             </a:pPr>
             <a:r>
-              <a:t>第二阶段开放</a:t>
+              <a:t>现实资产代币化</a:t>
             </a:r>
             <a:br/>
             <a:r>
-              <a:t>实体资产代币化</a:t>
+              <a:t>合规发行交易</a:t>
             </a:r>
             <a:br/>
             <a:r>
-              <a:t>合规发行交易平台</a:t>
+              <a:t>多类型资产支持</a:t>
             </a:r>
           </a:p>
         </p:txBody>
@@ -13467,6 +13508,22 @@
             <a:spAutoFit/>
           </a:bodyPr>
           <a:lstStyle/>
+          <a:p>
+            <a:pPr>
+              <a:spcAft>
+                <a:spcPts val="800"/>
+              </a:spcAft>
+              <a:defRPr sz="1400">
+                <a:solidFill>
+                  <a:srgbClr val="CCCCCC"/>
+                </a:solidFill>
+                <a:latin typeface="Microsoft YaHei"/>
+              </a:defRPr>
+            </a:pPr>
+            <a:r>
+              <a:t>▸ 数字资产现货交易 — 主流交易对，订单簿深度，专业级交易界面</a:t>
+            </a:r>
+          </a:p>
           <a:p>
             <a:pPr>
               <a:spcAft>
@@ -14103,7 +14160,7 @@
             </a:r>
             <a:br/>
             <a:r>
-              <a:t>未来：RWA发行标准</a:t>
+              <a:t>RWA发行标准</a:t>
             </a:r>
           </a:p>
         </p:txBody>
@@ -14309,7 +14366,7 @@
               </a:defRPr>
             </a:pPr>
             <a:r>
-              <a:t>💳 钱包服务</a:t>
+              <a:t>💳 资产管理系统</a:t>
             </a:r>
           </a:p>
         </p:txBody>
@@ -14349,7 +14406,7 @@
             </a:r>
             <a:br/>
             <a:r>
-              <a:t>GPC资产管理</a:t>
+              <a:t>证券资产托管</a:t>
             </a:r>
             <a:br/>
             <a:r>
@@ -14807,7 +14864,7 @@
               </a:defRPr>
             </a:pPr>
             <a:r>
-              <a:t>代币符号：GPC  |  总发行量：10,000,000,000  |  标准：BEP-20  |  公链：BNB Chain</a:t>
+              <a:t>代币符号：GPC  |  总发行量：1,000,000,000  |  标准：BEP-20  |  公链：BNB Chain</a:t>
             </a:r>
           </a:p>
         </p:txBody>
@@ -14997,7 +15054,7 @@
                         </a:defRPr>
                       </a:pPr>
                       <a:r>
-                        <a:t>60亿</a:t>
+                        <a:t>6亿</a:t>
                       </a:r>
                     </a:p>
                   </a:txBody>
@@ -15095,7 +15152,7 @@
                         </a:defRPr>
                       </a:pPr>
                       <a:r>
-                        <a:t>15亿</a:t>
+                        <a:t>1.5亿</a:t>
                       </a:r>
                     </a:p>
                   </a:txBody>
@@ -15193,7 +15250,7 @@
                         </a:defRPr>
                       </a:pPr>
                       <a:r>
-                        <a:t>10亿</a:t>
+                        <a:t>1亿</a:t>
                       </a:r>
                     </a:p>
                   </a:txBody>
@@ -15291,7 +15348,7 @@
                         </a:defRPr>
                       </a:pPr>
                       <a:r>
-                        <a:t>2亿</a:t>
+                        <a:t>2000万</a:t>
                       </a:r>
                     </a:p>
                   </a:txBody>
@@ -15315,7 +15372,7 @@
                         </a:defRPr>
                       </a:pPr>
                       <a:r>
-                        <a:t>锁12个月，分24月线性释放</a:t>
+                        <a:t>锁36个月，分36月线性释放</a:t>
                       </a:r>
                     </a:p>
                   </a:txBody>
@@ -15389,7 +15446,7 @@
                         </a:defRPr>
                       </a:pPr>
                       <a:r>
-                        <a:t>1亿</a:t>
+                        <a:t>1000万</a:t>
                       </a:r>
                     </a:p>
                   </a:txBody>
@@ -15413,7 +15470,7 @@
                         </a:defRPr>
                       </a:pPr>
                       <a:r>
-                        <a:t>锁6个月，分12月线性释放</a:t>
+                        <a:t>锁36个月</a:t>
                       </a:r>
                     </a:p>
                   </a:txBody>
@@ -15487,7 +15544,7 @@
                         </a:defRPr>
                       </a:pPr>
                       <a:r>
-                        <a:t>5亿</a:t>
+                        <a:t>5000万</a:t>
                       </a:r>
                     </a:p>
                   </a:txBody>
@@ -15585,7 +15642,7 @@
                         </a:defRPr>
                       </a:pPr>
                       <a:r>
-                        <a:t>7亿</a:t>
+                        <a:t>7000万</a:t>
                       </a:r>
                     </a:p>
                   </a:txBody>
@@ -15770,7 +15827,7 @@
               </a:defRPr>
             </a:pPr>
             <a:r>
-              <a:t>10,000,000,000</a:t>
+              <a:t>1,000,000,000</a:t>
             </a:r>
           </a:p>
         </p:txBody>
@@ -16452,7 +16509,7 @@
             </a:r>
             <a:br/>
             <a:r>
-              <a:t>分享交易所手续费收益</a:t>
+              <a:t>按月分享交易所手续费</a:t>
             </a:r>
             <a:br/>
             <a:r>
@@ -16948,7 +17005,7 @@
               </a:defRPr>
             </a:pPr>
             <a:r>
-              <a:t>平台生态增长驱动</a:t>
+              <a:t>多元化资产生态增长驱动</a:t>
             </a:r>
             <a:br/>
             <a:r>
@@ -17329,7 +17386,7 @@
               </a:defRPr>
             </a:pPr>
             <a:r>
-              <a:t>🔒 锁仓12个月</a:t>
+              <a:t>🔒 锁仓36个月</a:t>
             </a:r>
           </a:p>
         </p:txBody>
@@ -17365,11 +17422,11 @@
               </a:defRPr>
             </a:pPr>
             <a:r>
-              <a:t>第13-36个月线性释放</a:t>
+              <a:t>第1-36个月线性释放</a:t>
             </a:r>
             <a:br/>
             <a:r>
-              <a:t>每月释放约0.083%</a:t>
+              <a:t>每月释放约0.056%</a:t>
             </a:r>
           </a:p>
         </p:txBody>
@@ -17522,7 +17579,7 @@
               </a:defRPr>
             </a:pPr>
             <a:r>
-              <a:t>🔒 锁仓6个月</a:t>
+              <a:t>🔒 锁仓36个月</a:t>
             </a:r>
           </a:p>
         </p:txBody>
@@ -17558,11 +17615,11 @@
               </a:defRPr>
             </a:pPr>
             <a:r>
-              <a:t>第7-18个月线性释放</a:t>
+              <a:t>第1-36个月分批释放</a:t>
             </a:r>
             <a:br/>
             <a:r>
-              <a:t>每月释放约0.083%</a:t>
+              <a:t>持有人锁仓周期36个月</a:t>
             </a:r>
           </a:p>
         </p:txBody>
@@ -18040,7 +18097,7 @@
         </p:nvSpPr>
         <p:spPr>
           <a:xfrm>
-            <a:off x="731520" y="4846320"/>
+            <a:off x="1371600" y="4846320"/>
             <a:ext cx="2560320" cy="274320"/>
           </a:xfrm>
           <a:prstGeom prst="rect">
@@ -18076,7 +18133,7 @@
         </p:nvSpPr>
         <p:spPr>
           <a:xfrm>
-            <a:off x="731520" y="5120640"/>
+            <a:off x="1371600" y="5120640"/>
             <a:ext cx="2560320" cy="274320"/>
           </a:xfrm>
           <a:prstGeom prst="rect">
@@ -18116,7 +18173,7 @@
         </p:nvSpPr>
         <p:spPr>
           <a:xfrm>
-            <a:off x="731520" y="5394960"/>
+            <a:off x="1371600" y="5394960"/>
             <a:ext cx="2560320" cy="365760"/>
           </a:xfrm>
           <a:prstGeom prst="rect">
@@ -18152,7 +18209,7 @@
         </p:nvSpPr>
         <p:spPr>
           <a:xfrm>
-            <a:off x="3566160" y="4846320"/>
+            <a:off x="4206240" y="4846320"/>
             <a:ext cx="2560320" cy="274320"/>
           </a:xfrm>
           <a:prstGeom prst="rect">
@@ -18175,7 +18232,7 @@
               </a:defRPr>
             </a:pPr>
             <a:r>
-              <a:t>📌 T+6月</a:t>
+              <a:t>📌 T+持续</a:t>
             </a:r>
           </a:p>
         </p:txBody>
@@ -18188,7 +18245,7 @@
         </p:nvSpPr>
         <p:spPr>
           <a:xfrm>
-            <a:off x="3566160" y="5120640"/>
+            <a:off x="4206240" y="5120640"/>
             <a:ext cx="2560320" cy="274320"/>
           </a:xfrm>
           <a:prstGeom prst="rect">
@@ -18211,11 +18268,11 @@
               </a:defRPr>
             </a:pPr>
             <a:r>
-              <a:t>创世节点解锁</a:t>
+              <a:t>生态激励</a:t>
             </a:r>
             <a:br/>
             <a:r>
-              <a:t>开始线性释放</a:t>
+              <a:t>逐步释放</a:t>
             </a:r>
           </a:p>
         </p:txBody>
@@ -18228,7 +18285,7 @@
         </p:nvSpPr>
         <p:spPr>
           <a:xfrm>
-            <a:off x="3566160" y="5394960"/>
+            <a:off x="4206240" y="5394960"/>
             <a:ext cx="2560320" cy="365760"/>
           </a:xfrm>
           <a:prstGeom prst="rect">
@@ -18251,7 +18308,7 @@
               </a:defRPr>
             </a:pPr>
             <a:r>
-              <a:t>7-18月逐步解锁</a:t>
+              <a:t>按智能合约规则</a:t>
             </a:r>
           </a:p>
         </p:txBody>
@@ -18264,7 +18321,7 @@
         </p:nvSpPr>
         <p:spPr>
           <a:xfrm>
-            <a:off x="6400800" y="4846320"/>
+            <a:off x="7040880" y="4846320"/>
             <a:ext cx="2560320" cy="274320"/>
           </a:xfrm>
           <a:prstGeom prst="rect">
@@ -18287,7 +18344,7 @@
               </a:defRPr>
             </a:pPr>
             <a:r>
-              <a:t>📌 T+12月</a:t>
+              <a:t>📌 T+36月</a:t>
             </a:r>
           </a:p>
         </p:txBody>
@@ -18300,7 +18357,7 @@
         </p:nvSpPr>
         <p:spPr>
           <a:xfrm>
-            <a:off x="6400800" y="5120640"/>
+            <a:off x="7040880" y="5120640"/>
             <a:ext cx="2560320" cy="274320"/>
           </a:xfrm>
           <a:prstGeom prst="rect">
@@ -18323,11 +18380,11 @@
               </a:defRPr>
             </a:pPr>
             <a:r>
-              <a:t>团队解锁</a:t>
+              <a:t>创世节点/团队</a:t>
             </a:r>
             <a:br/>
             <a:r>
-              <a:t>开始线性释放</a:t>
+              <a:t>开始分批释放</a:t>
             </a:r>
           </a:p>
         </p:txBody>
@@ -18340,7 +18397,7 @@
         </p:nvSpPr>
         <p:spPr>
           <a:xfrm>
-            <a:off x="6400800" y="5394960"/>
+            <a:off x="7040880" y="5394960"/>
             <a:ext cx="2560320" cy="365760"/>
           </a:xfrm>
           <a:prstGeom prst="rect">
@@ -18363,119 +18420,7 @@
               </a:defRPr>
             </a:pPr>
             <a:r>
-              <a:t>13-36月逐步解锁</a:t>
-            </a:r>
-          </a:p>
-        </p:txBody>
-      </p:sp>
-      <p:sp>
-        <p:nvSpPr>
-          <p:cNvPr id="38" name="TextBox 37"/>
-          <p:cNvSpPr txBox="1"/>
-          <p:nvPr/>
-        </p:nvSpPr>
-        <p:spPr>
-          <a:xfrm>
-            <a:off x="9235440" y="4846320"/>
-            <a:ext cx="2560320" cy="274320"/>
-          </a:xfrm>
-          <a:prstGeom prst="rect">
-            <a:avLst/>
-          </a:prstGeom>
-          <a:noFill/>
-        </p:spPr>
-        <p:txBody>
-          <a:bodyPr wrap="square">
-            <a:spAutoFit/>
-          </a:bodyPr>
-          <a:lstStyle/>
-          <a:p>
-            <a:pPr algn="ctr">
-              <a:defRPr sz="1400" b="1">
-                <a:solidFill>
-                  <a:srgbClr val="2ECC71"/>
-                </a:solidFill>
-                <a:latin typeface="Microsoft YaHei"/>
-              </a:defRPr>
-            </a:pPr>
-            <a:r>
-              <a:t>📌 T+持续</a:t>
-            </a:r>
-          </a:p>
-        </p:txBody>
-      </p:sp>
-      <p:sp>
-        <p:nvSpPr>
-          <p:cNvPr id="39" name="TextBox 38"/>
-          <p:cNvSpPr txBox="1"/>
-          <p:nvPr/>
-        </p:nvSpPr>
-        <p:spPr>
-          <a:xfrm>
-            <a:off x="9235440" y="5120640"/>
-            <a:ext cx="2560320" cy="274320"/>
-          </a:xfrm>
-          <a:prstGeom prst="rect">
-            <a:avLst/>
-          </a:prstGeom>
-          <a:noFill/>
-        </p:spPr>
-        <p:txBody>
-          <a:bodyPr wrap="square">
-            <a:spAutoFit/>
-          </a:bodyPr>
-          <a:lstStyle/>
-          <a:p>
-            <a:pPr algn="ctr">
-              <a:defRPr sz="1200" b="0">
-                <a:solidFill>
-                  <a:srgbClr val="FFFFFF"/>
-                </a:solidFill>
-                <a:latin typeface="Microsoft YaHei"/>
-              </a:defRPr>
-            </a:pPr>
-            <a:r>
-              <a:t>生态激励</a:t>
-            </a:r>
-            <a:br/>
-            <a:r>
-              <a:t>逐步释放</a:t>
-            </a:r>
-          </a:p>
-        </p:txBody>
-      </p:sp>
-      <p:sp>
-        <p:nvSpPr>
-          <p:cNvPr id="40" name="TextBox 39"/>
-          <p:cNvSpPr txBox="1"/>
-          <p:nvPr/>
-        </p:nvSpPr>
-        <p:spPr>
-          <a:xfrm>
-            <a:off x="9235440" y="5394960"/>
-            <a:ext cx="2560320" cy="365760"/>
-          </a:xfrm>
-          <a:prstGeom prst="rect">
-            <a:avLst/>
-          </a:prstGeom>
-          <a:noFill/>
-        </p:spPr>
-        <p:txBody>
-          <a:bodyPr wrap="square">
-            <a:spAutoFit/>
-          </a:bodyPr>
-          <a:lstStyle/>
-          <a:p>
-            <a:pPr algn="ctr">
-              <a:defRPr sz="1100" b="0">
-                <a:solidFill>
-                  <a:srgbClr val="CCCCCC"/>
-                </a:solidFill>
-                <a:latin typeface="Microsoft YaHei"/>
-              </a:defRPr>
-            </a:pPr>
-            <a:r>
-              <a:t>按智能合约规则</a:t>
+              <a:t>36个月逐步解锁</a:t>
             </a:r>
           </a:p>
         </p:txBody>

--- a/projects/金孔雀交易所PPT/金孔雀交易所_Golden_Peacock_Exchange.pptx
+++ b/projects/金孔雀交易所PPT/金孔雀交易所_Golden_Peacock_Exchange.pptx
@@ -3924,7 +3924,7 @@
               </a:defRPr>
             </a:pPr>
             <a:r>
-              <a:t>持有并质押GPC，即可成为金孔雀交易所合伙人，按月分享平台全部交易手续费收益。质押越多，分润越高。</a:t>
+              <a:t>持有并质押GPC，即可成为金孔雀交易所合伙人，享有双重收益：全网提币手续费70%分红 + 5代下级交易手续费返佣。</a:t>
             </a:r>
           </a:p>
         </p:txBody>
@@ -4005,7 +4005,7 @@
               </a:defRPr>
             </a:pPr>
             <a:r>
-              <a:t>💹 交易所每笔交易</a:t>
+              <a:t>💹 交易所产生手续费</a:t>
             </a:r>
           </a:p>
         </p:txBody>
@@ -4041,7 +4041,7 @@
               </a:defRPr>
             </a:pPr>
             <a:r>
-              <a:t>产生手续费</a:t>
+              <a:t>提币手续费+交易手续费</a:t>
             </a:r>
           </a:p>
         </p:txBody>
@@ -4158,7 +4158,7 @@
               </a:defRPr>
             </a:pPr>
             <a:r>
-              <a:t>手续费收入池</a:t>
+              <a:t>双重收益分配</a:t>
             </a:r>
           </a:p>
         </p:txBody>
@@ -4194,7 +4194,7 @@
               </a:defRPr>
             </a:pPr>
             <a:r>
-              <a:t>月终汇总结算</a:t>
+              <a:t>70%提币费+5代返佣</a:t>
             </a:r>
           </a:p>
         </p:txBody>
@@ -4311,7 +4311,7 @@
               </a:defRPr>
             </a:pPr>
             <a:r>
-              <a:t>按GPC质押比例</a:t>
+              <a:t>月结汇总</a:t>
             </a:r>
           </a:p>
         </p:txBody>
@@ -4347,7 +4347,7 @@
               </a:defRPr>
             </a:pPr>
             <a:r>
-              <a:t>分配至合伙人</a:t>
+              <a:t>按质押比例+层级分配</a:t>
             </a:r>
           </a:p>
         </p:txBody>
@@ -4464,7 +4464,7 @@
               </a:defRPr>
             </a:pPr>
             <a:r>
-              <a:t>按月自动到账</a:t>
+              <a:t>每月自动到账</a:t>
             </a:r>
           </a:p>
         </p:txBody>
@@ -4543,7 +4543,7 @@
               </a:defRPr>
             </a:pPr>
             <a:r>
-              <a:t>🔑 核心规则</a:t>
+              <a:t>💰 双重收益体系</a:t>
             </a:r>
           </a:p>
         </p:txBody>
@@ -4582,7 +4582,7 @@
               </a:defRPr>
             </a:pPr>
             <a:r>
-              <a:t>▸ 合伙人锁仓周期：36个月</a:t>
+              <a:t>▸ 收益一：全网提币手续费的70%按GPC质押比例分配</a:t>
             </a:r>
           </a:p>
           <a:p>
@@ -4598,7 +4598,7 @@
               </a:defRPr>
             </a:pPr>
             <a:r>
-              <a:t>▸ 手续费结算方式：按月结算</a:t>
+              <a:t>▸ 收益二：5代以内下级用户交易手续费返佣</a:t>
             </a:r>
           </a:p>
           <a:p>
@@ -4614,7 +4614,7 @@
               </a:defRPr>
             </a:pPr>
             <a:r>
-              <a:t>▸ 分润比例按质押GPC数量分配</a:t>
+              <a:t>▸ 合伙人锁仓周期：36个月</a:t>
             </a:r>
           </a:p>
           <a:p>
@@ -4630,7 +4630,7 @@
               </a:defRPr>
             </a:pPr>
             <a:r>
-              <a:t>▸ 每月自动到账，无需手动领取</a:t>
+              <a:t>▸ 手续费结算方式：按月结算，自动到账</a:t>
             </a:r>
           </a:p>
         </p:txBody>
@@ -4755,6 +4755,10 @@
             </a:r>
             <a:br/>
             <a:r>
+              <a:t>• 享70%提币费+5代返佣</a:t>
+            </a:r>
+            <a:br/>
+            <a:r>
               <a:t>• 锁仓36个月</a:t>
             </a:r>
             <a:br/>
@@ -4880,15 +4884,19 @@
             </a:r>
             <a:br/>
             <a:r>
-              <a:t>• 按质押数量分配分润比例</a:t>
+              <a:t>• 按质押数量分配</a:t>
             </a:r>
             <a:br/>
             <a:r>
+              <a:t>• 享70%提币费+5代返佣</a:t>
+            </a:r>
+            <a:br/>
+            <a:r>
               <a:t>• 质押越多，分润越高</a:t>
             </a:r>
             <a:br/>
             <a:r>
-              <a:t>• 灵活的参与机制</a:t>
+              <a:t>• 锁仓36个月</a:t>
             </a:r>
           </a:p>
         </p:txBody>

--- a/projects/金孔雀交易所PPT/金孔雀交易所_Golden_Peacock_Exchange.pptx
+++ b/projects/金孔雀交易所PPT/金孔雀交易所_Golden_Peacock_Exchange.pptx
@@ -3924,7 +3924,7 @@
               </a:defRPr>
             </a:pPr>
             <a:r>
-              <a:t>持有并质押GPC，即可成为金孔雀交易所合伙人，享有双重收益：全网提币手续费70%分红 + 5代下级交易手续费返佣。</a:t>
+              <a:t>创世节点持有者需质押GPC获得收益；任何质押GPC的用户均可成为平台合伙人，直接享有双重收益：全网提币手续费70%分红 + 5代交易手续费奖励。</a:t>
             </a:r>
           </a:p>
         </p:txBody>
@@ -4535,7 +4535,7 @@
           <a:lstStyle/>
           <a:p>
             <a:pPr algn="l">
-              <a:defRPr sz="1600" b="1">
+              <a:defRPr sz="1500" b="1">
                 <a:solidFill>
                   <a:srgbClr val="D4A537"/>
                 </a:solidFill>
@@ -4543,7 +4543,7 @@
               </a:defRPr>
             </a:pPr>
             <a:r>
-              <a:t>💰 双重收益体系</a:t>
+              <a:t>💰 双重收益体系（全体平台合伙人享有）</a:t>
             </a:r>
           </a:p>
         </p:txBody>
@@ -4598,7 +4598,7 @@
               </a:defRPr>
             </a:pPr>
             <a:r>
-              <a:t>▸ 收益二：5代以内下级用户交易手续费返佣</a:t>
+              <a:t>▸ 收益二：5代以内下级用户交易手续费奖励</a:t>
             </a:r>
           </a:p>
           <a:p>
@@ -4614,7 +4614,7 @@
               </a:defRPr>
             </a:pPr>
             <a:r>
-              <a:t>▸ 合伙人锁仓周期：36个月</a:t>
+              <a:t>▸ 创世节点与合伙人均锁仓36个月</a:t>
             </a:r>
           </a:p>
           <a:p>
@@ -4630,7 +4630,7 @@
               </a:defRPr>
             </a:pPr>
             <a:r>
-              <a:t>▸ 手续费结算方式：按月结算，自动到账</a:t>
+              <a:t>▸ 按月结算，自动到账</a:t>
             </a:r>
           </a:p>
         </p:txBody>
@@ -4711,7 +4711,7 @@
               </a:defRPr>
             </a:pPr>
             <a:r>
-              <a:t>🌟 创世合伙人</a:t>
+              <a:t>🌟 创世节点</a:t>
             </a:r>
           </a:p>
         </p:txBody>
@@ -4747,23 +4747,23 @@
               </a:defRPr>
             </a:pPr>
             <a:r>
-              <a:t>• 创世节点持有者（1%配额）</a:t>
+              <a:t>• 持有创世节点配额的用户</a:t>
             </a:r>
             <a:br/>
             <a:r>
+              <a:t>• 需质押GPC才能获得收益</a:t>
+            </a:r>
+            <a:br/>
+            <a:r>
+              <a:t>• 享70%提币费+5代返佣</a:t>
+            </a:r>
+            <a:br/>
+            <a:r>
+              <a:t>• 锁仓36个月</a:t>
+            </a:r>
+            <a:br/>
+            <a:r>
               <a:t>• 最高分润比例</a:t>
-            </a:r>
-            <a:br/>
-            <a:r>
-              <a:t>• 享70%提币费+5代返佣</a:t>
-            </a:r>
-            <a:br/>
-            <a:r>
-              <a:t>• 锁仓36个月</a:t>
-            </a:r>
-            <a:br/>
-            <a:r>
-              <a:t>• 平台早期治理权</a:t>
             </a:r>
           </a:p>
         </p:txBody>
@@ -4844,7 +4844,7 @@
               </a:defRPr>
             </a:pPr>
             <a:r>
-              <a:t>💎 GPC质押合伙人</a:t>
+              <a:t>💎 平台合伙人</a:t>
             </a:r>
           </a:p>
         </p:txBody>
@@ -4880,11 +4880,11 @@
               </a:defRPr>
             </a:pPr>
             <a:r>
-              <a:t>• 任何持有并质押GPC的用户</a:t>
+              <a:t>• 任何质押GPC的用户均可成为</a:t>
             </a:r>
             <a:br/>
             <a:r>
-              <a:t>• 按质押数量分配</a:t>
+              <a:t>• 按质押数量分配收益</a:t>
             </a:r>
             <a:br/>
             <a:r>
